--- a/documentos/Apresentação Final do Projeto.pptx
+++ b/documentos/Apresentação Final do Projeto.pptx
@@ -256,7 +256,7 @@
   </p:defaultTextStyle>
   <p:extLst>
     <p:ext uri="GoogleSlidesCustomDataVersion2">
-      <go:slidesCustomData xmlns:go="http://customooxmlschemas.google.com/" r:id="rId14" roundtripDataSignature="AMtx7mg5X8hWXAQYxaOqS9CkX9SsizKoLg=="/>
+      <go:slidesCustomData xmlns:go="http://customooxmlschemas.google.com/" r:id="rId14" roundtripDataSignature="AMtx7mgAR1MEciNpGaqDigpQwYaHE4oKNg=="/>
     </p:ext>
   </p:extLst>
 </p:presentation>
@@ -1793,28 +1793,7 @@
               <a:buNone/>
             </a:pPr>
             <a:r>
-              <a:rPr lang="pt-BR"/>
-              <a:t>1 – Tela de abertura</a:t>
-            </a:r>
-            <a:endParaRPr/>
-          </a:p>
-          <a:p>
-            <a:pPr indent="0" lvl="0" marL="0" rtl="0" algn="l">
-              <a:lnSpc>
-                <a:spcPct val="100000"/>
-              </a:lnSpc>
-              <a:spcBef>
-                <a:spcPts val="0"/>
-              </a:spcBef>
-              <a:spcAft>
-                <a:spcPts val="0"/>
-              </a:spcAft>
-              <a:buSzPts val="1400"/>
-              <a:buNone/>
-            </a:pPr>
-            <a:r>
-              <a:rPr lang="pt-BR"/>
-              <a:t>Manter só a foto, tirar o login.</a:t>
+              <a:t/>
             </a:r>
             <a:endParaRPr/>
           </a:p>
@@ -1979,272 +1958,8 @@
               <a:buNone/>
             </a:pPr>
             <a:r>
-              <a:rPr b="0" i="0" lang="pt-BR" sz="1200" u="none" strike="noStrike">
-                <a:solidFill>
-                  <a:schemeClr val="dk1"/>
-                </a:solidFill>
-                <a:latin typeface="Arial"/>
-                <a:ea typeface="Arial"/>
-                <a:cs typeface="Arial"/>
-                <a:sym typeface="Arial"/>
-              </a:rPr>
-              <a:t>2 – Problema – colocar no slide</a:t>
+              <a:t/>
             </a:r>
-            <a:endParaRPr/>
-          </a:p>
-          <a:p>
-            <a:pPr indent="0" lvl="0" marL="0" rtl="0" algn="l">
-              <a:lnSpc>
-                <a:spcPct val="100000"/>
-              </a:lnSpc>
-              <a:spcBef>
-                <a:spcPts val="0"/>
-              </a:spcBef>
-              <a:spcAft>
-                <a:spcPts val="0"/>
-              </a:spcAft>
-              <a:buSzPts val="1400"/>
-              <a:buNone/>
-            </a:pPr>
-            <a:r>
-              <a:rPr b="0" i="0" lang="pt-BR" sz="1200" u="none" strike="noStrike">
-                <a:solidFill>
-                  <a:schemeClr val="dk1"/>
-                </a:solidFill>
-                <a:latin typeface="Arial"/>
-                <a:ea typeface="Arial"/>
-                <a:cs typeface="Arial"/>
-                <a:sym typeface="Arial"/>
-              </a:rPr>
-              <a:t>Frisar no slide.</a:t>
-            </a:r>
-            <a:endParaRPr b="0"/>
-          </a:p>
-          <a:p>
-            <a:pPr indent="0" lvl="0" marL="0" rtl="0" algn="l">
-              <a:lnSpc>
-                <a:spcPct val="100000"/>
-              </a:lnSpc>
-              <a:spcBef>
-                <a:spcPts val="0"/>
-              </a:spcBef>
-              <a:spcAft>
-                <a:spcPts val="0"/>
-              </a:spcAft>
-              <a:buSzPts val="1400"/>
-              <a:buNone/>
-            </a:pPr>
-            <a:r>
-              <a:rPr b="0" i="0" lang="pt-BR" sz="1200" u="none" strike="noStrike">
-                <a:solidFill>
-                  <a:schemeClr val="dk1"/>
-                </a:solidFill>
-                <a:latin typeface="Arial"/>
-                <a:ea typeface="Arial"/>
-                <a:cs typeface="Arial"/>
-                <a:sym typeface="Arial"/>
-              </a:rPr>
-              <a:t>Atualmente as escolas vinculadas ao Instituto Obeci, </a:t>
-            </a:r>
-            <a:r>
-              <a:rPr lang="pt-BR"/>
-              <a:t>na aplicação de seu processo documental, </a:t>
-            </a:r>
-            <a:r>
-              <a:rPr b="0" i="0" lang="pt-BR" sz="1200" u="none" strike="noStrike">
-                <a:solidFill>
-                  <a:schemeClr val="dk1"/>
-                </a:solidFill>
-                <a:latin typeface="Arial"/>
-                <a:ea typeface="Arial"/>
-                <a:cs typeface="Arial"/>
-                <a:sym typeface="Arial"/>
-              </a:rPr>
-              <a:t>operam em um ecossistema digital fragmentado, utilizando ferramentas generalistas como Google Suite, Canva e Miro para gerir processos </a:t>
-            </a:r>
-            <a:r>
-              <a:rPr lang="pt-BR"/>
-              <a:t>fundamentais</a:t>
-            </a:r>
-            <a:r>
-              <a:rPr b="0" i="0" lang="pt-BR" sz="1200" u="none" strike="noStrike">
-                <a:solidFill>
-                  <a:schemeClr val="dk1"/>
-                </a:solidFill>
-                <a:latin typeface="Arial"/>
-                <a:ea typeface="Arial"/>
-                <a:cs typeface="Arial"/>
-                <a:sym typeface="Arial"/>
-              </a:rPr>
-              <a:t>.</a:t>
-            </a:r>
-            <a:endParaRPr b="0"/>
-          </a:p>
-          <a:p>
-            <a:pPr indent="0" lvl="0" marL="0" rtl="0" algn="l">
-              <a:lnSpc>
-                <a:spcPct val="100000"/>
-              </a:lnSpc>
-              <a:spcBef>
-                <a:spcPts val="0"/>
-              </a:spcBef>
-              <a:spcAft>
-                <a:spcPts val="0"/>
-              </a:spcAft>
-              <a:buSzPts val="1400"/>
-              <a:buNone/>
-            </a:pPr>
-            <a:r>
-              <a:rPr b="0" i="0" lang="pt-BR" sz="1200" u="none" strike="noStrike">
-                <a:solidFill>
-                  <a:schemeClr val="dk1"/>
-                </a:solidFill>
-                <a:latin typeface="Arial"/>
-                <a:ea typeface="Arial"/>
-                <a:cs typeface="Arial"/>
-                <a:sym typeface="Arial"/>
-              </a:rPr>
-              <a:t>Isso gera dois problemas sistêmicos: </a:t>
-            </a:r>
-            <a:r>
-              <a:rPr b="1" i="0" lang="pt-BR" sz="1200" u="none" strike="noStrike">
-                <a:solidFill>
-                  <a:schemeClr val="dk1"/>
-                </a:solidFill>
-                <a:latin typeface="Arial"/>
-                <a:ea typeface="Arial"/>
-                <a:cs typeface="Arial"/>
-                <a:sym typeface="Arial"/>
-              </a:rPr>
-              <a:t>ineficiência operacional</a:t>
-            </a:r>
-            <a:r>
-              <a:rPr b="0" i="0" lang="pt-BR" sz="1200" u="none" strike="noStrike">
-                <a:solidFill>
-                  <a:schemeClr val="dk1"/>
-                </a:solidFill>
-                <a:latin typeface="Arial"/>
-                <a:ea typeface="Arial"/>
-                <a:cs typeface="Arial"/>
-                <a:sym typeface="Arial"/>
-              </a:rPr>
-              <a:t> e </a:t>
-            </a:r>
-            <a:r>
-              <a:rPr b="1" i="0" lang="pt-BR" sz="1200" u="none" strike="noStrike">
-                <a:solidFill>
-                  <a:schemeClr val="dk1"/>
-                </a:solidFill>
-                <a:latin typeface="Arial"/>
-                <a:ea typeface="Arial"/>
-                <a:cs typeface="Arial"/>
-                <a:sym typeface="Arial"/>
-              </a:rPr>
-              <a:t>risco de conformidade</a:t>
-            </a:r>
-            <a:r>
-              <a:rPr b="0" i="0" lang="pt-BR" sz="1200" u="none" strike="noStrike">
-                <a:solidFill>
-                  <a:schemeClr val="dk1"/>
-                </a:solidFill>
-                <a:latin typeface="Arial"/>
-                <a:ea typeface="Arial"/>
-                <a:cs typeface="Arial"/>
-                <a:sym typeface="Arial"/>
-              </a:rPr>
-              <a:t>. </a:t>
-            </a:r>
-            <a:endParaRPr b="0"/>
-          </a:p>
-          <a:p>
-            <a:pPr indent="0" lvl="0" marL="0" rtl="0" algn="l">
-              <a:lnSpc>
-                <a:spcPct val="100000"/>
-              </a:lnSpc>
-              <a:spcBef>
-                <a:spcPts val="0"/>
-              </a:spcBef>
-              <a:spcAft>
-                <a:spcPts val="0"/>
-              </a:spcAft>
-              <a:buSzPts val="1400"/>
-              <a:buNone/>
-            </a:pPr>
-            <a:r>
-              <a:rPr b="0" i="0" lang="pt-BR" sz="1200" u="none" strike="noStrike">
-                <a:solidFill>
-                  <a:schemeClr val="dk1"/>
-                </a:solidFill>
-                <a:latin typeface="Arial"/>
-                <a:ea typeface="Arial"/>
-                <a:cs typeface="Arial"/>
-                <a:sym typeface="Arial"/>
-              </a:rPr>
-              <a:t>Dados sensíveis e imagens de </a:t>
-            </a:r>
-            <a:r>
-              <a:rPr lang="pt-BR"/>
-              <a:t>crianças</a:t>
-            </a:r>
-            <a:r>
-              <a:rPr b="0" i="0" lang="pt-BR" sz="1200" u="none" strike="noStrike">
-                <a:solidFill>
-                  <a:schemeClr val="dk1"/>
-                </a:solidFill>
-                <a:latin typeface="Arial"/>
-                <a:ea typeface="Arial"/>
-                <a:cs typeface="Arial"/>
-                <a:sym typeface="Arial"/>
-              </a:rPr>
-              <a:t> circulam em plataformas sem controle centralizado, gerando vulnerabilidades jurídicas em relação à privacidade. </a:t>
-            </a:r>
-            <a:endParaRPr b="0"/>
-          </a:p>
-          <a:p>
-            <a:pPr indent="0" lvl="0" marL="0" rtl="0" algn="l">
-              <a:lnSpc>
-                <a:spcPct val="100000"/>
-              </a:lnSpc>
-              <a:spcBef>
-                <a:spcPts val="0"/>
-              </a:spcBef>
-              <a:spcAft>
-                <a:spcPts val="0"/>
-              </a:spcAft>
-              <a:buSzPts val="1400"/>
-              <a:buNone/>
-            </a:pPr>
-            <a:r>
-              <a:rPr b="0" i="0" lang="pt-BR" sz="1200" u="none" strike="noStrike">
-                <a:solidFill>
-                  <a:schemeClr val="dk1"/>
-                </a:solidFill>
-                <a:latin typeface="Arial"/>
-                <a:ea typeface="Arial"/>
-                <a:cs typeface="Arial"/>
-                <a:sym typeface="Arial"/>
-              </a:rPr>
-              <a:t>A Plataforma Integrada OBECI que desenvolvemos surge para consolidar essa documentação em um ambiente único e seguro.</a:t>
-            </a:r>
-            <a:endParaRPr b="0"/>
-          </a:p>
-          <a:p>
-            <a:pPr indent="0" lvl="0" marL="0" rtl="0" algn="l">
-              <a:lnSpc>
-                <a:spcPct val="100000"/>
-              </a:lnSpc>
-              <a:spcBef>
-                <a:spcPts val="0"/>
-              </a:spcBef>
-              <a:spcAft>
-                <a:spcPts val="0"/>
-              </a:spcAft>
-              <a:buSzPts val="1400"/>
-              <a:buNone/>
-            </a:pPr>
-            <a:br>
-              <a:rPr lang="pt-BR"/>
-            </a:br>
             <a:endParaRPr/>
           </a:p>
         </p:txBody>
@@ -2408,184 +2123,6 @@
               <a:buNone/>
             </a:pPr>
             <a:r>
-              <a:rPr b="0" i="0" lang="pt-BR" sz="1400" u="none" strike="noStrike">
-                <a:solidFill>
-                  <a:schemeClr val="dk1"/>
-                </a:solidFill>
-                <a:latin typeface="Arial"/>
-                <a:ea typeface="Arial"/>
-                <a:cs typeface="Arial"/>
-                <a:sym typeface="Arial"/>
-              </a:rPr>
-              <a:t>3 – Solução – colocar no slide</a:t>
-            </a:r>
-            <a:endParaRPr b="0" sz="1400"/>
-          </a:p>
-          <a:p>
-            <a:pPr indent="0" lvl="0" marL="0" rtl="0" algn="l">
-              <a:lnSpc>
-                <a:spcPct val="100000"/>
-              </a:lnSpc>
-              <a:spcBef>
-                <a:spcPts val="0"/>
-              </a:spcBef>
-              <a:spcAft>
-                <a:spcPts val="0"/>
-              </a:spcAft>
-              <a:buSzPts val="1400"/>
-              <a:buNone/>
-            </a:pPr>
-            <a:r>
-              <a:rPr lang="pt-BR" sz="1400"/>
-              <a:t>Trata-se de</a:t>
-            </a:r>
-            <a:r>
-              <a:rPr b="0" i="0" lang="pt-BR" sz="1400" u="none" strike="noStrike">
-                <a:solidFill>
-                  <a:schemeClr val="dk1"/>
-                </a:solidFill>
-                <a:latin typeface="Arial"/>
-                <a:ea typeface="Arial"/>
-                <a:cs typeface="Arial"/>
-                <a:sym typeface="Arial"/>
-              </a:rPr>
-              <a:t> uma solução web-based autocontida projetada para centralizar o planejamento e a comunicação pedagógica.</a:t>
-            </a:r>
-            <a:endParaRPr b="0" sz="1400"/>
-          </a:p>
-          <a:p>
-            <a:pPr indent="0" lvl="0" marL="0" rtl="0" algn="l">
-              <a:lnSpc>
-                <a:spcPct val="100000"/>
-              </a:lnSpc>
-              <a:spcBef>
-                <a:spcPts val="0"/>
-              </a:spcBef>
-              <a:spcAft>
-                <a:spcPts val="0"/>
-              </a:spcAft>
-              <a:buSzPts val="1400"/>
-              <a:buNone/>
-            </a:pPr>
-            <a:r>
-              <a:rPr b="0" i="0" lang="pt-BR" sz="1400" u="none" strike="noStrike">
-                <a:solidFill>
-                  <a:schemeClr val="dk1"/>
-                </a:solidFill>
-                <a:latin typeface="Arial"/>
-                <a:ea typeface="Arial"/>
-                <a:cs typeface="Arial"/>
-                <a:sym typeface="Arial"/>
-              </a:rPr>
-              <a:t>Um ambiente de backend robusto que permite a criação de 'Processos Documentais' como contêineres estruturados de dados.</a:t>
-            </a:r>
-            <a:endParaRPr b="0" sz="1400"/>
-          </a:p>
-          <a:p>
-            <a:pPr indent="0" lvl="0" marL="0" rtl="0" algn="l">
-              <a:lnSpc>
-                <a:spcPct val="100000"/>
-              </a:lnSpc>
-              <a:spcBef>
-                <a:spcPts val="0"/>
-              </a:spcBef>
-              <a:spcAft>
-                <a:spcPts val="0"/>
-              </a:spcAft>
-              <a:buSzPts val="1400"/>
-              <a:buNone/>
-            </a:pPr>
-            <a:r>
-              <a:rPr b="1" i="0" lang="pt-BR" sz="1400" u="none" strike="noStrike">
-                <a:solidFill>
-                  <a:schemeClr val="dk1"/>
-                </a:solidFill>
-                <a:latin typeface="Arial"/>
-                <a:ea typeface="Arial"/>
-                <a:cs typeface="Arial"/>
-                <a:sym typeface="Arial"/>
-              </a:rPr>
-              <a:t>Enquanto as ferramentas atuais são depósitos de arquivos, a Plataforma Integrada OBECI é um gerador de conhecimento. </a:t>
-            </a:r>
-            <a:endParaRPr b="1" sz="1400"/>
-          </a:p>
-          <a:p>
-            <a:pPr indent="0" lvl="0" marL="0" rtl="0" algn="l">
-              <a:lnSpc>
-                <a:spcPct val="100000"/>
-              </a:lnSpc>
-              <a:spcBef>
-                <a:spcPts val="0"/>
-              </a:spcBef>
-              <a:spcAft>
-                <a:spcPts val="0"/>
-              </a:spcAft>
-              <a:buSzPts val="1400"/>
-              <a:buNone/>
-            </a:pPr>
-            <a:r>
-              <a:rPr b="0" i="0" lang="pt-BR" sz="1400" u="none" strike="noStrike">
-                <a:solidFill>
-                  <a:schemeClr val="dk1"/>
-                </a:solidFill>
-                <a:latin typeface="Arial"/>
-                <a:ea typeface="Arial"/>
-                <a:cs typeface="Arial"/>
-                <a:sym typeface="Arial"/>
-              </a:rPr>
-              <a:t>Ela não apenas armazena fotos e textos, mas estrutura o "Processo Documental" (refletir, projetar, registrar e avaliar) em um contêiner digital inteligente.</a:t>
-            </a:r>
-            <a:endParaRPr/>
-          </a:p>
-          <a:p>
-            <a:pPr indent="0" lvl="0" marL="0" marR="0" rtl="0" algn="l">
-              <a:lnSpc>
-                <a:spcPct val="100000"/>
-              </a:lnSpc>
-              <a:spcBef>
-                <a:spcPts val="0"/>
-              </a:spcBef>
-              <a:spcAft>
-                <a:spcPts val="0"/>
-              </a:spcAft>
-              <a:buClr>
-                <a:schemeClr val="dk1"/>
-              </a:buClr>
-              <a:buSzPts val="1400"/>
-              <a:buFont typeface="Arial"/>
-              <a:buNone/>
-            </a:pPr>
-            <a:r>
-              <a:rPr b="1" lang="pt-BR" sz="1400">
-                <a:latin typeface="Arial"/>
-                <a:ea typeface="Arial"/>
-                <a:cs typeface="Arial"/>
-                <a:sym typeface="Arial"/>
-              </a:rPr>
-              <a:t>Estamos substituindo ferramentas genéricas por uma solução que entende a alma da educação infantil no Instituto OBECI.</a:t>
-            </a:r>
-            <a:endParaRPr b="1" sz="1400">
-              <a:latin typeface="Arial"/>
-              <a:ea typeface="Arial"/>
-              <a:cs typeface="Arial"/>
-              <a:sym typeface="Arial"/>
-            </a:endParaRPr>
-          </a:p>
-          <a:p>
-            <a:pPr indent="0" lvl="0" marL="0" rtl="0" algn="l">
-              <a:lnSpc>
-                <a:spcPct val="100000"/>
-              </a:lnSpc>
-              <a:spcBef>
-                <a:spcPts val="0"/>
-              </a:spcBef>
-              <a:spcAft>
-                <a:spcPts val="0"/>
-              </a:spcAft>
-              <a:buSzPts val="1400"/>
-              <a:buNone/>
-            </a:pPr>
-            <a:r>
               <a:t/>
             </a:r>
             <a:endParaRPr b="0"/>
@@ -2672,7 +2209,7 @@
   <p:cSld>
     <p:spTree>
       <p:nvGrpSpPr>
-        <p:cNvPr id="134" name="Shape 134"/>
+        <p:cNvPr id="130" name="Shape 130"/>
         <p:cNvGrpSpPr/>
         <p:nvPr/>
       </p:nvGrpSpPr>
@@ -2686,7 +2223,7 @@
       </p:grpSpPr>
       <p:sp>
         <p:nvSpPr>
-          <p:cNvPr id="135" name="Google Shape;135;p4:notes"/>
+          <p:cNvPr id="131" name="Google Shape;131;p4:notes"/>
           <p:cNvSpPr/>
           <p:nvPr>
             <p:ph idx="2" type="sldImg"/>
@@ -2731,7 +2268,7 @@
       </p:sp>
       <p:sp>
         <p:nvSpPr>
-          <p:cNvPr id="136" name="Google Shape;136;p4:notes"/>
+          <p:cNvPr id="132" name="Google Shape;132;p4:notes"/>
           <p:cNvSpPr txBox="1"/>
           <p:nvPr>
             <p:ph idx="1" type="body"/>
@@ -2756,289 +2293,6 @@
           </a:bodyPr>
           <a:lstStyle/>
           <a:p>
-            <a:pPr indent="0" lvl="0" marL="0" marR="0" rtl="0" algn="l">
-              <a:lnSpc>
-                <a:spcPct val="100000"/>
-              </a:lnSpc>
-              <a:spcBef>
-                <a:spcPts val="0"/>
-              </a:spcBef>
-              <a:spcAft>
-                <a:spcPts val="0"/>
-              </a:spcAft>
-              <a:buClr>
-                <a:schemeClr val="dk1"/>
-              </a:buClr>
-              <a:buSzPts val="1200"/>
-              <a:buFont typeface="Arial"/>
-              <a:buNone/>
-            </a:pPr>
-            <a:r>
-              <a:rPr b="1" lang="pt-BR"/>
-              <a:t>Temos aqui uma jornada fluida para o usuário, sustentada por uma arquitetura de dados preparada para escala e conformidade total.</a:t>
-            </a:r>
-            <a:endParaRPr/>
-          </a:p>
-          <a:p>
-            <a:pPr indent="0" lvl="0" marL="0" rtl="0" algn="l">
-              <a:lnSpc>
-                <a:spcPct val="100000"/>
-              </a:lnSpc>
-              <a:spcBef>
-                <a:spcPts val="0"/>
-              </a:spcBef>
-              <a:spcAft>
-                <a:spcPts val="0"/>
-              </a:spcAft>
-              <a:buSzPts val="1400"/>
-              <a:buNone/>
-            </a:pPr>
-            <a:r>
-              <a:rPr lang="pt-BR"/>
-              <a:t>Ancorar a fala com o slide.</a:t>
-            </a:r>
-            <a:endParaRPr/>
-          </a:p>
-          <a:p>
-            <a:pPr indent="0" lvl="0" marL="0" rtl="0" algn="l">
-              <a:lnSpc>
-                <a:spcPct val="100000"/>
-              </a:lnSpc>
-              <a:spcBef>
-                <a:spcPts val="0"/>
-              </a:spcBef>
-              <a:spcAft>
-                <a:spcPts val="0"/>
-              </a:spcAft>
-              <a:buSzPts val="1400"/>
-              <a:buNone/>
-            </a:pPr>
-            <a:r>
-              <a:t/>
-            </a:r>
-            <a:endParaRPr/>
-          </a:p>
-          <a:p>
-            <a:pPr indent="0" lvl="0" marL="0" rtl="0" algn="l">
-              <a:lnSpc>
-                <a:spcPct val="100000"/>
-              </a:lnSpc>
-              <a:spcBef>
-                <a:spcPts val="0"/>
-              </a:spcBef>
-              <a:spcAft>
-                <a:spcPts val="0"/>
-              </a:spcAft>
-              <a:buSzPts val="1400"/>
-              <a:buNone/>
-            </a:pPr>
-            <a:r>
-              <a:rPr lang="pt-BR"/>
-              <a:t>Nossa infraestrutura é altamente escalável, preparada para suportar o crescimento do volume de mídia e usuários sem afetar performance. </a:t>
-            </a:r>
-            <a:endParaRPr/>
-          </a:p>
-          <a:p>
-            <a:pPr indent="0" lvl="0" marL="0" rtl="0" algn="l">
-              <a:lnSpc>
-                <a:spcPct val="100000"/>
-              </a:lnSpc>
-              <a:spcBef>
-                <a:spcPts val="0"/>
-              </a:spcBef>
-              <a:spcAft>
-                <a:spcPts val="0"/>
-              </a:spcAft>
-              <a:buSzPts val="1400"/>
-              <a:buNone/>
-            </a:pPr>
-            <a:r>
-              <a:rPr lang="pt-BR"/>
-              <a:t>Estrutura que mapeia fielmente a prática pedagógica de forma relacional. Cada Professor é vinculado às suas Turmas, garantindo integridade em cada registro pedagógico.</a:t>
-            </a:r>
-            <a:endParaRPr/>
-          </a:p>
-          <a:p>
-            <a:pPr indent="0" lvl="0" marL="0" rtl="0" algn="l">
-              <a:lnSpc>
-                <a:spcPct val="100000"/>
-              </a:lnSpc>
-              <a:spcBef>
-                <a:spcPts val="0"/>
-              </a:spcBef>
-              <a:spcAft>
-                <a:spcPts val="0"/>
-              </a:spcAft>
-              <a:buSzPts val="1400"/>
-              <a:buNone/>
-            </a:pPr>
-            <a:r>
-              <a:rPr lang="pt-BR"/>
-              <a:t>Quando um professor insere uma mídia, ela é tratada como um objeto único vinculado ao processo documental daquela turma. Isso permite que a supervisão e colaboração seja prática e eficiente, filtrando por tags e instrumentos.</a:t>
-            </a:r>
-            <a:endParaRPr/>
-          </a:p>
-          <a:p>
-            <a:pPr indent="0" lvl="0" marL="0" rtl="0" algn="l">
-              <a:lnSpc>
-                <a:spcPct val="100000"/>
-              </a:lnSpc>
-              <a:spcBef>
-                <a:spcPts val="0"/>
-              </a:spcBef>
-              <a:spcAft>
-                <a:spcPts val="0"/>
-              </a:spcAft>
-              <a:buSzPts val="1400"/>
-              <a:buNone/>
-            </a:pPr>
-            <a:r>
-              <a:t/>
-            </a:r>
-            <a:endParaRPr/>
-          </a:p>
-          <a:p>
-            <a:pPr indent="0" lvl="0" marL="0" rtl="0" algn="l">
-              <a:lnSpc>
-                <a:spcPct val="100000"/>
-              </a:lnSpc>
-              <a:spcBef>
-                <a:spcPts val="0"/>
-              </a:spcBef>
-              <a:spcAft>
-                <a:spcPts val="0"/>
-              </a:spcAft>
-              <a:buSzPts val="1400"/>
-              <a:buNone/>
-            </a:pPr>
-            <a:r>
-              <a:rPr lang="pt-BR"/>
-              <a:t>A Interface é otimizada para computadores e notebooks, essencial para as tarefas complexas de edição, planejamento e gestão.</a:t>
-            </a:r>
-            <a:endParaRPr/>
-          </a:p>
-          <a:p>
-            <a:pPr indent="0" lvl="0" marL="0" rtl="0" algn="l">
-              <a:lnSpc>
-                <a:spcPct val="100000"/>
-              </a:lnSpc>
-              <a:spcBef>
-                <a:spcPts val="0"/>
-              </a:spcBef>
-              <a:spcAft>
-                <a:spcPts val="0"/>
-              </a:spcAft>
-              <a:buSzPts val="1400"/>
-              <a:buNone/>
-            </a:pPr>
-            <a:r>
-              <a:t/>
-            </a:r>
-            <a:endParaRPr/>
-          </a:p>
-          <a:p>
-            <a:pPr indent="0" lvl="0" marL="0" marR="0" rtl="0" algn="l">
-              <a:lnSpc>
-                <a:spcPct val="100000"/>
-              </a:lnSpc>
-              <a:spcBef>
-                <a:spcPts val="0"/>
-              </a:spcBef>
-              <a:spcAft>
-                <a:spcPts val="0"/>
-              </a:spcAft>
-              <a:buClr>
-                <a:schemeClr val="dk1"/>
-              </a:buClr>
-              <a:buSzPts val="1200"/>
-              <a:buFont typeface="Arial"/>
-              <a:buNone/>
-            </a:pPr>
-            <a:r>
-              <a:rPr lang="pt-BR"/>
-              <a:t>O sistema garante o onboarding de novas escolas sem comprometer a integridade do sistema, e, de acordo com a demanda da OBECI, possibilita que múltiplos usuários possam editar o mesmo documento simultaneamente.</a:t>
-            </a:r>
-            <a:endParaRPr/>
-          </a:p>
-          <a:p>
-            <a:pPr indent="0" lvl="0" marL="0" rtl="0" algn="l">
-              <a:lnSpc>
-                <a:spcPct val="100000"/>
-              </a:lnSpc>
-              <a:spcBef>
-                <a:spcPts val="0"/>
-              </a:spcBef>
-              <a:spcAft>
-                <a:spcPts val="0"/>
-              </a:spcAft>
-              <a:buSzPts val="1400"/>
-              <a:buNone/>
-            </a:pPr>
-            <a:r>
-              <a:t/>
-            </a:r>
-            <a:endParaRPr/>
-          </a:p>
-          <a:p>
-            <a:pPr indent="0" lvl="0" marL="0" rtl="0" algn="l">
-              <a:lnSpc>
-                <a:spcPct val="100000"/>
-              </a:lnSpc>
-              <a:spcBef>
-                <a:spcPts val="0"/>
-              </a:spcBef>
-              <a:spcAft>
-                <a:spcPts val="0"/>
-              </a:spcAft>
-              <a:buSzPts val="1400"/>
-              <a:buNone/>
-            </a:pPr>
-            <a:r>
-              <a:rPr lang="pt-BR"/>
-              <a:t>A plataforma foi desenvolvida alinhada às diretrizes de acessibilidade.</a:t>
-            </a:r>
-            <a:endParaRPr/>
-          </a:p>
-          <a:p>
-            <a:pPr indent="0" lvl="0" marL="0" rtl="0" algn="l">
-              <a:lnSpc>
-                <a:spcPct val="100000"/>
-              </a:lnSpc>
-              <a:spcBef>
-                <a:spcPts val="0"/>
-              </a:spcBef>
-              <a:spcAft>
-                <a:spcPts val="0"/>
-              </a:spcAft>
-              <a:buSzPts val="1400"/>
-              <a:buNone/>
-            </a:pPr>
-            <a:r>
-              <a:t/>
-            </a:r>
-            <a:endParaRPr/>
-          </a:p>
-          <a:p>
-            <a:pPr indent="0" lvl="0" marL="0" rtl="0" algn="l">
-              <a:lnSpc>
-                <a:spcPct val="100000"/>
-              </a:lnSpc>
-              <a:spcBef>
-                <a:spcPts val="0"/>
-              </a:spcBef>
-              <a:spcAft>
-                <a:spcPts val="0"/>
-              </a:spcAft>
-              <a:buSzPts val="1400"/>
-              <a:buNone/>
-            </a:pPr>
-            <a:r>
-              <a:rPr lang="pt-BR"/>
-              <a:t>E não necessita instalação local; requer apenas conexão à internet e habilidades básicas de informática, pois é baseado na Web.</a:t>
-            </a:r>
-            <a:endParaRPr/>
-          </a:p>
-          <a:p>
             <a:pPr indent="0" lvl="0" marL="0" rtl="0" algn="l">
               <a:lnSpc>
                 <a:spcPct val="100000"/>
@@ -3061,7 +2315,7 @@
       </p:sp>
       <p:sp>
         <p:nvSpPr>
-          <p:cNvPr id="137" name="Google Shape;137;p4:notes"/>
+          <p:cNvPr id="133" name="Google Shape;133;p4:notes"/>
           <p:cNvSpPr txBox="1"/>
           <p:nvPr>
             <p:ph idx="12" type="sldNum"/>
@@ -3120,7 +2374,7 @@
   <p:cSld>
     <p:spTree>
       <p:nvGrpSpPr>
-        <p:cNvPr id="162" name="Shape 162"/>
+        <p:cNvPr id="150" name="Shape 150"/>
         <p:cNvGrpSpPr/>
         <p:nvPr/>
       </p:nvGrpSpPr>
@@ -3134,7 +2388,7 @@
       </p:grpSpPr>
       <p:sp>
         <p:nvSpPr>
-          <p:cNvPr id="163" name="Google Shape;163;p5:notes"/>
+          <p:cNvPr id="151" name="Google Shape;151;p5:notes"/>
           <p:cNvSpPr/>
           <p:nvPr>
             <p:ph idx="2" type="sldImg"/>
@@ -3179,7 +2433,7 @@
       </p:sp>
       <p:sp>
         <p:nvSpPr>
-          <p:cNvPr id="164" name="Google Shape;164;p5:notes"/>
+          <p:cNvPr id="152" name="Google Shape;152;p5:notes"/>
           <p:cNvSpPr txBox="1"/>
           <p:nvPr>
             <p:ph idx="1" type="body"/>
@@ -3204,150 +2458,6 @@
           </a:bodyPr>
           <a:lstStyle/>
           <a:p>
-            <a:pPr indent="0" lvl="0" marL="0" marR="0" rtl="0" algn="l">
-              <a:lnSpc>
-                <a:spcPct val="100000"/>
-              </a:lnSpc>
-              <a:spcBef>
-                <a:spcPts val="0"/>
-              </a:spcBef>
-              <a:spcAft>
-                <a:spcPts val="0"/>
-              </a:spcAft>
-              <a:buClr>
-                <a:schemeClr val="dk1"/>
-              </a:buClr>
-              <a:buSzPts val="1200"/>
-              <a:buFont typeface="Arial"/>
-              <a:buNone/>
-            </a:pPr>
-            <a:r>
-              <a:rPr lang="pt-BR"/>
-              <a:t>Filtros por tags e por tipos de instrumentos garantem a agilidade na busca por conteúdos, o que é impossível de fazer de forma rápida e prática no Google Slides.</a:t>
-            </a:r>
-            <a:endParaRPr/>
-          </a:p>
-          <a:p>
-            <a:pPr indent="0" lvl="0" marL="0" rtl="0" algn="l">
-              <a:lnSpc>
-                <a:spcPct val="100000"/>
-              </a:lnSpc>
-              <a:spcBef>
-                <a:spcPts val="0"/>
-              </a:spcBef>
-              <a:spcAft>
-                <a:spcPts val="0"/>
-              </a:spcAft>
-              <a:buSzPts val="1400"/>
-              <a:buNone/>
-            </a:pPr>
-            <a:r>
-              <a:rPr lang="pt-BR"/>
-              <a:t>E em um setor que lida com menores, a segurança deve ser fundamental. </a:t>
-            </a:r>
-            <a:endParaRPr/>
-          </a:p>
-          <a:p>
-            <a:pPr indent="0" lvl="0" marL="0" rtl="0" algn="l">
-              <a:lnSpc>
-                <a:spcPct val="100000"/>
-              </a:lnSpc>
-              <a:spcBef>
-                <a:spcPts val="0"/>
-              </a:spcBef>
-              <a:spcAft>
-                <a:spcPts val="0"/>
-              </a:spcAft>
-              <a:buSzPts val="1400"/>
-              <a:buNone/>
-            </a:pPr>
-            <a:r>
-              <a:rPr lang="pt-BR"/>
-              <a:t>O sistema opera com um sistema de acesso rigoroso. Todos os dados são criptografados em trânsito via TLS/HTTPS e em repouso.</a:t>
-            </a:r>
-            <a:endParaRPr/>
-          </a:p>
-          <a:p>
-            <a:pPr indent="0" lvl="0" marL="0" rtl="0" algn="l">
-              <a:lnSpc>
-                <a:spcPct val="100000"/>
-              </a:lnSpc>
-              <a:spcBef>
-                <a:spcPts val="0"/>
-              </a:spcBef>
-              <a:spcAft>
-                <a:spcPts val="0"/>
-              </a:spcAft>
-              <a:buSzPts val="1400"/>
-              <a:buNone/>
-            </a:pPr>
-            <a:r>
-              <a:rPr lang="pt-BR"/>
-              <a:t>E tudo em conformidade com a Lei Geral de Proteção de Dados, com foco especial no tratamento de dados sensíveis e de menores.</a:t>
-            </a:r>
-            <a:endParaRPr/>
-          </a:p>
-          <a:p>
-            <a:pPr indent="0" lvl="0" marL="0" rtl="0" algn="l">
-              <a:lnSpc>
-                <a:spcPct val="100000"/>
-              </a:lnSpc>
-              <a:spcBef>
-                <a:spcPts val="0"/>
-              </a:spcBef>
-              <a:spcAft>
-                <a:spcPts val="0"/>
-              </a:spcAft>
-              <a:buSzPts val="1400"/>
-              <a:buNone/>
-            </a:pPr>
-            <a:r>
-              <a:rPr lang="pt-BR"/>
-              <a:t>Garantimos um uptime superior a 99.5%, essencial para a consistência dos registros pedagógicos.</a:t>
-            </a:r>
-            <a:endParaRPr/>
-          </a:p>
-          <a:p>
-            <a:pPr indent="0" lvl="0" marL="0" rtl="0" algn="l">
-              <a:lnSpc>
-                <a:spcPct val="100000"/>
-              </a:lnSpc>
-              <a:spcBef>
-                <a:spcPts val="0"/>
-              </a:spcBef>
-              <a:spcAft>
-                <a:spcPts val="0"/>
-              </a:spcAft>
-              <a:buSzPts val="1400"/>
-              <a:buNone/>
-            </a:pPr>
-            <a:r>
-              <a:rPr lang="pt-BR"/>
-              <a:t>Além disso, o projeto possui uma base de governança sólida, com Propriedade Intelectual compartilhada entre instituições de prestígio como BRISA e UNISINOS.</a:t>
-            </a:r>
-            <a:endParaRPr/>
-          </a:p>
-          <a:p>
-            <a:pPr indent="0" lvl="0" marL="0" rtl="0" algn="l">
-              <a:lnSpc>
-                <a:spcPct val="100000"/>
-              </a:lnSpc>
-              <a:spcBef>
-                <a:spcPts val="0"/>
-              </a:spcBef>
-              <a:spcAft>
-                <a:spcPts val="0"/>
-              </a:spcAft>
-              <a:buSzPts val="1400"/>
-              <a:buNone/>
-            </a:pPr>
-            <a:r>
-              <a:rPr lang="pt-BR"/>
-              <a:t>Estamos substituindo ferramentas genéricas por uma plataforma que soluciona o problema da OBECI, com alto valor agregado. </a:t>
-            </a:r>
-            <a:endParaRPr/>
-          </a:p>
-          <a:p>
             <a:pPr indent="0" lvl="0" marL="0" rtl="0" algn="l">
               <a:lnSpc>
                 <a:spcPct val="100000"/>
@@ -3370,7 +2480,7 @@
       </p:sp>
       <p:sp>
         <p:nvSpPr>
-          <p:cNvPr id="165" name="Google Shape;165;p5:notes"/>
+          <p:cNvPr id="153" name="Google Shape;153;p5:notes"/>
           <p:cNvSpPr txBox="1"/>
           <p:nvPr>
             <p:ph idx="12" type="sldNum"/>
@@ -3429,7 +2539,7 @@
   <p:cSld>
     <p:spTree>
       <p:nvGrpSpPr>
-        <p:cNvPr id="177" name="Shape 177"/>
+        <p:cNvPr id="162" name="Shape 162"/>
         <p:cNvGrpSpPr/>
         <p:nvPr/>
       </p:nvGrpSpPr>
@@ -3443,7 +2553,7 @@
       </p:grpSpPr>
       <p:sp>
         <p:nvSpPr>
-          <p:cNvPr id="178" name="Google Shape;178;g3c425a62f68_0_0:notes"/>
+          <p:cNvPr id="163" name="Google Shape;163;g3c425a62f68_0_0:notes"/>
           <p:cNvSpPr/>
           <p:nvPr>
             <p:ph idx="2" type="sldImg"/>
@@ -3488,7 +2598,7 @@
       </p:sp>
       <p:sp>
         <p:nvSpPr>
-          <p:cNvPr id="179" name="Google Shape;179;g3c425a62f68_0_0:notes"/>
+          <p:cNvPr id="164" name="Google Shape;164;g3c425a62f68_0_0:notes"/>
           <p:cNvSpPr txBox="1"/>
           <p:nvPr>
             <p:ph idx="1" type="body"/>
@@ -3536,7 +2646,7 @@
       </p:sp>
       <p:sp>
         <p:nvSpPr>
-          <p:cNvPr id="180" name="Google Shape;180;g3c425a62f68_0_0:notes"/>
+          <p:cNvPr id="165" name="Google Shape;165;g3c425a62f68_0_0:notes"/>
           <p:cNvSpPr txBox="1"/>
           <p:nvPr>
             <p:ph idx="12" type="sldNum"/>
@@ -3595,7 +2705,7 @@
   <p:cSld>
     <p:spTree>
       <p:nvGrpSpPr>
-        <p:cNvPr id="183" name="Shape 183"/>
+        <p:cNvPr id="168" name="Shape 168"/>
         <p:cNvGrpSpPr/>
         <p:nvPr/>
       </p:nvGrpSpPr>
@@ -3609,7 +2719,7 @@
       </p:grpSpPr>
       <p:sp>
         <p:nvSpPr>
-          <p:cNvPr id="184" name="Google Shape;184;g3c4373e66a4_0_0:notes"/>
+          <p:cNvPr id="169" name="Google Shape;169;g3c4373e66a4_0_0:notes"/>
           <p:cNvSpPr/>
           <p:nvPr>
             <p:ph idx="2" type="sldImg"/>
@@ -3654,7 +2764,7 @@
       </p:sp>
       <p:sp>
         <p:nvSpPr>
-          <p:cNvPr id="185" name="Google Shape;185;g3c4373e66a4_0_0:notes"/>
+          <p:cNvPr id="170" name="Google Shape;170;g3c4373e66a4_0_0:notes"/>
           <p:cNvSpPr txBox="1"/>
           <p:nvPr>
             <p:ph idx="1" type="body"/>
@@ -3741,7 +2851,7 @@
       </p:sp>
       <p:sp>
         <p:nvSpPr>
-          <p:cNvPr id="186" name="Google Shape;186;g3c4373e66a4_0_0:notes"/>
+          <p:cNvPr id="171" name="Google Shape;171;g3c4373e66a4_0_0:notes"/>
           <p:cNvSpPr txBox="1"/>
           <p:nvPr>
             <p:ph idx="12" type="sldNum"/>
@@ -16505,8 +15615,15 @@
 </file>
 
 <file path=ppt/slides/slide1.xml><?xml version="1.0" encoding="utf-8"?>
-<p:sld xmlns:a="http://schemas.openxmlformats.org/drawingml/2006/main" xmlns:r="http://schemas.openxmlformats.org/officeDocument/2006/relationships" xmlns:mc="http://schemas.openxmlformats.org/markup-compatibility/2006" xmlns:mv="urn:schemas-microsoft-com:mac:vml" xmlns:p="http://schemas.openxmlformats.org/presentationml/2006/main" xmlns:c="http://schemas.openxmlformats.org/drawingml/2006/chart" xmlns:dgm="http://schemas.openxmlformats.org/drawingml/2006/diagram" xmlns:o="urn:schemas-microsoft-com:office:office" xmlns:v="urn:schemas-microsoft-com:vml" xmlns:pvml="urn:schemas-microsoft-com:office:powerpoint" xmlns:com="http://schemas.openxmlformats.org/drawingml/2006/compatibility" xmlns:p14="http://schemas.microsoft.com/office/powerpoint/2010/main" xmlns:p15="http://schemas.microsoft.com/office/powerpoint/2012/main" xmlns:ahyp="http://schemas.microsoft.com/office/drawing/2018/hyperlinkcolor">
+<p:sld xmlns:a="http://schemas.openxmlformats.org/drawingml/2006/main" xmlns:r="http://schemas.openxmlformats.org/officeDocument/2006/relationships" xmlns:mc="http://schemas.openxmlformats.org/markup-compatibility/2006" xmlns:mv="urn:schemas-microsoft-com:mac:vml" xmlns:p="http://schemas.openxmlformats.org/presentationml/2006/main" xmlns:c="http://schemas.openxmlformats.org/drawingml/2006/chart" xmlns:dgm="http://schemas.openxmlformats.org/drawingml/2006/diagram" xmlns:o="urn:schemas-microsoft-com:office:office" xmlns:v="urn:schemas-microsoft-com:vml" xmlns:pvml="urn:schemas-microsoft-com:office:powerpoint" xmlns:com="http://schemas.openxmlformats.org/drawingml/2006/compatibility" xmlns:p14="http://schemas.microsoft.com/office/powerpoint/2010/main" xmlns:p15="http://schemas.microsoft.com/office/powerpoint/2012/main" xmlns:ahyp="http://schemas.microsoft.com/office/drawing/2018/hyperlinkcolor" showMasterSp="0">
   <p:cSld>
+    <p:bg>
+      <p:bgPr>
+        <a:solidFill>
+          <a:srgbClr val="ECE6D8"/>
+        </a:solidFill>
+      </p:bgPr>
+    </p:bg>
     <p:spTree>
       <p:nvGrpSpPr>
         <p:cNvPr id="89" name="Shape 89"/>
@@ -16749,11 +15866,11 @@
                 <a:cs typeface="Arial"/>
                 <a:sym typeface="Arial"/>
               </a:rPr>
-              <a:t>Rosana Meyer</a:t>
+              <a:t>Rosane Meyer</a:t>
             </a:r>
-            <a:endParaRPr b="0" i="0" sz="1400" u="none" cap="none" strike="noStrike">
+            <a:endParaRPr b="0" i="0" sz="1600" u="none" cap="none" strike="noStrike">
               <a:solidFill>
-                <a:srgbClr val="000000"/>
+                <a:srgbClr val="1C3C5C"/>
               </a:solidFill>
               <a:latin typeface="Arial"/>
               <a:ea typeface="Arial"/>
@@ -16985,13 +16102,13 @@
           <a:blip r:embed="rId3">
             <a:alphaModFix/>
           </a:blip>
-          <a:srcRect b="3288" l="1844" r="2635" t="3020"/>
+          <a:srcRect b="3288" l="1844" r="57030" t="3020"/>
           <a:stretch/>
         </p:blipFill>
         <p:spPr>
           <a:xfrm>
-            <a:off x="6096000" y="1167958"/>
-            <a:ext cx="5600107" cy="3427576"/>
+            <a:off x="6520661" y="531146"/>
+            <a:ext cx="4718470" cy="5795708"/>
           </a:xfrm>
           <a:prstGeom prst="rect">
             <a:avLst/>
@@ -17129,7 +16246,7 @@
             <a:effectLst>
               <a:outerShdw blurRad="57150" rotWithShape="0" algn="ctr" dir="5400000" dist="19050">
                 <a:srgbClr val="000000">
-                  <a:alpha val="62352"/>
+                  <a:alpha val="62745"/>
                 </a:srgbClr>
               </a:outerShdw>
             </a:effectLst>
@@ -17363,7 +16480,7 @@
             <a:effectLst>
               <a:outerShdw blurRad="57150" rotWithShape="0" algn="ctr" dir="5400000" dist="19050">
                 <a:srgbClr val="000000">
-                  <a:alpha val="62352"/>
+                  <a:alpha val="62745"/>
                 </a:srgbClr>
               </a:outerShdw>
             </a:effectLst>
@@ -17597,7 +16714,7 @@
             <a:effectLst>
               <a:outerShdw blurRad="57150" rotWithShape="0" algn="ctr" dir="5400000" dist="19050">
                 <a:srgbClr val="000000">
-                  <a:alpha val="62352"/>
+                  <a:alpha val="62745"/>
                 </a:srgbClr>
               </a:outerShdw>
             </a:effectLst>
@@ -17789,7 +16906,7 @@
                   <a:cs typeface="Arial"/>
                   <a:sym typeface="Arial"/>
                 </a:rPr>
-                <a:t>O uso de redes sociais para compartilhar o cotidiano escolar traz graves preocupações com a privacidade e o uso de imagens de menores.</a:t>
+                <a:t>O uso de sistemas em servidores aleatórios para compartilhar o cotidiano escolar traz graves preocupações com a privacidade e o uso de imagens de menores.</a:t>
               </a:r>
               <a:endParaRPr b="0" i="0" sz="1800" u="none" cap="none" strike="noStrike">
                 <a:solidFill>
@@ -17911,22 +17028,810 @@
         </p:nvGrpSpPr>
         <p:grpSpPr>
           <a:xfrm>
-            <a:off x="838200" y="1928074"/>
-            <a:ext cx="10515600" cy="4353906"/>
-            <a:chOff x="0" y="1808"/>
-            <a:chExt cx="10515600" cy="4353906"/>
+            <a:off x="693467" y="1489243"/>
+            <a:ext cx="10515600" cy="1939757"/>
+            <a:chOff x="832104" y="1638116"/>
+            <a:chExt cx="10515600" cy="1939757"/>
+          </a:xfrm>
+        </p:grpSpPr>
+        <p:grpSp>
+          <p:nvGrpSpPr>
+            <p:cNvPr id="118" name="Google Shape;118;p3"/>
+            <p:cNvGrpSpPr/>
+            <p:nvPr/>
+          </p:nvGrpSpPr>
+          <p:grpSpPr>
+            <a:xfrm>
+              <a:off x="832104" y="1638116"/>
+              <a:ext cx="10515600" cy="969878"/>
+              <a:chOff x="838200" y="1928074"/>
+              <a:chExt cx="10515600" cy="969878"/>
+            </a:xfrm>
+          </p:grpSpPr>
+          <p:sp>
+            <p:nvSpPr>
+              <p:cNvPr id="119" name="Google Shape;119;p3"/>
+              <p:cNvSpPr/>
+              <p:nvPr/>
+            </p:nvSpPr>
+            <p:spPr>
+              <a:xfrm>
+                <a:off x="838200" y="1928074"/>
+                <a:ext cx="10515600" cy="916611"/>
+              </a:xfrm>
+              <a:prstGeom prst="roundRect">
+                <a:avLst>
+                  <a:gd fmla="val 10000" name="adj"/>
+                </a:avLst>
+              </a:prstGeom>
+              <a:solidFill>
+                <a:srgbClr val="CF5721"/>
+              </a:solidFill>
+              <a:ln>
+                <a:noFill/>
+              </a:ln>
+            </p:spPr>
+            <p:txBody>
+              <a:bodyPr anchorCtr="0" anchor="ctr" bIns="91425" lIns="91425" spcFirstLastPara="1" rIns="91425" wrap="square" tIns="91425">
+                <a:noAutofit/>
+              </a:bodyPr>
+              <a:lstStyle/>
+              <a:p>
+                <a:pPr indent="0" lvl="0" marL="0" marR="0" rtl="0" algn="l">
+                  <a:lnSpc>
+                    <a:spcPct val="100000"/>
+                  </a:lnSpc>
+                  <a:spcBef>
+                    <a:spcPts val="0"/>
+                  </a:spcBef>
+                  <a:spcAft>
+                    <a:spcPts val="0"/>
+                  </a:spcAft>
+                  <a:buClr>
+                    <a:srgbClr val="000000"/>
+                  </a:buClr>
+                  <a:buSzPts val="1400"/>
+                  <a:buFont typeface="Arial"/>
+                  <a:buNone/>
+                </a:pPr>
+                <a:r>
+                  <a:t/>
+                </a:r>
+                <a:endParaRPr b="0" i="0" sz="1400" u="none" cap="none" strike="noStrike">
+                  <a:solidFill>
+                    <a:srgbClr val="000000"/>
+                  </a:solidFill>
+                  <a:latin typeface="Arial"/>
+                  <a:ea typeface="Arial"/>
+                  <a:cs typeface="Arial"/>
+                  <a:sym typeface="Arial"/>
+                </a:endParaRPr>
+              </a:p>
+            </p:txBody>
+          </p:sp>
+          <p:sp>
+            <p:nvSpPr>
+              <p:cNvPr id="120" name="Google Shape;120;p3"/>
+              <p:cNvSpPr/>
+              <p:nvPr/>
+            </p:nvSpPr>
+            <p:spPr>
+              <a:xfrm>
+                <a:off x="1115475" y="2134312"/>
+                <a:ext cx="504136" cy="504136"/>
+              </a:xfrm>
+              <a:prstGeom prst="rect">
+                <a:avLst/>
+              </a:prstGeom>
+              <a:blipFill rotWithShape="1">
+                <a:blip r:embed="rId3">
+                  <a:alphaModFix/>
+                </a:blip>
+                <a:stretch>
+                  <a:fillRect b="0" l="0" r="0" t="0"/>
+                </a:stretch>
+              </a:blipFill>
+              <a:ln>
+                <a:noFill/>
+              </a:ln>
+              <a:effectLst>
+                <a:outerShdw blurRad="57150" rotWithShape="0" algn="ctr" dir="5400000" dist="19050">
+                  <a:srgbClr val="000000">
+                    <a:alpha val="62745"/>
+                  </a:srgbClr>
+                </a:outerShdw>
+              </a:effectLst>
+            </p:spPr>
+            <p:txBody>
+              <a:bodyPr anchorCtr="0" anchor="ctr" bIns="91425" lIns="91425" spcFirstLastPara="1" rIns="91425" wrap="square" tIns="91425">
+                <a:noAutofit/>
+              </a:bodyPr>
+              <a:lstStyle/>
+              <a:p>
+                <a:pPr indent="0" lvl="0" marL="0" marR="0" rtl="0" algn="l">
+                  <a:lnSpc>
+                    <a:spcPct val="100000"/>
+                  </a:lnSpc>
+                  <a:spcBef>
+                    <a:spcPts val="0"/>
+                  </a:spcBef>
+                  <a:spcAft>
+                    <a:spcPts val="0"/>
+                  </a:spcAft>
+                  <a:buClr>
+                    <a:srgbClr val="000000"/>
+                  </a:buClr>
+                  <a:buSzPts val="1400"/>
+                  <a:buFont typeface="Arial"/>
+                  <a:buNone/>
+                </a:pPr>
+                <a:r>
+                  <a:t/>
+                </a:r>
+                <a:endParaRPr b="0" i="0" sz="1400" u="none" cap="none" strike="noStrike">
+                  <a:solidFill>
+                    <a:srgbClr val="000000"/>
+                  </a:solidFill>
+                  <a:latin typeface="Arial"/>
+                  <a:ea typeface="Arial"/>
+                  <a:cs typeface="Arial"/>
+                  <a:sym typeface="Arial"/>
+                </a:endParaRPr>
+              </a:p>
+            </p:txBody>
+          </p:sp>
+          <p:sp>
+            <p:nvSpPr>
+              <p:cNvPr id="121" name="Google Shape;121;p3"/>
+              <p:cNvSpPr/>
+              <p:nvPr/>
+            </p:nvSpPr>
+            <p:spPr>
+              <a:xfrm>
+                <a:off x="1896886" y="1928074"/>
+                <a:ext cx="9456913" cy="916611"/>
+              </a:xfrm>
+              <a:prstGeom prst="rect">
+                <a:avLst/>
+              </a:prstGeom>
+              <a:noFill/>
+              <a:ln>
+                <a:noFill/>
+              </a:ln>
+            </p:spPr>
+            <p:txBody>
+              <a:bodyPr anchorCtr="0" anchor="ctr" bIns="91425" lIns="91425" spcFirstLastPara="1" rIns="91425" wrap="square" tIns="91425">
+                <a:noAutofit/>
+              </a:bodyPr>
+              <a:lstStyle/>
+              <a:p>
+                <a:pPr indent="0" lvl="0" marL="0" marR="0" rtl="0" algn="l">
+                  <a:lnSpc>
+                    <a:spcPct val="100000"/>
+                  </a:lnSpc>
+                  <a:spcBef>
+                    <a:spcPts val="0"/>
+                  </a:spcBef>
+                  <a:spcAft>
+                    <a:spcPts val="0"/>
+                  </a:spcAft>
+                  <a:buClr>
+                    <a:srgbClr val="000000"/>
+                  </a:buClr>
+                  <a:buSzPts val="1400"/>
+                  <a:buFont typeface="Arial"/>
+                  <a:buNone/>
+                </a:pPr>
+                <a:r>
+                  <a:t/>
+                </a:r>
+                <a:endParaRPr b="0" i="0" sz="1400" u="none" cap="none" strike="noStrike">
+                  <a:solidFill>
+                    <a:srgbClr val="000000"/>
+                  </a:solidFill>
+                  <a:latin typeface="Arial"/>
+                  <a:ea typeface="Arial"/>
+                  <a:cs typeface="Arial"/>
+                  <a:sym typeface="Arial"/>
+                </a:endParaRPr>
+              </a:p>
+            </p:txBody>
+          </p:sp>
+          <p:sp>
+            <p:nvSpPr>
+              <p:cNvPr id="122" name="Google Shape;122;p3"/>
+              <p:cNvSpPr txBox="1"/>
+              <p:nvPr/>
+            </p:nvSpPr>
+            <p:spPr>
+              <a:xfrm>
+                <a:off x="1756724" y="1981341"/>
+                <a:ext cx="9456913" cy="916611"/>
+              </a:xfrm>
+              <a:prstGeom prst="rect">
+                <a:avLst/>
+              </a:prstGeom>
+              <a:noFill/>
+              <a:ln>
+                <a:noFill/>
+              </a:ln>
+            </p:spPr>
+            <p:txBody>
+              <a:bodyPr anchorCtr="0" anchor="ctr" bIns="97000" lIns="97000" spcFirstLastPara="1" rIns="97000" wrap="square" tIns="97000">
+                <a:noAutofit/>
+              </a:bodyPr>
+              <a:lstStyle/>
+              <a:p>
+                <a:pPr indent="0" lvl="0" marL="0" marR="0" rtl="0" algn="l">
+                  <a:lnSpc>
+                    <a:spcPct val="100000"/>
+                  </a:lnSpc>
+                  <a:spcBef>
+                    <a:spcPts val="0"/>
+                  </a:spcBef>
+                  <a:spcAft>
+                    <a:spcPts val="0"/>
+                  </a:spcAft>
+                  <a:buClr>
+                    <a:schemeClr val="lt1"/>
+                  </a:buClr>
+                  <a:buSzPts val="1500"/>
+                  <a:buFont typeface="Arial"/>
+                  <a:buNone/>
+                </a:pPr>
+                <a:r>
+                  <a:rPr b="1" i="0" lang="pt-BR" sz="1500" u="none" cap="none" strike="noStrike">
+                    <a:solidFill>
+                      <a:schemeClr val="lt1"/>
+                    </a:solidFill>
+                    <a:latin typeface="Arial"/>
+                    <a:ea typeface="Arial"/>
+                    <a:cs typeface="Arial"/>
+                    <a:sym typeface="Arial"/>
+                  </a:rPr>
+                  <a:t>O que é</a:t>
+                </a:r>
+                <a:endParaRPr b="0" i="0" sz="1400" u="none" cap="none" strike="noStrike">
+                  <a:solidFill>
+                    <a:srgbClr val="000000"/>
+                  </a:solidFill>
+                  <a:latin typeface="Arial"/>
+                  <a:ea typeface="Arial"/>
+                  <a:cs typeface="Arial"/>
+                  <a:sym typeface="Arial"/>
+                </a:endParaRPr>
+              </a:p>
+              <a:p>
+                <a:pPr indent="0" lvl="0" marL="0" marR="0" rtl="0" algn="l">
+                  <a:lnSpc>
+                    <a:spcPct val="100000"/>
+                  </a:lnSpc>
+                  <a:spcBef>
+                    <a:spcPts val="525"/>
+                  </a:spcBef>
+                  <a:spcAft>
+                    <a:spcPts val="0"/>
+                  </a:spcAft>
+                  <a:buClr>
+                    <a:schemeClr val="lt1"/>
+                  </a:buClr>
+                  <a:buSzPts val="1500"/>
+                  <a:buFont typeface="Arial"/>
+                  <a:buNone/>
+                </a:pPr>
+                <a:r>
+                  <a:rPr b="0" i="0" lang="pt-BR" sz="1500" u="none" cap="none" strike="noStrike">
+                    <a:solidFill>
+                      <a:schemeClr val="lt1"/>
+                    </a:solidFill>
+                    <a:latin typeface="Arial"/>
+                    <a:ea typeface="Arial"/>
+                    <a:cs typeface="Arial"/>
+                    <a:sym typeface="Arial"/>
+                  </a:rPr>
+                  <a:t>Um ambiente digital único, seguro e integrado, desenhado especificamente para o propósito do Instituto OBECI.</a:t>
+                </a:r>
+                <a:endParaRPr b="0" i="0" sz="1500" u="none" cap="none" strike="noStrike">
+                  <a:solidFill>
+                    <a:schemeClr val="lt1"/>
+                  </a:solidFill>
+                  <a:latin typeface="Arial"/>
+                  <a:ea typeface="Arial"/>
+                  <a:cs typeface="Arial"/>
+                  <a:sym typeface="Arial"/>
+                </a:endParaRPr>
+              </a:p>
+            </p:txBody>
+          </p:sp>
+        </p:grpSp>
+        <p:grpSp>
+          <p:nvGrpSpPr>
+            <p:cNvPr id="123" name="Google Shape;123;p3"/>
+            <p:cNvGrpSpPr/>
+            <p:nvPr/>
+          </p:nvGrpSpPr>
+          <p:grpSpPr>
+            <a:xfrm>
+              <a:off x="832104" y="2661261"/>
+              <a:ext cx="10515600" cy="916612"/>
+              <a:chOff x="838200" y="3073838"/>
+              <a:chExt cx="10515600" cy="916612"/>
+            </a:xfrm>
+          </p:grpSpPr>
+          <p:sp>
+            <p:nvSpPr>
+              <p:cNvPr id="124" name="Google Shape;124;p3"/>
+              <p:cNvSpPr/>
+              <p:nvPr/>
+            </p:nvSpPr>
+            <p:spPr>
+              <a:xfrm>
+                <a:off x="838200" y="3073839"/>
+                <a:ext cx="10515600" cy="916611"/>
+              </a:xfrm>
+              <a:prstGeom prst="roundRect">
+                <a:avLst>
+                  <a:gd fmla="val 10000" name="adj"/>
+                </a:avLst>
+              </a:prstGeom>
+              <a:solidFill>
+                <a:srgbClr val="CF5721"/>
+              </a:solidFill>
+              <a:ln>
+                <a:noFill/>
+              </a:ln>
+            </p:spPr>
+            <p:txBody>
+              <a:bodyPr anchorCtr="0" anchor="ctr" bIns="91425" lIns="91425" spcFirstLastPara="1" rIns="91425" wrap="square" tIns="91425">
+                <a:noAutofit/>
+              </a:bodyPr>
+              <a:lstStyle/>
+              <a:p>
+                <a:pPr indent="0" lvl="0" marL="0" marR="0" rtl="0" algn="l">
+                  <a:lnSpc>
+                    <a:spcPct val="100000"/>
+                  </a:lnSpc>
+                  <a:spcBef>
+                    <a:spcPts val="0"/>
+                  </a:spcBef>
+                  <a:spcAft>
+                    <a:spcPts val="0"/>
+                  </a:spcAft>
+                  <a:buClr>
+                    <a:srgbClr val="000000"/>
+                  </a:buClr>
+                  <a:buSzPts val="1400"/>
+                  <a:buFont typeface="Arial"/>
+                  <a:buNone/>
+                </a:pPr>
+                <a:r>
+                  <a:t/>
+                </a:r>
+                <a:endParaRPr b="0" i="0" sz="1400" u="none" cap="none" strike="noStrike">
+                  <a:solidFill>
+                    <a:srgbClr val="000000"/>
+                  </a:solidFill>
+                  <a:latin typeface="Arial"/>
+                  <a:ea typeface="Arial"/>
+                  <a:cs typeface="Arial"/>
+                  <a:sym typeface="Arial"/>
+                </a:endParaRPr>
+              </a:p>
+            </p:txBody>
+          </p:sp>
+          <p:sp>
+            <p:nvSpPr>
+              <p:cNvPr id="125" name="Google Shape;125;p3"/>
+              <p:cNvSpPr/>
+              <p:nvPr/>
+            </p:nvSpPr>
+            <p:spPr>
+              <a:xfrm>
+                <a:off x="1115475" y="3280077"/>
+                <a:ext cx="504136" cy="504136"/>
+              </a:xfrm>
+              <a:prstGeom prst="rect">
+                <a:avLst/>
+              </a:prstGeom>
+              <a:blipFill rotWithShape="1">
+                <a:blip r:embed="rId4">
+                  <a:alphaModFix/>
+                </a:blip>
+                <a:stretch>
+                  <a:fillRect b="0" l="0" r="0" t="0"/>
+                </a:stretch>
+              </a:blipFill>
+              <a:ln>
+                <a:noFill/>
+              </a:ln>
+              <a:effectLst>
+                <a:outerShdw blurRad="57150" rotWithShape="0" algn="ctr" dir="5400000" dist="19050">
+                  <a:srgbClr val="000000">
+                    <a:alpha val="62745"/>
+                  </a:srgbClr>
+                </a:outerShdw>
+              </a:effectLst>
+            </p:spPr>
+            <p:txBody>
+              <a:bodyPr anchorCtr="0" anchor="ctr" bIns="91425" lIns="91425" spcFirstLastPara="1" rIns="91425" wrap="square" tIns="91425">
+                <a:noAutofit/>
+              </a:bodyPr>
+              <a:lstStyle/>
+              <a:p>
+                <a:pPr indent="0" lvl="0" marL="0" marR="0" rtl="0" algn="l">
+                  <a:lnSpc>
+                    <a:spcPct val="100000"/>
+                  </a:lnSpc>
+                  <a:spcBef>
+                    <a:spcPts val="0"/>
+                  </a:spcBef>
+                  <a:spcAft>
+                    <a:spcPts val="0"/>
+                  </a:spcAft>
+                  <a:buClr>
+                    <a:srgbClr val="000000"/>
+                  </a:buClr>
+                  <a:buSzPts val="1400"/>
+                  <a:buFont typeface="Arial"/>
+                  <a:buNone/>
+                </a:pPr>
+                <a:r>
+                  <a:t/>
+                </a:r>
+                <a:endParaRPr b="0" i="0" sz="1400" u="none" cap="none" strike="noStrike">
+                  <a:solidFill>
+                    <a:srgbClr val="000000"/>
+                  </a:solidFill>
+                  <a:latin typeface="Arial"/>
+                  <a:ea typeface="Arial"/>
+                  <a:cs typeface="Arial"/>
+                  <a:sym typeface="Arial"/>
+                </a:endParaRPr>
+              </a:p>
+            </p:txBody>
+          </p:sp>
+          <p:sp>
+            <p:nvSpPr>
+              <p:cNvPr id="126" name="Google Shape;126;p3"/>
+              <p:cNvSpPr/>
+              <p:nvPr/>
+            </p:nvSpPr>
+            <p:spPr>
+              <a:xfrm>
+                <a:off x="1896886" y="3073839"/>
+                <a:ext cx="9456913" cy="916611"/>
+              </a:xfrm>
+              <a:prstGeom prst="rect">
+                <a:avLst/>
+              </a:prstGeom>
+              <a:noFill/>
+              <a:ln>
+                <a:noFill/>
+              </a:ln>
+            </p:spPr>
+            <p:txBody>
+              <a:bodyPr anchorCtr="0" anchor="ctr" bIns="91425" lIns="91425" spcFirstLastPara="1" rIns="91425" wrap="square" tIns="91425">
+                <a:noAutofit/>
+              </a:bodyPr>
+              <a:lstStyle/>
+              <a:p>
+                <a:pPr indent="0" lvl="0" marL="0" marR="0" rtl="0" algn="l">
+                  <a:lnSpc>
+                    <a:spcPct val="100000"/>
+                  </a:lnSpc>
+                  <a:spcBef>
+                    <a:spcPts val="0"/>
+                  </a:spcBef>
+                  <a:spcAft>
+                    <a:spcPts val="0"/>
+                  </a:spcAft>
+                  <a:buClr>
+                    <a:srgbClr val="000000"/>
+                  </a:buClr>
+                  <a:buSzPts val="1400"/>
+                  <a:buFont typeface="Arial"/>
+                  <a:buNone/>
+                </a:pPr>
+                <a:r>
+                  <a:t/>
+                </a:r>
+                <a:endParaRPr b="0" i="0" sz="1400" u="none" cap="none" strike="noStrike">
+                  <a:solidFill>
+                    <a:srgbClr val="000000"/>
+                  </a:solidFill>
+                  <a:latin typeface="Arial"/>
+                  <a:ea typeface="Arial"/>
+                  <a:cs typeface="Arial"/>
+                  <a:sym typeface="Arial"/>
+                </a:endParaRPr>
+              </a:p>
+            </p:txBody>
+          </p:sp>
+          <p:sp>
+            <p:nvSpPr>
+              <p:cNvPr id="127" name="Google Shape;127;p3"/>
+              <p:cNvSpPr txBox="1"/>
+              <p:nvPr/>
+            </p:nvSpPr>
+            <p:spPr>
+              <a:xfrm>
+                <a:off x="1756724" y="3073838"/>
+                <a:ext cx="9456913" cy="916611"/>
+              </a:xfrm>
+              <a:prstGeom prst="rect">
+                <a:avLst/>
+              </a:prstGeom>
+              <a:noFill/>
+              <a:ln>
+                <a:noFill/>
+              </a:ln>
+            </p:spPr>
+            <p:txBody>
+              <a:bodyPr anchorCtr="0" anchor="ctr" bIns="97000" lIns="97000" spcFirstLastPara="1" rIns="97000" wrap="square" tIns="97000">
+                <a:noAutofit/>
+              </a:bodyPr>
+              <a:lstStyle/>
+              <a:p>
+                <a:pPr indent="0" lvl="0" marL="0" marR="0" rtl="0" algn="l">
+                  <a:lnSpc>
+                    <a:spcPct val="100000"/>
+                  </a:lnSpc>
+                  <a:spcBef>
+                    <a:spcPts val="0"/>
+                  </a:spcBef>
+                  <a:spcAft>
+                    <a:spcPts val="0"/>
+                  </a:spcAft>
+                  <a:buClr>
+                    <a:schemeClr val="lt1"/>
+                  </a:buClr>
+                  <a:buSzPts val="1500"/>
+                  <a:buFont typeface="Arial"/>
+                  <a:buNone/>
+                </a:pPr>
+                <a:r>
+                  <a:rPr b="1" i="0" lang="pt-BR" sz="1500" u="none" cap="none" strike="noStrike">
+                    <a:solidFill>
+                      <a:schemeClr val="lt1"/>
+                    </a:solidFill>
+                    <a:latin typeface="Arial"/>
+                    <a:ea typeface="Arial"/>
+                    <a:cs typeface="Arial"/>
+                    <a:sym typeface="Arial"/>
+                  </a:rPr>
+                  <a:t>Propósito</a:t>
+                </a:r>
+                <a:endParaRPr b="0" i="0" sz="1400" u="none" cap="none" strike="noStrike">
+                  <a:solidFill>
+                    <a:srgbClr val="000000"/>
+                  </a:solidFill>
+                  <a:latin typeface="Arial"/>
+                  <a:ea typeface="Arial"/>
+                  <a:cs typeface="Arial"/>
+                  <a:sym typeface="Arial"/>
+                </a:endParaRPr>
+              </a:p>
+              <a:p>
+                <a:pPr indent="0" lvl="0" marL="0" marR="0" rtl="0" algn="l">
+                  <a:lnSpc>
+                    <a:spcPct val="100000"/>
+                  </a:lnSpc>
+                  <a:spcBef>
+                    <a:spcPts val="525"/>
+                  </a:spcBef>
+                  <a:spcAft>
+                    <a:spcPts val="0"/>
+                  </a:spcAft>
+                  <a:buNone/>
+                </a:pPr>
+                <a:r>
+                  <a:rPr b="0" i="0" lang="pt-BR" sz="1500" u="none" cap="none" strike="noStrike">
+                    <a:solidFill>
+                      <a:schemeClr val="lt1"/>
+                    </a:solidFill>
+                    <a:latin typeface="Arial"/>
+                    <a:ea typeface="Arial"/>
+                    <a:cs typeface="Arial"/>
+                    <a:sym typeface="Arial"/>
+                  </a:rPr>
+                  <a:t>Centralizar o trabalho pedagógico e a representação do cotidiano das crianças em uma ferramenta.</a:t>
+                </a:r>
+                <a:endParaRPr b="0" i="0" sz="1500" u="none" cap="none" strike="noStrike">
+                  <a:solidFill>
+                    <a:schemeClr val="lt1"/>
+                  </a:solidFill>
+                  <a:latin typeface="Arial"/>
+                  <a:ea typeface="Arial"/>
+                  <a:cs typeface="Arial"/>
+                  <a:sym typeface="Arial"/>
+                </a:endParaRPr>
+              </a:p>
+            </p:txBody>
+          </p:sp>
+        </p:grpSp>
+      </p:grpSp>
+      <p:pic>
+        <p:nvPicPr>
+          <p:cNvPr descr="Interface gráfica do usuário, Aplicativo&#10;&#10;O conteúdo gerado por IA pode estar incorreto." id="128" name="Google Shape;128;p3"/>
+          <p:cNvPicPr preferRelativeResize="0"/>
+          <p:nvPr/>
+        </p:nvPicPr>
+        <p:blipFill rotWithShape="1">
+          <a:blip r:embed="rId5">
+            <a:alphaModFix/>
+          </a:blip>
+          <a:srcRect b="0" l="0" r="0" t="15063"/>
+          <a:stretch/>
+        </p:blipFill>
+        <p:spPr>
+          <a:xfrm>
+            <a:off x="1395022" y="3490182"/>
+            <a:ext cx="9398908" cy="2917562"/>
+          </a:xfrm>
+          <a:prstGeom prst="rect">
+            <a:avLst/>
+          </a:prstGeom>
+          <a:noFill/>
+          <a:ln>
+            <a:noFill/>
+          </a:ln>
+        </p:spPr>
+      </p:pic>
+      <p:pic>
+        <p:nvPicPr>
+          <p:cNvPr descr="Desenho de um círculo&#10;&#10;O conteúdo gerado por IA pode estar incorreto." id="129" name="Google Shape;129;p3"/>
+          <p:cNvPicPr preferRelativeResize="0"/>
+          <p:nvPr/>
+        </p:nvPicPr>
+        <p:blipFill rotWithShape="1">
+          <a:blip r:embed="rId6">
+            <a:alphaModFix/>
+          </a:blip>
+          <a:srcRect b="0" l="0" r="0" t="0"/>
+          <a:stretch/>
+        </p:blipFill>
+        <p:spPr>
+          <a:xfrm>
+            <a:off x="3928980" y="3987813"/>
+            <a:ext cx="4330991" cy="682558"/>
+          </a:xfrm>
+          <a:prstGeom prst="rect">
+            <a:avLst/>
+          </a:prstGeom>
+          <a:noFill/>
+          <a:ln>
+            <a:noFill/>
+          </a:ln>
+        </p:spPr>
+      </p:pic>
+    </p:spTree>
+  </p:cSld>
+  <p:clrMapOvr>
+    <a:masterClrMapping/>
+  </p:clrMapOvr>
+  <mc:AlternateContent>
+    <mc:Choice Requires="p14">
+      <p:transition spd="slow" p14:dur="3400">
+        <p14:reveal dir="l"/>
+      </p:transition>
+    </mc:Choice>
+    <mc:Fallback>
+      <p:transition spd="med">
+        <p:fade/>
+      </p:transition>
+    </mc:Fallback>
+  </mc:AlternateContent>
+</p:sld>
+</file>
+
+<file path=ppt/slides/slide4.xml><?xml version="1.0" encoding="utf-8"?>
+<p:sld xmlns:a="http://schemas.openxmlformats.org/drawingml/2006/main" xmlns:r="http://schemas.openxmlformats.org/officeDocument/2006/relationships" xmlns:mc="http://schemas.openxmlformats.org/markup-compatibility/2006" xmlns:mv="urn:schemas-microsoft-com:mac:vml" xmlns:p="http://schemas.openxmlformats.org/presentationml/2006/main" xmlns:c="http://schemas.openxmlformats.org/drawingml/2006/chart" xmlns:dgm="http://schemas.openxmlformats.org/drawingml/2006/diagram" xmlns:o="urn:schemas-microsoft-com:office:office" xmlns:v="urn:schemas-microsoft-com:vml" xmlns:pvml="urn:schemas-microsoft-com:office:powerpoint" xmlns:com="http://schemas.openxmlformats.org/drawingml/2006/compatibility" xmlns:p14="http://schemas.microsoft.com/office/powerpoint/2010/main" xmlns:p15="http://schemas.microsoft.com/office/powerpoint/2012/main" xmlns:ahyp="http://schemas.microsoft.com/office/drawing/2018/hyperlinkcolor">
+  <p:cSld>
+    <p:bg>
+      <p:bgPr>
+        <a:solidFill>
+          <a:srgbClr val="ECE6D8"/>
+        </a:solidFill>
+      </p:bgPr>
+    </p:bg>
+    <p:spTree>
+      <p:nvGrpSpPr>
+        <p:cNvPr id="134" name="Shape 134"/>
+        <p:cNvGrpSpPr/>
+        <p:nvPr/>
+      </p:nvGrpSpPr>
+      <p:grpSpPr>
+        <a:xfrm>
+          <a:off x="0" y="0"/>
+          <a:ext cx="0" cy="0"/>
+          <a:chOff x="0" y="0"/>
+          <a:chExt cx="0" cy="0"/>
+        </a:xfrm>
+      </p:grpSpPr>
+      <p:sp>
+        <p:nvSpPr>
+          <p:cNvPr id="135" name="Google Shape;135;p4"/>
+          <p:cNvSpPr txBox="1"/>
+          <p:nvPr>
+            <p:ph type="title"/>
+          </p:nvPr>
+        </p:nvSpPr>
+        <p:spPr>
+          <a:xfrm>
+            <a:off x="838200" y="557189"/>
+            <a:ext cx="3374136" cy="5567891"/>
+          </a:xfrm>
+          <a:prstGeom prst="rect">
+            <a:avLst/>
+          </a:prstGeom>
+          <a:noFill/>
+          <a:ln>
+            <a:noFill/>
+          </a:ln>
+        </p:spPr>
+        <p:txBody>
+          <a:bodyPr anchorCtr="0" anchor="ctr" bIns="45700" lIns="91425" spcFirstLastPara="1" rIns="91425" wrap="square" tIns="45700">
+            <a:normAutofit/>
+          </a:bodyPr>
+          <a:lstStyle/>
+          <a:p>
+            <a:pPr indent="0" lvl="0" marL="0" rtl="0" algn="l">
+              <a:lnSpc>
+                <a:spcPct val="90000"/>
+              </a:lnSpc>
+              <a:spcBef>
+                <a:spcPts val="0"/>
+              </a:spcBef>
+              <a:spcAft>
+                <a:spcPts val="0"/>
+              </a:spcAft>
+              <a:buClr>
+                <a:srgbClr val="1C3C5C"/>
+              </a:buClr>
+              <a:buSzPts val="3600"/>
+              <a:buFont typeface="Arial"/>
+              <a:buNone/>
+            </a:pPr>
+            <a:r>
+              <a:rPr b="1" lang="pt-BR" sz="3600">
+                <a:solidFill>
+                  <a:srgbClr val="1C3C5C"/>
+                </a:solidFill>
+                <a:latin typeface="Arial"/>
+                <a:ea typeface="Arial"/>
+                <a:cs typeface="Arial"/>
+                <a:sym typeface="Arial"/>
+              </a:rPr>
+              <a:t>Experiência do Usuário</a:t>
+            </a:r>
+            <a:endParaRPr/>
+          </a:p>
+        </p:txBody>
+      </p:sp>
+      <p:grpSp>
+        <p:nvGrpSpPr>
+          <p:cNvPr id="136" name="Google Shape;136;p4"/>
+          <p:cNvGrpSpPr/>
+          <p:nvPr/>
+        </p:nvGrpSpPr>
+        <p:grpSpPr>
+          <a:xfrm>
+            <a:off x="5090159" y="1516740"/>
+            <a:ext cx="6263641" cy="3372029"/>
+            <a:chOff x="5090159" y="1516740"/>
+            <a:chExt cx="6263641" cy="3372029"/>
           </a:xfrm>
         </p:grpSpPr>
         <p:sp>
           <p:nvSpPr>
-            <p:cNvPr id="118" name="Google Shape;118;p3"/>
+            <p:cNvPr id="137" name="Google Shape;137;p4"/>
             <p:cNvSpPr/>
             <p:nvPr/>
           </p:nvSpPr>
           <p:spPr>
             <a:xfrm>
-              <a:off x="0" y="1808"/>
-              <a:ext cx="10515600" cy="916611"/>
+              <a:off x="5090160" y="1516740"/>
+              <a:ext cx="6263640" cy="849893"/>
             </a:xfrm>
             <a:prstGeom prst="roundRect">
               <a:avLst>
@@ -17934,7 +17839,7 @@
               </a:avLst>
             </a:prstGeom>
             <a:solidFill>
-              <a:srgbClr val="CF5721"/>
+              <a:srgbClr val="F6C5AB"/>
             </a:solidFill>
             <a:ln>
               <a:noFill/>
@@ -17980,1371 +17885,13 @@
         </p:sp>
         <p:sp>
           <p:nvSpPr>
-            <p:cNvPr id="119" name="Google Shape;119;p3"/>
+            <p:cNvPr id="138" name="Google Shape;138;p4"/>
             <p:cNvSpPr/>
             <p:nvPr/>
           </p:nvSpPr>
           <p:spPr>
             <a:xfrm>
-              <a:off x="277275" y="208046"/>
-              <a:ext cx="504136" cy="504136"/>
-            </a:xfrm>
-            <a:prstGeom prst="rect">
-              <a:avLst/>
-            </a:prstGeom>
-            <a:blipFill rotWithShape="1">
-              <a:blip r:embed="rId3">
-                <a:alphaModFix/>
-              </a:blip>
-              <a:stretch>
-                <a:fillRect b="0" l="0" r="0" t="0"/>
-              </a:stretch>
-            </a:blipFill>
-            <a:ln>
-              <a:noFill/>
-            </a:ln>
-            <a:effectLst>
-              <a:outerShdw blurRad="57150" rotWithShape="0" algn="ctr" dir="5400000" dist="19050">
-                <a:srgbClr val="000000">
-                  <a:alpha val="62352"/>
-                </a:srgbClr>
-              </a:outerShdw>
-            </a:effectLst>
-          </p:spPr>
-          <p:txBody>
-            <a:bodyPr anchorCtr="0" anchor="ctr" bIns="91425" lIns="91425" spcFirstLastPara="1" rIns="91425" wrap="square" tIns="91425">
-              <a:noAutofit/>
-            </a:bodyPr>
-            <a:lstStyle/>
-            <a:p>
-              <a:pPr indent="0" lvl="0" marL="0" marR="0" rtl="0" algn="l">
-                <a:lnSpc>
-                  <a:spcPct val="100000"/>
-                </a:lnSpc>
-                <a:spcBef>
-                  <a:spcPts val="0"/>
-                </a:spcBef>
-                <a:spcAft>
-                  <a:spcPts val="0"/>
-                </a:spcAft>
-                <a:buClr>
-                  <a:srgbClr val="000000"/>
-                </a:buClr>
-                <a:buSzPts val="1400"/>
-                <a:buFont typeface="Arial"/>
-                <a:buNone/>
-              </a:pPr>
-              <a:r>
-                <a:t/>
-              </a:r>
-              <a:endParaRPr b="0" i="0" sz="1400" u="none" cap="none" strike="noStrike">
-                <a:solidFill>
-                  <a:srgbClr val="000000"/>
-                </a:solidFill>
-                <a:latin typeface="Arial"/>
-                <a:ea typeface="Arial"/>
-                <a:cs typeface="Arial"/>
-                <a:sym typeface="Arial"/>
-              </a:endParaRPr>
-            </a:p>
-          </p:txBody>
-        </p:sp>
-        <p:sp>
-          <p:nvSpPr>
-            <p:cNvPr id="120" name="Google Shape;120;p3"/>
-            <p:cNvSpPr/>
-            <p:nvPr/>
-          </p:nvSpPr>
-          <p:spPr>
-            <a:xfrm>
-              <a:off x="1058686" y="1808"/>
-              <a:ext cx="9456913" cy="916611"/>
-            </a:xfrm>
-            <a:prstGeom prst="rect">
-              <a:avLst/>
-            </a:prstGeom>
-            <a:noFill/>
-            <a:ln>
-              <a:noFill/>
-            </a:ln>
-          </p:spPr>
-          <p:txBody>
-            <a:bodyPr anchorCtr="0" anchor="ctr" bIns="91425" lIns="91425" spcFirstLastPara="1" rIns="91425" wrap="square" tIns="91425">
-              <a:noAutofit/>
-            </a:bodyPr>
-            <a:lstStyle/>
-            <a:p>
-              <a:pPr indent="0" lvl="0" marL="0" marR="0" rtl="0" algn="l">
-                <a:lnSpc>
-                  <a:spcPct val="100000"/>
-                </a:lnSpc>
-                <a:spcBef>
-                  <a:spcPts val="0"/>
-                </a:spcBef>
-                <a:spcAft>
-                  <a:spcPts val="0"/>
-                </a:spcAft>
-                <a:buClr>
-                  <a:srgbClr val="000000"/>
-                </a:buClr>
-                <a:buSzPts val="1400"/>
-                <a:buFont typeface="Arial"/>
-                <a:buNone/>
-              </a:pPr>
-              <a:r>
-                <a:t/>
-              </a:r>
-              <a:endParaRPr b="0" i="0" sz="1400" u="none" cap="none" strike="noStrike">
-                <a:solidFill>
-                  <a:srgbClr val="000000"/>
-                </a:solidFill>
-                <a:latin typeface="Arial"/>
-                <a:ea typeface="Arial"/>
-                <a:cs typeface="Arial"/>
-                <a:sym typeface="Arial"/>
-              </a:endParaRPr>
-            </a:p>
-          </p:txBody>
-        </p:sp>
-        <p:sp>
-          <p:nvSpPr>
-            <p:cNvPr id="121" name="Google Shape;121;p3"/>
-            <p:cNvSpPr txBox="1"/>
-            <p:nvPr/>
-          </p:nvSpPr>
-          <p:spPr>
-            <a:xfrm>
-              <a:off x="1058686" y="1808"/>
-              <a:ext cx="9456913" cy="916611"/>
-            </a:xfrm>
-            <a:prstGeom prst="rect">
-              <a:avLst/>
-            </a:prstGeom>
-            <a:noFill/>
-            <a:ln>
-              <a:noFill/>
-            </a:ln>
-          </p:spPr>
-          <p:txBody>
-            <a:bodyPr anchorCtr="0" anchor="ctr" bIns="97000" lIns="97000" spcFirstLastPara="1" rIns="97000" wrap="square" tIns="97000">
-              <a:noAutofit/>
-            </a:bodyPr>
-            <a:lstStyle/>
-            <a:p>
-              <a:pPr indent="0" lvl="0" marL="0" marR="0" rtl="0" algn="l">
-                <a:lnSpc>
-                  <a:spcPct val="100000"/>
-                </a:lnSpc>
-                <a:spcBef>
-                  <a:spcPts val="0"/>
-                </a:spcBef>
-                <a:spcAft>
-                  <a:spcPts val="0"/>
-                </a:spcAft>
-                <a:buClr>
-                  <a:schemeClr val="lt1"/>
-                </a:buClr>
-                <a:buSzPts val="1500"/>
-                <a:buFont typeface="Arial"/>
-                <a:buNone/>
-              </a:pPr>
-              <a:r>
-                <a:rPr b="1" i="0" lang="pt-BR" sz="1500" u="none" cap="none" strike="noStrike">
-                  <a:solidFill>
-                    <a:schemeClr val="lt1"/>
-                  </a:solidFill>
-                  <a:latin typeface="Arial"/>
-                  <a:ea typeface="Arial"/>
-                  <a:cs typeface="Arial"/>
-                  <a:sym typeface="Arial"/>
-                </a:rPr>
-                <a:t>O que é</a:t>
-              </a:r>
-              <a:endParaRPr b="0" i="0" sz="1400" u="none" cap="none" strike="noStrike">
-                <a:solidFill>
-                  <a:srgbClr val="000000"/>
-                </a:solidFill>
-                <a:latin typeface="Arial"/>
-                <a:ea typeface="Arial"/>
-                <a:cs typeface="Arial"/>
-                <a:sym typeface="Arial"/>
-              </a:endParaRPr>
-            </a:p>
-            <a:p>
-              <a:pPr indent="0" lvl="0" marL="0" marR="0" rtl="0" algn="l">
-                <a:lnSpc>
-                  <a:spcPct val="100000"/>
-                </a:lnSpc>
-                <a:spcBef>
-                  <a:spcPts val="525"/>
-                </a:spcBef>
-                <a:spcAft>
-                  <a:spcPts val="0"/>
-                </a:spcAft>
-                <a:buClr>
-                  <a:schemeClr val="lt1"/>
-                </a:buClr>
-                <a:buSzPts val="1500"/>
-                <a:buFont typeface="Arial"/>
-                <a:buNone/>
-              </a:pPr>
-              <a:r>
-                <a:rPr b="0" i="0" lang="pt-BR" sz="1500" u="none" cap="none" strike="noStrike">
-                  <a:solidFill>
-                    <a:schemeClr val="lt1"/>
-                  </a:solidFill>
-                  <a:latin typeface="Arial"/>
-                  <a:ea typeface="Arial"/>
-                  <a:cs typeface="Arial"/>
-                  <a:sym typeface="Arial"/>
-                </a:rPr>
-                <a:t>Um ambiente digital único, seguro e integrado, desenhado especificamente para a filosofia do Observatório da Cultura Infantil (OBECI).</a:t>
-              </a:r>
-              <a:endParaRPr b="0" i="0" sz="1500" u="none" cap="none" strike="noStrike">
-                <a:solidFill>
-                  <a:schemeClr val="lt1"/>
-                </a:solidFill>
-                <a:latin typeface="Arial"/>
-                <a:ea typeface="Arial"/>
-                <a:cs typeface="Arial"/>
-                <a:sym typeface="Arial"/>
-              </a:endParaRPr>
-            </a:p>
-          </p:txBody>
-        </p:sp>
-        <p:sp>
-          <p:nvSpPr>
-            <p:cNvPr id="122" name="Google Shape;122;p3"/>
-            <p:cNvSpPr/>
-            <p:nvPr/>
-          </p:nvSpPr>
-          <p:spPr>
-            <a:xfrm>
-              <a:off x="0" y="1147573"/>
-              <a:ext cx="10515600" cy="916611"/>
-            </a:xfrm>
-            <a:prstGeom prst="roundRect">
-              <a:avLst>
-                <a:gd fmla="val 10000" name="adj"/>
-              </a:avLst>
-            </a:prstGeom>
-            <a:solidFill>
-              <a:srgbClr val="CF5721"/>
-            </a:solidFill>
-            <a:ln>
-              <a:noFill/>
-            </a:ln>
-          </p:spPr>
-          <p:txBody>
-            <a:bodyPr anchorCtr="0" anchor="ctr" bIns="91425" lIns="91425" spcFirstLastPara="1" rIns="91425" wrap="square" tIns="91425">
-              <a:noAutofit/>
-            </a:bodyPr>
-            <a:lstStyle/>
-            <a:p>
-              <a:pPr indent="0" lvl="0" marL="0" marR="0" rtl="0" algn="l">
-                <a:lnSpc>
-                  <a:spcPct val="100000"/>
-                </a:lnSpc>
-                <a:spcBef>
-                  <a:spcPts val="0"/>
-                </a:spcBef>
-                <a:spcAft>
-                  <a:spcPts val="0"/>
-                </a:spcAft>
-                <a:buClr>
-                  <a:srgbClr val="000000"/>
-                </a:buClr>
-                <a:buSzPts val="1400"/>
-                <a:buFont typeface="Arial"/>
-                <a:buNone/>
-              </a:pPr>
-              <a:r>
-                <a:t/>
-              </a:r>
-              <a:endParaRPr b="0" i="0" sz="1400" u="none" cap="none" strike="noStrike">
-                <a:solidFill>
-                  <a:srgbClr val="000000"/>
-                </a:solidFill>
-                <a:latin typeface="Arial"/>
-                <a:ea typeface="Arial"/>
-                <a:cs typeface="Arial"/>
-                <a:sym typeface="Arial"/>
-              </a:endParaRPr>
-            </a:p>
-          </p:txBody>
-        </p:sp>
-        <p:sp>
-          <p:nvSpPr>
-            <p:cNvPr id="123" name="Google Shape;123;p3"/>
-            <p:cNvSpPr/>
-            <p:nvPr/>
-          </p:nvSpPr>
-          <p:spPr>
-            <a:xfrm>
-              <a:off x="277275" y="1353811"/>
-              <a:ext cx="504136" cy="504136"/>
-            </a:xfrm>
-            <a:prstGeom prst="rect">
-              <a:avLst/>
-            </a:prstGeom>
-            <a:blipFill rotWithShape="1">
-              <a:blip r:embed="rId4">
-                <a:alphaModFix/>
-              </a:blip>
-              <a:stretch>
-                <a:fillRect b="0" l="0" r="0" t="0"/>
-              </a:stretch>
-            </a:blipFill>
-            <a:ln>
-              <a:noFill/>
-            </a:ln>
-            <a:effectLst>
-              <a:outerShdw blurRad="57150" rotWithShape="0" algn="ctr" dir="5400000" dist="19050">
-                <a:srgbClr val="000000">
-                  <a:alpha val="62352"/>
-                </a:srgbClr>
-              </a:outerShdw>
-            </a:effectLst>
-          </p:spPr>
-          <p:txBody>
-            <a:bodyPr anchorCtr="0" anchor="ctr" bIns="91425" lIns="91425" spcFirstLastPara="1" rIns="91425" wrap="square" tIns="91425">
-              <a:noAutofit/>
-            </a:bodyPr>
-            <a:lstStyle/>
-            <a:p>
-              <a:pPr indent="0" lvl="0" marL="0" marR="0" rtl="0" algn="l">
-                <a:lnSpc>
-                  <a:spcPct val="100000"/>
-                </a:lnSpc>
-                <a:spcBef>
-                  <a:spcPts val="0"/>
-                </a:spcBef>
-                <a:spcAft>
-                  <a:spcPts val="0"/>
-                </a:spcAft>
-                <a:buClr>
-                  <a:srgbClr val="000000"/>
-                </a:buClr>
-                <a:buSzPts val="1400"/>
-                <a:buFont typeface="Arial"/>
-                <a:buNone/>
-              </a:pPr>
-              <a:r>
-                <a:t/>
-              </a:r>
-              <a:endParaRPr b="0" i="0" sz="1400" u="none" cap="none" strike="noStrike">
-                <a:solidFill>
-                  <a:srgbClr val="000000"/>
-                </a:solidFill>
-                <a:latin typeface="Arial"/>
-                <a:ea typeface="Arial"/>
-                <a:cs typeface="Arial"/>
-                <a:sym typeface="Arial"/>
-              </a:endParaRPr>
-            </a:p>
-          </p:txBody>
-        </p:sp>
-        <p:sp>
-          <p:nvSpPr>
-            <p:cNvPr id="124" name="Google Shape;124;p3"/>
-            <p:cNvSpPr/>
-            <p:nvPr/>
-          </p:nvSpPr>
-          <p:spPr>
-            <a:xfrm>
-              <a:off x="1058686" y="1147573"/>
-              <a:ext cx="9456913" cy="916611"/>
-            </a:xfrm>
-            <a:prstGeom prst="rect">
-              <a:avLst/>
-            </a:prstGeom>
-            <a:noFill/>
-            <a:ln>
-              <a:noFill/>
-            </a:ln>
-          </p:spPr>
-          <p:txBody>
-            <a:bodyPr anchorCtr="0" anchor="ctr" bIns="91425" lIns="91425" spcFirstLastPara="1" rIns="91425" wrap="square" tIns="91425">
-              <a:noAutofit/>
-            </a:bodyPr>
-            <a:lstStyle/>
-            <a:p>
-              <a:pPr indent="0" lvl="0" marL="0" marR="0" rtl="0" algn="l">
-                <a:lnSpc>
-                  <a:spcPct val="100000"/>
-                </a:lnSpc>
-                <a:spcBef>
-                  <a:spcPts val="0"/>
-                </a:spcBef>
-                <a:spcAft>
-                  <a:spcPts val="0"/>
-                </a:spcAft>
-                <a:buClr>
-                  <a:srgbClr val="000000"/>
-                </a:buClr>
-                <a:buSzPts val="1400"/>
-                <a:buFont typeface="Arial"/>
-                <a:buNone/>
-              </a:pPr>
-              <a:r>
-                <a:t/>
-              </a:r>
-              <a:endParaRPr b="0" i="0" sz="1400" u="none" cap="none" strike="noStrike">
-                <a:solidFill>
-                  <a:srgbClr val="000000"/>
-                </a:solidFill>
-                <a:latin typeface="Arial"/>
-                <a:ea typeface="Arial"/>
-                <a:cs typeface="Arial"/>
-                <a:sym typeface="Arial"/>
-              </a:endParaRPr>
-            </a:p>
-          </p:txBody>
-        </p:sp>
-        <p:sp>
-          <p:nvSpPr>
-            <p:cNvPr id="125" name="Google Shape;125;p3"/>
-            <p:cNvSpPr txBox="1"/>
-            <p:nvPr/>
-          </p:nvSpPr>
-          <p:spPr>
-            <a:xfrm>
-              <a:off x="1058686" y="1147573"/>
-              <a:ext cx="9456913" cy="916611"/>
-            </a:xfrm>
-            <a:prstGeom prst="rect">
-              <a:avLst/>
-            </a:prstGeom>
-            <a:noFill/>
-            <a:ln>
-              <a:noFill/>
-            </a:ln>
-          </p:spPr>
-          <p:txBody>
-            <a:bodyPr anchorCtr="0" anchor="ctr" bIns="97000" lIns="97000" spcFirstLastPara="1" rIns="97000" wrap="square" tIns="97000">
-              <a:noAutofit/>
-            </a:bodyPr>
-            <a:lstStyle/>
-            <a:p>
-              <a:pPr indent="0" lvl="0" marL="0" marR="0" rtl="0" algn="l">
-                <a:lnSpc>
-                  <a:spcPct val="100000"/>
-                </a:lnSpc>
-                <a:spcBef>
-                  <a:spcPts val="0"/>
-                </a:spcBef>
-                <a:spcAft>
-                  <a:spcPts val="0"/>
-                </a:spcAft>
-                <a:buClr>
-                  <a:schemeClr val="lt1"/>
-                </a:buClr>
-                <a:buSzPts val="1500"/>
-                <a:buFont typeface="Arial"/>
-                <a:buNone/>
-              </a:pPr>
-              <a:r>
-                <a:rPr b="1" i="0" lang="pt-BR" sz="1500" u="none" cap="none" strike="noStrike">
-                  <a:solidFill>
-                    <a:schemeClr val="lt1"/>
-                  </a:solidFill>
-                  <a:latin typeface="Arial"/>
-                  <a:ea typeface="Arial"/>
-                  <a:cs typeface="Arial"/>
-                  <a:sym typeface="Arial"/>
-                </a:rPr>
-                <a:t>Propósito</a:t>
-              </a:r>
-              <a:endParaRPr b="0" i="0" sz="1400" u="none" cap="none" strike="noStrike">
-                <a:solidFill>
-                  <a:srgbClr val="000000"/>
-                </a:solidFill>
-                <a:latin typeface="Arial"/>
-                <a:ea typeface="Arial"/>
-                <a:cs typeface="Arial"/>
-                <a:sym typeface="Arial"/>
-              </a:endParaRPr>
-            </a:p>
-            <a:p>
-              <a:pPr indent="0" lvl="0" marL="0" marR="0" rtl="0" algn="l">
-                <a:lnSpc>
-                  <a:spcPct val="100000"/>
-                </a:lnSpc>
-                <a:spcBef>
-                  <a:spcPts val="525"/>
-                </a:spcBef>
-                <a:spcAft>
-                  <a:spcPts val="0"/>
-                </a:spcAft>
-                <a:buClr>
-                  <a:schemeClr val="lt1"/>
-                </a:buClr>
-                <a:buSzPts val="1500"/>
-                <a:buFont typeface="Arial"/>
-                <a:buNone/>
-              </a:pPr>
-              <a:r>
-                <a:rPr b="0" i="0" lang="pt-BR" sz="1500" u="none" cap="none" strike="noStrike">
-                  <a:solidFill>
-                    <a:schemeClr val="lt1"/>
-                  </a:solidFill>
-                  <a:latin typeface="Arial"/>
-                  <a:ea typeface="Arial"/>
-                  <a:cs typeface="Arial"/>
-                  <a:sym typeface="Arial"/>
-                </a:rPr>
-                <a:t>Centralizar o planejamento pedagógico e a comunicação do cotidiano em uma ferramenta centrada na criança.</a:t>
-              </a:r>
-              <a:endParaRPr b="0" i="0" sz="1500" u="none" cap="none" strike="noStrike">
-                <a:solidFill>
-                  <a:schemeClr val="lt1"/>
-                </a:solidFill>
-                <a:latin typeface="Arial"/>
-                <a:ea typeface="Arial"/>
-                <a:cs typeface="Arial"/>
-                <a:sym typeface="Arial"/>
-              </a:endParaRPr>
-            </a:p>
-          </p:txBody>
-        </p:sp>
-        <p:sp>
-          <p:nvSpPr>
-            <p:cNvPr id="126" name="Google Shape;126;p3"/>
-            <p:cNvSpPr/>
-            <p:nvPr/>
-          </p:nvSpPr>
-          <p:spPr>
-            <a:xfrm>
-              <a:off x="0" y="2293338"/>
-              <a:ext cx="10515600" cy="916611"/>
-            </a:xfrm>
-            <a:prstGeom prst="roundRect">
-              <a:avLst>
-                <a:gd fmla="val 10000" name="adj"/>
-              </a:avLst>
-            </a:prstGeom>
-            <a:solidFill>
-              <a:srgbClr val="CF5721"/>
-            </a:solidFill>
-            <a:ln>
-              <a:noFill/>
-            </a:ln>
-          </p:spPr>
-          <p:txBody>
-            <a:bodyPr anchorCtr="0" anchor="ctr" bIns="91425" lIns="91425" spcFirstLastPara="1" rIns="91425" wrap="square" tIns="91425">
-              <a:noAutofit/>
-            </a:bodyPr>
-            <a:lstStyle/>
-            <a:p>
-              <a:pPr indent="0" lvl="0" marL="0" marR="0" rtl="0" algn="l">
-                <a:lnSpc>
-                  <a:spcPct val="100000"/>
-                </a:lnSpc>
-                <a:spcBef>
-                  <a:spcPts val="0"/>
-                </a:spcBef>
-                <a:spcAft>
-                  <a:spcPts val="0"/>
-                </a:spcAft>
-                <a:buClr>
-                  <a:srgbClr val="000000"/>
-                </a:buClr>
-                <a:buSzPts val="1400"/>
-                <a:buFont typeface="Arial"/>
-                <a:buNone/>
-              </a:pPr>
-              <a:r>
-                <a:t/>
-              </a:r>
-              <a:endParaRPr b="0" i="0" sz="1400" u="none" cap="none" strike="noStrike">
-                <a:solidFill>
-                  <a:srgbClr val="000000"/>
-                </a:solidFill>
-                <a:latin typeface="Arial"/>
-                <a:ea typeface="Arial"/>
-                <a:cs typeface="Arial"/>
-                <a:sym typeface="Arial"/>
-              </a:endParaRPr>
-            </a:p>
-          </p:txBody>
-        </p:sp>
-        <p:sp>
-          <p:nvSpPr>
-            <p:cNvPr id="127" name="Google Shape;127;p3"/>
-            <p:cNvSpPr/>
-            <p:nvPr/>
-          </p:nvSpPr>
-          <p:spPr>
-            <a:xfrm>
-              <a:off x="277275" y="2499576"/>
-              <a:ext cx="504136" cy="504136"/>
-            </a:xfrm>
-            <a:prstGeom prst="rect">
-              <a:avLst/>
-            </a:prstGeom>
-            <a:blipFill rotWithShape="1">
-              <a:blip r:embed="rId5">
-                <a:alphaModFix/>
-              </a:blip>
-              <a:stretch>
-                <a:fillRect b="0" l="0" r="0" t="0"/>
-              </a:stretch>
-            </a:blipFill>
-            <a:ln>
-              <a:noFill/>
-            </a:ln>
-            <a:effectLst>
-              <a:outerShdw blurRad="57150" rotWithShape="0" algn="ctr" dir="5400000" dist="19050">
-                <a:srgbClr val="000000">
-                  <a:alpha val="62352"/>
-                </a:srgbClr>
-              </a:outerShdw>
-            </a:effectLst>
-          </p:spPr>
-          <p:txBody>
-            <a:bodyPr anchorCtr="0" anchor="ctr" bIns="91425" lIns="91425" spcFirstLastPara="1" rIns="91425" wrap="square" tIns="91425">
-              <a:noAutofit/>
-            </a:bodyPr>
-            <a:lstStyle/>
-            <a:p>
-              <a:pPr indent="0" lvl="0" marL="0" marR="0" rtl="0" algn="l">
-                <a:lnSpc>
-                  <a:spcPct val="100000"/>
-                </a:lnSpc>
-                <a:spcBef>
-                  <a:spcPts val="0"/>
-                </a:spcBef>
-                <a:spcAft>
-                  <a:spcPts val="0"/>
-                </a:spcAft>
-                <a:buClr>
-                  <a:srgbClr val="000000"/>
-                </a:buClr>
-                <a:buSzPts val="1400"/>
-                <a:buFont typeface="Arial"/>
-                <a:buNone/>
-              </a:pPr>
-              <a:r>
-                <a:t/>
-              </a:r>
-              <a:endParaRPr b="0" i="0" sz="1400" u="none" cap="none" strike="noStrike">
-                <a:solidFill>
-                  <a:srgbClr val="000000"/>
-                </a:solidFill>
-                <a:latin typeface="Arial"/>
-                <a:ea typeface="Arial"/>
-                <a:cs typeface="Arial"/>
-                <a:sym typeface="Arial"/>
-              </a:endParaRPr>
-            </a:p>
-          </p:txBody>
-        </p:sp>
-        <p:sp>
-          <p:nvSpPr>
-            <p:cNvPr id="128" name="Google Shape;128;p3"/>
-            <p:cNvSpPr/>
-            <p:nvPr/>
-          </p:nvSpPr>
-          <p:spPr>
-            <a:xfrm>
-              <a:off x="1058686" y="2293338"/>
-              <a:ext cx="9456913" cy="916611"/>
-            </a:xfrm>
-            <a:prstGeom prst="rect">
-              <a:avLst/>
-            </a:prstGeom>
-            <a:noFill/>
-            <a:ln>
-              <a:noFill/>
-            </a:ln>
-          </p:spPr>
-          <p:txBody>
-            <a:bodyPr anchorCtr="0" anchor="ctr" bIns="91425" lIns="91425" spcFirstLastPara="1" rIns="91425" wrap="square" tIns="91425">
-              <a:noAutofit/>
-            </a:bodyPr>
-            <a:lstStyle/>
-            <a:p>
-              <a:pPr indent="0" lvl="0" marL="0" marR="0" rtl="0" algn="l">
-                <a:lnSpc>
-                  <a:spcPct val="100000"/>
-                </a:lnSpc>
-                <a:spcBef>
-                  <a:spcPts val="0"/>
-                </a:spcBef>
-                <a:spcAft>
-                  <a:spcPts val="0"/>
-                </a:spcAft>
-                <a:buClr>
-                  <a:srgbClr val="000000"/>
-                </a:buClr>
-                <a:buSzPts val="1400"/>
-                <a:buFont typeface="Arial"/>
-                <a:buNone/>
-              </a:pPr>
-              <a:r>
-                <a:t/>
-              </a:r>
-              <a:endParaRPr b="0" i="0" sz="1400" u="none" cap="none" strike="noStrike">
-                <a:solidFill>
-                  <a:srgbClr val="000000"/>
-                </a:solidFill>
-                <a:latin typeface="Arial"/>
-                <a:ea typeface="Arial"/>
-                <a:cs typeface="Arial"/>
-                <a:sym typeface="Arial"/>
-              </a:endParaRPr>
-            </a:p>
-          </p:txBody>
-        </p:sp>
-        <p:sp>
-          <p:nvSpPr>
-            <p:cNvPr id="129" name="Google Shape;129;p3"/>
-            <p:cNvSpPr txBox="1"/>
-            <p:nvPr/>
-          </p:nvSpPr>
-          <p:spPr>
-            <a:xfrm>
-              <a:off x="1058686" y="2293338"/>
-              <a:ext cx="9456913" cy="916611"/>
-            </a:xfrm>
-            <a:prstGeom prst="rect">
-              <a:avLst/>
-            </a:prstGeom>
-            <a:noFill/>
-            <a:ln>
-              <a:noFill/>
-            </a:ln>
-          </p:spPr>
-          <p:txBody>
-            <a:bodyPr anchorCtr="0" anchor="ctr" bIns="97000" lIns="97000" spcFirstLastPara="1" rIns="97000" wrap="square" tIns="97000">
-              <a:noAutofit/>
-            </a:bodyPr>
-            <a:lstStyle/>
-            <a:p>
-              <a:pPr indent="0" lvl="0" marL="0" marR="0" rtl="0" algn="l">
-                <a:lnSpc>
-                  <a:spcPct val="100000"/>
-                </a:lnSpc>
-                <a:spcBef>
-                  <a:spcPts val="0"/>
-                </a:spcBef>
-                <a:spcAft>
-                  <a:spcPts val="0"/>
-                </a:spcAft>
-                <a:buClr>
-                  <a:schemeClr val="lt1"/>
-                </a:buClr>
-                <a:buSzPts val="1500"/>
-                <a:buFont typeface="Arial"/>
-                <a:buNone/>
-              </a:pPr>
-              <a:r>
-                <a:rPr b="1" i="0" lang="pt-BR" sz="1500" u="none" cap="none" strike="noStrike">
-                  <a:solidFill>
-                    <a:schemeClr val="lt1"/>
-                  </a:solidFill>
-                  <a:latin typeface="Arial"/>
-                  <a:ea typeface="Arial"/>
-                  <a:cs typeface="Arial"/>
-                  <a:sym typeface="Arial"/>
-                </a:rPr>
-                <a:t>Infraestrutura Robusta</a:t>
-              </a:r>
-              <a:endParaRPr b="0" i="0" sz="1400" u="none" cap="none" strike="noStrike">
-                <a:solidFill>
-                  <a:srgbClr val="000000"/>
-                </a:solidFill>
-                <a:latin typeface="Arial"/>
-                <a:ea typeface="Arial"/>
-                <a:cs typeface="Arial"/>
-                <a:sym typeface="Arial"/>
-              </a:endParaRPr>
-            </a:p>
-            <a:p>
-              <a:pPr indent="0" lvl="0" marL="0" marR="0" rtl="0" algn="l">
-                <a:lnSpc>
-                  <a:spcPct val="100000"/>
-                </a:lnSpc>
-                <a:spcBef>
-                  <a:spcPts val="525"/>
-                </a:spcBef>
-                <a:spcAft>
-                  <a:spcPts val="0"/>
-                </a:spcAft>
-                <a:buClr>
-                  <a:schemeClr val="lt1"/>
-                </a:buClr>
-                <a:buSzPts val="1500"/>
-                <a:buFont typeface="Arial"/>
-                <a:buNone/>
-              </a:pPr>
-              <a:r>
-                <a:rPr b="0" i="0" lang="pt-BR" sz="1500" u="none" cap="none" strike="noStrike">
-                  <a:solidFill>
-                    <a:schemeClr val="lt1"/>
-                  </a:solidFill>
-                  <a:latin typeface="Arial"/>
-                  <a:ea typeface="Arial"/>
-                  <a:cs typeface="Arial"/>
-                  <a:sym typeface="Arial"/>
-                </a:rPr>
-                <a:t>Backend em Java (Spring Boot) e Frontend em React, com banco PostgreSQL.</a:t>
-              </a:r>
-              <a:endParaRPr b="1" i="0" sz="1500" u="none" cap="none" strike="noStrike">
-                <a:solidFill>
-                  <a:schemeClr val="lt1"/>
-                </a:solidFill>
-                <a:latin typeface="Arial"/>
-                <a:ea typeface="Arial"/>
-                <a:cs typeface="Arial"/>
-                <a:sym typeface="Arial"/>
-              </a:endParaRPr>
-            </a:p>
-          </p:txBody>
-        </p:sp>
-        <p:sp>
-          <p:nvSpPr>
-            <p:cNvPr id="130" name="Google Shape;130;p3"/>
-            <p:cNvSpPr/>
-            <p:nvPr/>
-          </p:nvSpPr>
-          <p:spPr>
-            <a:xfrm>
-              <a:off x="0" y="3439103"/>
-              <a:ext cx="10515600" cy="916611"/>
-            </a:xfrm>
-            <a:prstGeom prst="roundRect">
-              <a:avLst>
-                <a:gd fmla="val 10000" name="adj"/>
-              </a:avLst>
-            </a:prstGeom>
-            <a:solidFill>
-              <a:srgbClr val="CF5721"/>
-            </a:solidFill>
-            <a:ln>
-              <a:noFill/>
-            </a:ln>
-          </p:spPr>
-          <p:txBody>
-            <a:bodyPr anchorCtr="0" anchor="ctr" bIns="91425" lIns="91425" spcFirstLastPara="1" rIns="91425" wrap="square" tIns="91425">
-              <a:noAutofit/>
-            </a:bodyPr>
-            <a:lstStyle/>
-            <a:p>
-              <a:pPr indent="0" lvl="0" marL="0" marR="0" rtl="0" algn="l">
-                <a:lnSpc>
-                  <a:spcPct val="100000"/>
-                </a:lnSpc>
-                <a:spcBef>
-                  <a:spcPts val="0"/>
-                </a:spcBef>
-                <a:spcAft>
-                  <a:spcPts val="0"/>
-                </a:spcAft>
-                <a:buClr>
-                  <a:srgbClr val="000000"/>
-                </a:buClr>
-                <a:buSzPts val="1400"/>
-                <a:buFont typeface="Arial"/>
-                <a:buNone/>
-              </a:pPr>
-              <a:r>
-                <a:t/>
-              </a:r>
-              <a:endParaRPr b="0" i="0" sz="1400" u="none" cap="none" strike="noStrike">
-                <a:solidFill>
-                  <a:srgbClr val="000000"/>
-                </a:solidFill>
-                <a:latin typeface="Arial"/>
-                <a:ea typeface="Arial"/>
-                <a:cs typeface="Arial"/>
-                <a:sym typeface="Arial"/>
-              </a:endParaRPr>
-            </a:p>
-          </p:txBody>
-        </p:sp>
-        <p:sp>
-          <p:nvSpPr>
-            <p:cNvPr id="131" name="Google Shape;131;p3"/>
-            <p:cNvSpPr/>
-            <p:nvPr/>
-          </p:nvSpPr>
-          <p:spPr>
-            <a:xfrm>
-              <a:off x="277275" y="3645341"/>
-              <a:ext cx="504136" cy="504136"/>
-            </a:xfrm>
-            <a:prstGeom prst="rect">
-              <a:avLst/>
-            </a:prstGeom>
-            <a:blipFill rotWithShape="1">
-              <a:blip r:embed="rId6">
-                <a:alphaModFix/>
-              </a:blip>
-              <a:stretch>
-                <a:fillRect b="0" l="0" r="0" t="0"/>
-              </a:stretch>
-            </a:blipFill>
-            <a:ln>
-              <a:noFill/>
-            </a:ln>
-            <a:effectLst>
-              <a:outerShdw blurRad="57150" rotWithShape="0" algn="ctr" dir="5400000" dist="19050">
-                <a:srgbClr val="000000">
-                  <a:alpha val="62352"/>
-                </a:srgbClr>
-              </a:outerShdw>
-            </a:effectLst>
-          </p:spPr>
-          <p:txBody>
-            <a:bodyPr anchorCtr="0" anchor="ctr" bIns="91425" lIns="91425" spcFirstLastPara="1" rIns="91425" wrap="square" tIns="91425">
-              <a:noAutofit/>
-            </a:bodyPr>
-            <a:lstStyle/>
-            <a:p>
-              <a:pPr indent="0" lvl="0" marL="0" marR="0" rtl="0" algn="l">
-                <a:lnSpc>
-                  <a:spcPct val="100000"/>
-                </a:lnSpc>
-                <a:spcBef>
-                  <a:spcPts val="0"/>
-                </a:spcBef>
-                <a:spcAft>
-                  <a:spcPts val="0"/>
-                </a:spcAft>
-                <a:buClr>
-                  <a:srgbClr val="000000"/>
-                </a:buClr>
-                <a:buSzPts val="1400"/>
-                <a:buFont typeface="Arial"/>
-                <a:buNone/>
-              </a:pPr>
-              <a:r>
-                <a:t/>
-              </a:r>
-              <a:endParaRPr b="0" i="0" sz="1400" u="none" cap="none" strike="noStrike">
-                <a:solidFill>
-                  <a:srgbClr val="000000"/>
-                </a:solidFill>
-                <a:latin typeface="Arial"/>
-                <a:ea typeface="Arial"/>
-                <a:cs typeface="Arial"/>
-                <a:sym typeface="Arial"/>
-              </a:endParaRPr>
-            </a:p>
-          </p:txBody>
-        </p:sp>
-        <p:sp>
-          <p:nvSpPr>
-            <p:cNvPr id="132" name="Google Shape;132;p3"/>
-            <p:cNvSpPr/>
-            <p:nvPr/>
-          </p:nvSpPr>
-          <p:spPr>
-            <a:xfrm>
-              <a:off x="1058686" y="3439103"/>
-              <a:ext cx="9456913" cy="916611"/>
-            </a:xfrm>
-            <a:prstGeom prst="rect">
-              <a:avLst/>
-            </a:prstGeom>
-            <a:noFill/>
-            <a:ln>
-              <a:noFill/>
-            </a:ln>
-          </p:spPr>
-          <p:txBody>
-            <a:bodyPr anchorCtr="0" anchor="ctr" bIns="91425" lIns="91425" spcFirstLastPara="1" rIns="91425" wrap="square" tIns="91425">
-              <a:noAutofit/>
-            </a:bodyPr>
-            <a:lstStyle/>
-            <a:p>
-              <a:pPr indent="0" lvl="0" marL="0" marR="0" rtl="0" algn="l">
-                <a:lnSpc>
-                  <a:spcPct val="100000"/>
-                </a:lnSpc>
-                <a:spcBef>
-                  <a:spcPts val="0"/>
-                </a:spcBef>
-                <a:spcAft>
-                  <a:spcPts val="0"/>
-                </a:spcAft>
-                <a:buClr>
-                  <a:srgbClr val="000000"/>
-                </a:buClr>
-                <a:buSzPts val="1400"/>
-                <a:buFont typeface="Arial"/>
-                <a:buNone/>
-              </a:pPr>
-              <a:r>
-                <a:t/>
-              </a:r>
-              <a:endParaRPr b="0" i="0" sz="1400" u="none" cap="none" strike="noStrike">
-                <a:solidFill>
-                  <a:srgbClr val="000000"/>
-                </a:solidFill>
-                <a:latin typeface="Arial"/>
-                <a:ea typeface="Arial"/>
-                <a:cs typeface="Arial"/>
-                <a:sym typeface="Arial"/>
-              </a:endParaRPr>
-            </a:p>
-          </p:txBody>
-        </p:sp>
-        <p:sp>
-          <p:nvSpPr>
-            <p:cNvPr id="133" name="Google Shape;133;p3"/>
-            <p:cNvSpPr txBox="1"/>
-            <p:nvPr/>
-          </p:nvSpPr>
-          <p:spPr>
-            <a:xfrm>
-              <a:off x="1058686" y="3439103"/>
-              <a:ext cx="9456913" cy="916611"/>
-            </a:xfrm>
-            <a:prstGeom prst="rect">
-              <a:avLst/>
-            </a:prstGeom>
-            <a:noFill/>
-            <a:ln>
-              <a:noFill/>
-            </a:ln>
-          </p:spPr>
-          <p:txBody>
-            <a:bodyPr anchorCtr="0" anchor="ctr" bIns="97000" lIns="97000" spcFirstLastPara="1" rIns="97000" wrap="square" tIns="97000">
-              <a:noAutofit/>
-            </a:bodyPr>
-            <a:lstStyle/>
-            <a:p>
-              <a:pPr indent="0" lvl="0" marL="0" marR="0" rtl="0" algn="l">
-                <a:lnSpc>
-                  <a:spcPct val="100000"/>
-                </a:lnSpc>
-                <a:spcBef>
-                  <a:spcPts val="0"/>
-                </a:spcBef>
-                <a:spcAft>
-                  <a:spcPts val="0"/>
-                </a:spcAft>
-                <a:buClr>
-                  <a:schemeClr val="lt1"/>
-                </a:buClr>
-                <a:buSzPts val="1500"/>
-                <a:buFont typeface="Arial"/>
-                <a:buNone/>
-              </a:pPr>
-              <a:r>
-                <a:rPr b="1" i="0" lang="pt-BR" sz="1500" u="none" cap="none" strike="noStrike">
-                  <a:solidFill>
-                    <a:schemeClr val="lt1"/>
-                  </a:solidFill>
-                  <a:latin typeface="Arial"/>
-                  <a:ea typeface="Arial"/>
-                  <a:cs typeface="Arial"/>
-                  <a:sym typeface="Arial"/>
-                </a:rPr>
-                <a:t>Diferencial</a:t>
-              </a:r>
-              <a:endParaRPr b="0" i="0" sz="1400" u="none" cap="none" strike="noStrike">
-                <a:solidFill>
-                  <a:srgbClr val="000000"/>
-                </a:solidFill>
-                <a:latin typeface="Arial"/>
-                <a:ea typeface="Arial"/>
-                <a:cs typeface="Arial"/>
-                <a:sym typeface="Arial"/>
-              </a:endParaRPr>
-            </a:p>
-            <a:p>
-              <a:pPr indent="0" lvl="0" marL="0" marR="0" rtl="0" algn="l">
-                <a:lnSpc>
-                  <a:spcPct val="100000"/>
-                </a:lnSpc>
-                <a:spcBef>
-                  <a:spcPts val="525"/>
-                </a:spcBef>
-                <a:spcAft>
-                  <a:spcPts val="0"/>
-                </a:spcAft>
-                <a:buClr>
-                  <a:schemeClr val="lt1"/>
-                </a:buClr>
-                <a:buSzPts val="1500"/>
-                <a:buFont typeface="Arial"/>
-                <a:buNone/>
-              </a:pPr>
-              <a:r>
-                <a:rPr b="0" i="0" lang="pt-BR" sz="1500" u="none" cap="none" strike="noStrike">
-                  <a:solidFill>
-                    <a:schemeClr val="lt1"/>
-                  </a:solidFill>
-                  <a:latin typeface="Arial"/>
-                  <a:ea typeface="Arial"/>
-                  <a:cs typeface="Arial"/>
-                  <a:sym typeface="Arial"/>
-                </a:rPr>
-                <a:t>Não é apenas um software de gestão; é uma ferramenta que potencializa a documentação pedagógica.</a:t>
-              </a:r>
-              <a:endParaRPr b="0" i="0" sz="1500" u="none" cap="none" strike="noStrike">
-                <a:solidFill>
-                  <a:schemeClr val="lt1"/>
-                </a:solidFill>
-                <a:latin typeface="Arial"/>
-                <a:ea typeface="Arial"/>
-                <a:cs typeface="Arial"/>
-                <a:sym typeface="Arial"/>
-              </a:endParaRPr>
-            </a:p>
-          </p:txBody>
-        </p:sp>
-      </p:grpSp>
-    </p:spTree>
-  </p:cSld>
-  <p:clrMapOvr>
-    <a:masterClrMapping/>
-  </p:clrMapOvr>
-  <mc:AlternateContent>
-    <mc:Choice Requires="p14">
-      <p:transition spd="slow" p14:dur="3400">
-        <p14:reveal dir="l"/>
-      </p:transition>
-    </mc:Choice>
-    <mc:Fallback>
-      <p:transition spd="med">
-        <p:fade/>
-      </p:transition>
-    </mc:Fallback>
-  </mc:AlternateContent>
-</p:sld>
-</file>
-
-<file path=ppt/slides/slide4.xml><?xml version="1.0" encoding="utf-8"?>
-<p:sld xmlns:a="http://schemas.openxmlformats.org/drawingml/2006/main" xmlns:r="http://schemas.openxmlformats.org/officeDocument/2006/relationships" xmlns:mc="http://schemas.openxmlformats.org/markup-compatibility/2006" xmlns:mv="urn:schemas-microsoft-com:mac:vml" xmlns:p="http://schemas.openxmlformats.org/presentationml/2006/main" xmlns:c="http://schemas.openxmlformats.org/drawingml/2006/chart" xmlns:dgm="http://schemas.openxmlformats.org/drawingml/2006/diagram" xmlns:o="urn:schemas-microsoft-com:office:office" xmlns:v="urn:schemas-microsoft-com:vml" xmlns:pvml="urn:schemas-microsoft-com:office:powerpoint" xmlns:com="http://schemas.openxmlformats.org/drawingml/2006/compatibility" xmlns:p14="http://schemas.microsoft.com/office/powerpoint/2010/main" xmlns:p15="http://schemas.microsoft.com/office/powerpoint/2012/main" xmlns:ahyp="http://schemas.microsoft.com/office/drawing/2018/hyperlinkcolor">
-  <p:cSld>
-    <p:bg>
-      <p:bgPr>
-        <a:solidFill>
-          <a:srgbClr val="ECE6D8"/>
-        </a:solidFill>
-      </p:bgPr>
-    </p:bg>
-    <p:spTree>
-      <p:nvGrpSpPr>
-        <p:cNvPr id="138" name="Shape 138"/>
-        <p:cNvGrpSpPr/>
-        <p:nvPr/>
-      </p:nvGrpSpPr>
-      <p:grpSpPr>
-        <a:xfrm>
-          <a:off x="0" y="0"/>
-          <a:ext cx="0" cy="0"/>
-          <a:chOff x="0" y="0"/>
-          <a:chExt cx="0" cy="0"/>
-        </a:xfrm>
-      </p:grpSpPr>
-      <p:sp>
-        <p:nvSpPr>
-          <p:cNvPr id="139" name="Google Shape;139;p4"/>
-          <p:cNvSpPr/>
-          <p:nvPr/>
-        </p:nvSpPr>
-        <p:spPr>
-          <a:xfrm>
-            <a:off x="-1" y="0"/>
-            <a:ext cx="12188952" cy="6858000"/>
-          </a:xfrm>
-          <a:prstGeom prst="rect">
-            <a:avLst/>
-          </a:prstGeom>
-          <a:solidFill>
-            <a:srgbClr val="ECE6D8"/>
-          </a:solidFill>
-          <a:ln>
-            <a:noFill/>
-          </a:ln>
-        </p:spPr>
-        <p:txBody>
-          <a:bodyPr anchorCtr="0" anchor="ctr" bIns="45700" lIns="91425" spcFirstLastPara="1" rIns="91425" wrap="square" tIns="45700">
-            <a:noAutofit/>
-          </a:bodyPr>
-          <a:lstStyle/>
-          <a:p>
-            <a:pPr indent="0" lvl="0" marL="0" marR="0" rtl="0" algn="ctr">
-              <a:lnSpc>
-                <a:spcPct val="100000"/>
-              </a:lnSpc>
-              <a:spcBef>
-                <a:spcPts val="0"/>
-              </a:spcBef>
-              <a:spcAft>
-                <a:spcPts val="0"/>
-              </a:spcAft>
-              <a:buClr>
-                <a:srgbClr val="000000"/>
-              </a:buClr>
-              <a:buSzPts val="1800"/>
-              <a:buFont typeface="Arial"/>
-              <a:buNone/>
-            </a:pPr>
-            <a:r>
-              <a:t/>
-            </a:r>
-            <a:endParaRPr b="0" i="0" sz="1800" u="none" cap="none" strike="noStrike">
-              <a:solidFill>
-                <a:schemeClr val="lt1"/>
-              </a:solidFill>
-              <a:latin typeface="Arial"/>
-              <a:ea typeface="Arial"/>
-              <a:cs typeface="Arial"/>
-              <a:sym typeface="Arial"/>
-            </a:endParaRPr>
-          </a:p>
-        </p:txBody>
-      </p:sp>
-      <p:sp>
-        <p:nvSpPr>
-          <p:cNvPr id="140" name="Google Shape;140;p4"/>
-          <p:cNvSpPr txBox="1"/>
-          <p:nvPr>
-            <p:ph type="title"/>
-          </p:nvPr>
-        </p:nvSpPr>
-        <p:spPr>
-          <a:xfrm>
-            <a:off x="838200" y="557189"/>
-            <a:ext cx="3374136" cy="5567891"/>
-          </a:xfrm>
-          <a:prstGeom prst="rect">
-            <a:avLst/>
-          </a:prstGeom>
-          <a:noFill/>
-          <a:ln>
-            <a:noFill/>
-          </a:ln>
-        </p:spPr>
-        <p:txBody>
-          <a:bodyPr anchorCtr="0" anchor="ctr" bIns="45700" lIns="91425" spcFirstLastPara="1" rIns="91425" wrap="square" tIns="45700">
-            <a:normAutofit/>
-          </a:bodyPr>
-          <a:lstStyle/>
-          <a:p>
-            <a:pPr indent="0" lvl="0" marL="0" rtl="0" algn="l">
-              <a:lnSpc>
-                <a:spcPct val="90000"/>
-              </a:lnSpc>
-              <a:spcBef>
-                <a:spcPts val="0"/>
-              </a:spcBef>
-              <a:spcAft>
-                <a:spcPts val="0"/>
-              </a:spcAft>
-              <a:buClr>
-                <a:srgbClr val="1C3C5C"/>
-              </a:buClr>
-              <a:buSzPts val="3600"/>
-              <a:buFont typeface="Arial"/>
-              <a:buNone/>
-            </a:pPr>
-            <a:r>
-              <a:rPr b="1" lang="pt-BR" sz="3600">
-                <a:solidFill>
-                  <a:srgbClr val="1C3C5C"/>
-                </a:solidFill>
-                <a:latin typeface="Arial"/>
-                <a:ea typeface="Arial"/>
-                <a:cs typeface="Arial"/>
-                <a:sym typeface="Arial"/>
-              </a:rPr>
-              <a:t>Experiência do Usuário e Escalabilidade</a:t>
-            </a:r>
-            <a:endParaRPr/>
-          </a:p>
-        </p:txBody>
-      </p:sp>
-      <p:grpSp>
-        <p:nvGrpSpPr>
-          <p:cNvPr id="141" name="Google Shape;141;p4"/>
-          <p:cNvGrpSpPr/>
-          <p:nvPr/>
-        </p:nvGrpSpPr>
-        <p:grpSpPr>
-          <a:xfrm>
-            <a:off x="5093208" y="624353"/>
-            <a:ext cx="6263640" cy="5496764"/>
-            <a:chOff x="0" y="3961"/>
-            <a:chExt cx="6263640" cy="5496764"/>
-          </a:xfrm>
-        </p:grpSpPr>
-        <p:sp>
-          <p:nvSpPr>
-            <p:cNvPr id="142" name="Google Shape;142;p4"/>
-            <p:cNvSpPr/>
-            <p:nvPr/>
-          </p:nvSpPr>
-          <p:spPr>
-            <a:xfrm>
-              <a:off x="0" y="3961"/>
-              <a:ext cx="6263640" cy="849893"/>
-            </a:xfrm>
-            <a:prstGeom prst="roundRect">
-              <a:avLst>
-                <a:gd fmla="val 10000" name="adj"/>
-              </a:avLst>
-            </a:prstGeom>
-            <a:solidFill>
-              <a:srgbClr val="E97131"/>
-            </a:solidFill>
-            <a:ln>
-              <a:noFill/>
-            </a:ln>
-          </p:spPr>
-          <p:txBody>
-            <a:bodyPr anchorCtr="0" anchor="ctr" bIns="91425" lIns="91425" spcFirstLastPara="1" rIns="91425" wrap="square" tIns="91425">
-              <a:noAutofit/>
-            </a:bodyPr>
-            <a:lstStyle/>
-            <a:p>
-              <a:pPr indent="0" lvl="0" marL="0" marR="0" rtl="0" algn="l">
-                <a:lnSpc>
-                  <a:spcPct val="100000"/>
-                </a:lnSpc>
-                <a:spcBef>
-                  <a:spcPts val="0"/>
-                </a:spcBef>
-                <a:spcAft>
-                  <a:spcPts val="0"/>
-                </a:spcAft>
-                <a:buClr>
-                  <a:srgbClr val="000000"/>
-                </a:buClr>
-                <a:buSzPts val="1400"/>
-                <a:buFont typeface="Arial"/>
-                <a:buNone/>
-              </a:pPr>
-              <a:r>
-                <a:t/>
-              </a:r>
-              <a:endParaRPr b="0" i="0" sz="1400" u="none" cap="none" strike="noStrike">
-                <a:solidFill>
-                  <a:schemeClr val="lt1"/>
-                </a:solidFill>
-                <a:latin typeface="Arial"/>
-                <a:ea typeface="Arial"/>
-                <a:cs typeface="Arial"/>
-                <a:sym typeface="Arial"/>
-              </a:endParaRPr>
-            </a:p>
-          </p:txBody>
-        </p:sp>
-        <p:sp>
-          <p:nvSpPr>
-            <p:cNvPr id="143" name="Google Shape;143;p4"/>
-            <p:cNvSpPr/>
-            <p:nvPr/>
-          </p:nvSpPr>
-          <p:spPr>
-            <a:xfrm>
-              <a:off x="257092" y="195188"/>
+              <a:off x="5347252" y="1707966"/>
               <a:ext cx="467441" cy="467441"/>
             </a:xfrm>
             <a:prstGeom prst="rect">
@@ -19402,13 +17949,13 @@
         </p:sp>
         <p:sp>
           <p:nvSpPr>
-            <p:cNvPr id="144" name="Google Shape;144;p4"/>
+            <p:cNvPr id="139" name="Google Shape;139;p4"/>
             <p:cNvSpPr/>
             <p:nvPr/>
           </p:nvSpPr>
           <p:spPr>
             <a:xfrm>
-              <a:off x="981627" y="3961"/>
+              <a:off x="6071787" y="1516740"/>
               <a:ext cx="5282012" cy="849893"/>
             </a:xfrm>
             <a:prstGeom prst="rect">
@@ -19459,13 +18006,13 @@
         </p:sp>
         <p:sp>
           <p:nvSpPr>
-            <p:cNvPr id="145" name="Google Shape;145;p4"/>
+            <p:cNvPr id="140" name="Google Shape;140;p4"/>
             <p:cNvSpPr txBox="1"/>
             <p:nvPr/>
           </p:nvSpPr>
           <p:spPr>
             <a:xfrm>
-              <a:off x="981627" y="3961"/>
+              <a:off x="6071787" y="1516740"/>
               <a:ext cx="5282012" cy="849893"/>
             </a:xfrm>
             <a:prstGeom prst="rect">
@@ -19509,7 +18056,7 @@
                   <a:cs typeface="Arial"/>
                   <a:sym typeface="Arial"/>
                 </a:rPr>
-                <a:t>Hierarquia de Dados Escalável</a:t>
+                <a:t>Interface Otimizadas</a:t>
               </a:r>
               <a:endParaRPr b="0" i="0" sz="1400" u="none" cap="none" strike="noStrike">
                 <a:solidFill>
@@ -19525,13 +18072,13 @@
         </p:sp>
         <p:sp>
           <p:nvSpPr>
-            <p:cNvPr id="146" name="Google Shape;146;p4"/>
+            <p:cNvPr id="141" name="Google Shape;141;p4"/>
             <p:cNvSpPr/>
             <p:nvPr/>
           </p:nvSpPr>
           <p:spPr>
             <a:xfrm>
-              <a:off x="0" y="1066329"/>
+              <a:off x="5090160" y="2579107"/>
               <a:ext cx="6263640" cy="849893"/>
             </a:xfrm>
             <a:prstGeom prst="roundRect">
@@ -19540,7 +18087,7 @@
               </a:avLst>
             </a:prstGeom>
             <a:solidFill>
-              <a:srgbClr val="176B22"/>
+              <a:srgbClr val="F2A982"/>
             </a:solidFill>
             <a:ln>
               <a:noFill/>
@@ -19586,13 +18133,13 @@
         </p:sp>
         <p:sp>
           <p:nvSpPr>
-            <p:cNvPr id="147" name="Google Shape;147;p4"/>
+            <p:cNvPr id="142" name="Google Shape;142;p4"/>
             <p:cNvSpPr/>
             <p:nvPr/>
           </p:nvSpPr>
           <p:spPr>
             <a:xfrm>
-              <a:off x="257092" y="1257555"/>
+              <a:off x="5347252" y="2770333"/>
               <a:ext cx="467441" cy="467441"/>
             </a:xfrm>
             <a:prstGeom prst="rect">
@@ -19650,13 +18197,13 @@
         </p:sp>
         <p:sp>
           <p:nvSpPr>
-            <p:cNvPr id="148" name="Google Shape;148;p4"/>
+            <p:cNvPr id="143" name="Google Shape;143;p4"/>
             <p:cNvSpPr/>
             <p:nvPr/>
           </p:nvSpPr>
           <p:spPr>
             <a:xfrm>
-              <a:off x="981627" y="1066329"/>
+              <a:off x="6071787" y="2579107"/>
               <a:ext cx="5282012" cy="849893"/>
             </a:xfrm>
             <a:prstGeom prst="rect">
@@ -19707,13 +18254,13 @@
         </p:sp>
         <p:sp>
           <p:nvSpPr>
-            <p:cNvPr id="149" name="Google Shape;149;p4"/>
+            <p:cNvPr id="144" name="Google Shape;144;p4"/>
             <p:cNvSpPr txBox="1"/>
             <p:nvPr/>
           </p:nvSpPr>
           <p:spPr>
             <a:xfrm>
-              <a:off x="981627" y="1066329"/>
+              <a:off x="6071787" y="2579107"/>
               <a:ext cx="5282012" cy="849893"/>
             </a:xfrm>
             <a:prstGeom prst="rect">
@@ -19757,11 +18304,11 @@
                   <a:cs typeface="Arial"/>
                   <a:sym typeface="Arial"/>
                 </a:rPr>
-                <a:t>Interfaces Otimizadas</a:t>
+                <a:t>Múltiplos acessos simultâneos</a:t>
               </a:r>
-              <a:endParaRPr b="0" i="0" sz="1400" u="none" cap="none" strike="noStrike">
-                <a:solidFill>
-                  <a:srgbClr val="000000"/>
+              <a:endParaRPr b="0" i="0" sz="1900" u="none" cap="none" strike="noStrike">
+                <a:solidFill>
+                  <a:schemeClr val="dk1"/>
                 </a:solidFill>
                 <a:latin typeface="Arial"/>
                 <a:ea typeface="Arial"/>
@@ -19771,750 +18318,269 @@
             </a:p>
           </p:txBody>
         </p:sp>
-        <p:sp>
-          <p:nvSpPr>
-            <p:cNvPr id="150" name="Google Shape;150;p4"/>
-            <p:cNvSpPr/>
+        <p:grpSp>
+          <p:nvGrpSpPr>
+            <p:cNvPr id="145" name="Google Shape;145;p4"/>
+            <p:cNvGrpSpPr/>
             <p:nvPr/>
-          </p:nvSpPr>
-          <p:spPr>
+          </p:nvGrpSpPr>
+          <p:grpSpPr>
             <a:xfrm>
-              <a:off x="0" y="2128696"/>
-              <a:ext cx="6263640" cy="849893"/>
+              <a:off x="5090159" y="3641474"/>
+              <a:ext cx="6263640" cy="1247295"/>
+              <a:chOff x="5093208" y="4873822"/>
+              <a:chExt cx="6263640" cy="1247295"/>
             </a:xfrm>
-            <a:prstGeom prst="roundRect">
-              <a:avLst>
-                <a:gd fmla="val 10000" name="adj"/>
-              </a:avLst>
-            </a:prstGeom>
-            <a:solidFill>
-              <a:srgbClr val="0C9ED5"/>
-            </a:solidFill>
-            <a:ln>
-              <a:noFill/>
-            </a:ln>
-          </p:spPr>
-          <p:txBody>
-            <a:bodyPr anchorCtr="0" anchor="ctr" bIns="91425" lIns="91425" spcFirstLastPara="1" rIns="91425" wrap="square" tIns="91425">
-              <a:noAutofit/>
-            </a:bodyPr>
-            <a:lstStyle/>
-            <a:p>
-              <a:pPr indent="0" lvl="0" marL="0" marR="0" rtl="0" algn="l">
-                <a:lnSpc>
-                  <a:spcPct val="100000"/>
-                </a:lnSpc>
-                <a:spcBef>
-                  <a:spcPts val="0"/>
-                </a:spcBef>
-                <a:spcAft>
-                  <a:spcPts val="0"/>
-                </a:spcAft>
-                <a:buClr>
-                  <a:srgbClr val="000000"/>
-                </a:buClr>
-                <a:buSzPts val="1400"/>
-                <a:buFont typeface="Arial"/>
-                <a:buNone/>
-              </a:pPr>
-              <a:r>
-                <a:t/>
-              </a:r>
-              <a:endParaRPr b="0" i="0" sz="1400" u="none" cap="none" strike="noStrike">
-                <a:solidFill>
-                  <a:srgbClr val="000000"/>
-                </a:solidFill>
-                <a:latin typeface="Arial"/>
-                <a:ea typeface="Arial"/>
-                <a:cs typeface="Arial"/>
-                <a:sym typeface="Arial"/>
-              </a:endParaRPr>
-            </a:p>
-          </p:txBody>
-        </p:sp>
-        <p:sp>
-          <p:nvSpPr>
-            <p:cNvPr id="151" name="Google Shape;151;p4"/>
-            <p:cNvSpPr/>
-            <p:nvPr/>
-          </p:nvSpPr>
-          <p:spPr>
-            <a:xfrm>
-              <a:off x="257092" y="2319922"/>
-              <a:ext cx="467441" cy="467441"/>
-            </a:xfrm>
-            <a:prstGeom prst="rect">
-              <a:avLst/>
-            </a:prstGeom>
-            <a:blipFill rotWithShape="1">
-              <a:blip r:embed="rId5">
-                <a:alphaModFix/>
-              </a:blip>
-              <a:stretch>
-                <a:fillRect b="0" l="0" r="0" t="0"/>
-              </a:stretch>
-            </a:blipFill>
-            <a:ln>
-              <a:noFill/>
-            </a:ln>
-          </p:spPr>
-          <p:txBody>
-            <a:bodyPr anchorCtr="0" anchor="ctr" bIns="91425" lIns="91425" spcFirstLastPara="1" rIns="91425" wrap="square" tIns="91425">
-              <a:noAutofit/>
-            </a:bodyPr>
-            <a:lstStyle/>
-            <a:p>
-              <a:pPr indent="0" lvl="0" marL="0" marR="0" rtl="0" algn="l">
-                <a:lnSpc>
-                  <a:spcPct val="100000"/>
-                </a:lnSpc>
-                <a:spcBef>
-                  <a:spcPts val="0"/>
-                </a:spcBef>
-                <a:spcAft>
-                  <a:spcPts val="0"/>
-                </a:spcAft>
-                <a:buClr>
-                  <a:srgbClr val="000000"/>
-                </a:buClr>
-                <a:buSzPts val="1400"/>
-                <a:buFont typeface="Arial"/>
-                <a:buNone/>
-              </a:pPr>
-              <a:r>
-                <a:t/>
-              </a:r>
-              <a:endParaRPr b="0" i="0" sz="1400" u="none" cap="none" strike="noStrike">
-                <a:solidFill>
-                  <a:srgbClr val="000000"/>
-                </a:solidFill>
-                <a:latin typeface="Arial"/>
-                <a:ea typeface="Arial"/>
-                <a:cs typeface="Arial"/>
-                <a:sym typeface="Arial"/>
-              </a:endParaRPr>
-            </a:p>
-          </p:txBody>
-        </p:sp>
-        <p:sp>
-          <p:nvSpPr>
-            <p:cNvPr id="152" name="Google Shape;152;p4"/>
-            <p:cNvSpPr/>
-            <p:nvPr/>
-          </p:nvSpPr>
-          <p:spPr>
-            <a:xfrm>
-              <a:off x="981627" y="2128696"/>
-              <a:ext cx="5282012" cy="849893"/>
-            </a:xfrm>
-            <a:prstGeom prst="rect">
-              <a:avLst/>
-            </a:prstGeom>
-            <a:noFill/>
-            <a:ln>
-              <a:noFill/>
-            </a:ln>
-          </p:spPr>
-          <p:txBody>
-            <a:bodyPr anchorCtr="0" anchor="ctr" bIns="91425" lIns="91425" spcFirstLastPara="1" rIns="91425" wrap="square" tIns="91425">
-              <a:noAutofit/>
-            </a:bodyPr>
-            <a:lstStyle/>
-            <a:p>
-              <a:pPr indent="0" lvl="0" marL="0" marR="0" rtl="0" algn="l">
-                <a:lnSpc>
-                  <a:spcPct val="100000"/>
-                </a:lnSpc>
-                <a:spcBef>
-                  <a:spcPts val="0"/>
-                </a:spcBef>
-                <a:spcAft>
-                  <a:spcPts val="0"/>
-                </a:spcAft>
-                <a:buClr>
-                  <a:srgbClr val="000000"/>
-                </a:buClr>
-                <a:buSzPts val="1400"/>
-                <a:buFont typeface="Arial"/>
-                <a:buNone/>
-              </a:pPr>
-              <a:r>
-                <a:t/>
-              </a:r>
-              <a:endParaRPr b="0" i="0" sz="1400" u="none" cap="none" strike="noStrike">
-                <a:solidFill>
-                  <a:srgbClr val="000000"/>
-                </a:solidFill>
-                <a:latin typeface="Arial"/>
-                <a:ea typeface="Arial"/>
-                <a:cs typeface="Arial"/>
-                <a:sym typeface="Arial"/>
-              </a:endParaRPr>
-            </a:p>
-          </p:txBody>
-        </p:sp>
-        <p:sp>
-          <p:nvSpPr>
-            <p:cNvPr id="153" name="Google Shape;153;p4"/>
-            <p:cNvSpPr txBox="1"/>
-            <p:nvPr/>
-          </p:nvSpPr>
-          <p:spPr>
-            <a:xfrm>
-              <a:off x="981627" y="2128696"/>
-              <a:ext cx="5282012" cy="849893"/>
-            </a:xfrm>
-            <a:prstGeom prst="rect">
-              <a:avLst/>
-            </a:prstGeom>
-            <a:noFill/>
-            <a:ln>
-              <a:noFill/>
-            </a:ln>
-          </p:spPr>
-          <p:txBody>
-            <a:bodyPr anchorCtr="0" anchor="ctr" bIns="89925" lIns="89925" spcFirstLastPara="1" rIns="89925" wrap="square" tIns="89925">
-              <a:noAutofit/>
-            </a:bodyPr>
-            <a:lstStyle/>
-            <a:p>
-              <a:pPr indent="0" lvl="0" marL="0" marR="0" rtl="0" algn="l">
-                <a:lnSpc>
-                  <a:spcPct val="100000"/>
-                </a:lnSpc>
-                <a:spcBef>
-                  <a:spcPts val="0"/>
-                </a:spcBef>
-                <a:spcAft>
-                  <a:spcPts val="0"/>
-                </a:spcAft>
-                <a:buClr>
-                  <a:schemeClr val="dk1"/>
-                </a:buClr>
-                <a:buSzPts val="1900"/>
-                <a:buFont typeface="Arial"/>
-                <a:buNone/>
-              </a:pPr>
-              <a:r>
-                <a:rPr b="0" i="0" lang="pt-BR" sz="1900" u="none" cap="none" strike="noStrike">
+          </p:grpSpPr>
+          <p:sp>
+            <p:nvSpPr>
+              <p:cNvPr id="146" name="Google Shape;146;p4"/>
+              <p:cNvSpPr/>
+              <p:nvPr/>
+            </p:nvSpPr>
+            <p:spPr>
+              <a:xfrm>
+                <a:off x="5093208" y="4873822"/>
+                <a:ext cx="6263640" cy="1247295"/>
+              </a:xfrm>
+              <a:prstGeom prst="roundRect">
+                <a:avLst>
+                  <a:gd fmla="val 10000" name="adj"/>
+                </a:avLst>
+              </a:prstGeom>
+              <a:solidFill>
+                <a:srgbClr val="BF4F14"/>
+              </a:solidFill>
+              <a:ln>
+                <a:noFill/>
+              </a:ln>
+            </p:spPr>
+            <p:txBody>
+              <a:bodyPr anchorCtr="0" anchor="ctr" bIns="91425" lIns="91425" spcFirstLastPara="1" rIns="91425" wrap="square" tIns="91425">
+                <a:noAutofit/>
+              </a:bodyPr>
+              <a:lstStyle/>
+              <a:p>
+                <a:pPr indent="0" lvl="0" marL="0" marR="0" rtl="0" algn="l">
+                  <a:lnSpc>
+                    <a:spcPct val="100000"/>
+                  </a:lnSpc>
+                  <a:spcBef>
+                    <a:spcPts val="0"/>
+                  </a:spcBef>
+                  <a:spcAft>
+                    <a:spcPts val="0"/>
+                  </a:spcAft>
+                  <a:buClr>
+                    <a:srgbClr val="000000"/>
+                  </a:buClr>
+                  <a:buSzPts val="1400"/>
+                  <a:buFont typeface="Arial"/>
+                  <a:buNone/>
+                </a:pPr>
+                <a:r>
+                  <a:t/>
+                </a:r>
+                <a:endParaRPr b="0" i="0" sz="1400" u="none" cap="none" strike="noStrike">
                   <a:solidFill>
-                    <a:schemeClr val="dk1"/>
+                    <a:srgbClr val="000000"/>
                   </a:solidFill>
                   <a:latin typeface="Arial"/>
                   <a:ea typeface="Arial"/>
                   <a:cs typeface="Arial"/>
                   <a:sym typeface="Arial"/>
-                </a:rPr>
-                <a:t>Arquitetura Multi-Tenant</a:t>
-              </a:r>
-              <a:endParaRPr b="0" i="0" sz="1900" u="none" cap="none" strike="noStrike">
-                <a:solidFill>
-                  <a:schemeClr val="dk1"/>
-                </a:solidFill>
-                <a:latin typeface="Arial"/>
-                <a:ea typeface="Arial"/>
-                <a:cs typeface="Arial"/>
-                <a:sym typeface="Arial"/>
-              </a:endParaRPr>
-            </a:p>
-          </p:txBody>
-        </p:sp>
-        <p:sp>
-          <p:nvSpPr>
-            <p:cNvPr id="154" name="Google Shape;154;p4"/>
-            <p:cNvSpPr/>
-            <p:nvPr/>
-          </p:nvSpPr>
-          <p:spPr>
-            <a:xfrm>
-              <a:off x="0" y="3191063"/>
-              <a:ext cx="6263640" cy="849893"/>
-            </a:xfrm>
-            <a:prstGeom prst="roundRect">
-              <a:avLst>
-                <a:gd fmla="val 10000" name="adj"/>
-              </a:avLst>
-            </a:prstGeom>
-            <a:solidFill>
-              <a:srgbClr val="A02891"/>
-            </a:solidFill>
-            <a:ln>
-              <a:noFill/>
-            </a:ln>
-          </p:spPr>
-          <p:txBody>
-            <a:bodyPr anchorCtr="0" anchor="ctr" bIns="91425" lIns="91425" spcFirstLastPara="1" rIns="91425" wrap="square" tIns="91425">
-              <a:noAutofit/>
-            </a:bodyPr>
-            <a:lstStyle/>
-            <a:p>
-              <a:pPr indent="0" lvl="0" marL="0" marR="0" rtl="0" algn="l">
-                <a:lnSpc>
-                  <a:spcPct val="100000"/>
-                </a:lnSpc>
-                <a:spcBef>
-                  <a:spcPts val="0"/>
-                </a:spcBef>
-                <a:spcAft>
-                  <a:spcPts val="0"/>
-                </a:spcAft>
-                <a:buClr>
-                  <a:srgbClr val="000000"/>
-                </a:buClr>
-                <a:buSzPts val="1400"/>
-                <a:buFont typeface="Arial"/>
-                <a:buNone/>
-              </a:pPr>
-              <a:r>
-                <a:t/>
-              </a:r>
-              <a:endParaRPr b="0" i="0" sz="1400" u="none" cap="none" strike="noStrike">
-                <a:solidFill>
-                  <a:srgbClr val="000000"/>
-                </a:solidFill>
-                <a:latin typeface="Arial"/>
-                <a:ea typeface="Arial"/>
-                <a:cs typeface="Arial"/>
-                <a:sym typeface="Arial"/>
-              </a:endParaRPr>
-            </a:p>
-          </p:txBody>
-        </p:sp>
-        <p:sp>
-          <p:nvSpPr>
-            <p:cNvPr id="155" name="Google Shape;155;p4"/>
-            <p:cNvSpPr/>
-            <p:nvPr/>
-          </p:nvSpPr>
-          <p:spPr>
-            <a:xfrm>
-              <a:off x="257092" y="3382289"/>
-              <a:ext cx="467441" cy="467441"/>
-            </a:xfrm>
-            <a:prstGeom prst="rect">
-              <a:avLst/>
-            </a:prstGeom>
-            <a:blipFill rotWithShape="1">
-              <a:blip r:embed="rId6">
-                <a:alphaModFix/>
-              </a:blip>
-              <a:stretch>
-                <a:fillRect b="0" l="0" r="0" t="0"/>
-              </a:stretch>
-            </a:blipFill>
-            <a:ln>
-              <a:noFill/>
-            </a:ln>
-          </p:spPr>
-          <p:txBody>
-            <a:bodyPr anchorCtr="0" anchor="ctr" bIns="91425" lIns="91425" spcFirstLastPara="1" rIns="91425" wrap="square" tIns="91425">
-              <a:noAutofit/>
-            </a:bodyPr>
-            <a:lstStyle/>
-            <a:p>
-              <a:pPr indent="0" lvl="0" marL="0" marR="0" rtl="0" algn="l">
-                <a:lnSpc>
-                  <a:spcPct val="100000"/>
-                </a:lnSpc>
-                <a:spcBef>
-                  <a:spcPts val="0"/>
-                </a:spcBef>
-                <a:spcAft>
-                  <a:spcPts val="0"/>
-                </a:spcAft>
-                <a:buClr>
-                  <a:srgbClr val="000000"/>
-                </a:buClr>
-                <a:buSzPts val="1400"/>
-                <a:buFont typeface="Arial"/>
-                <a:buNone/>
-              </a:pPr>
-              <a:r>
-                <a:t/>
-              </a:r>
-              <a:endParaRPr b="0" i="0" sz="1400" u="none" cap="none" strike="noStrike">
-                <a:solidFill>
-                  <a:srgbClr val="000000"/>
-                </a:solidFill>
-                <a:latin typeface="Arial"/>
-                <a:ea typeface="Arial"/>
-                <a:cs typeface="Arial"/>
-                <a:sym typeface="Arial"/>
-              </a:endParaRPr>
-            </a:p>
-          </p:txBody>
-        </p:sp>
-        <p:sp>
-          <p:nvSpPr>
-            <p:cNvPr id="156" name="Google Shape;156;p4"/>
-            <p:cNvSpPr/>
-            <p:nvPr/>
-          </p:nvSpPr>
-          <p:spPr>
-            <a:xfrm>
-              <a:off x="981627" y="3191063"/>
-              <a:ext cx="5282012" cy="849893"/>
-            </a:xfrm>
-            <a:prstGeom prst="rect">
-              <a:avLst/>
-            </a:prstGeom>
-            <a:noFill/>
-            <a:ln>
-              <a:noFill/>
-            </a:ln>
-          </p:spPr>
-          <p:txBody>
-            <a:bodyPr anchorCtr="0" anchor="ctr" bIns="91425" lIns="91425" spcFirstLastPara="1" rIns="91425" wrap="square" tIns="91425">
-              <a:noAutofit/>
-            </a:bodyPr>
-            <a:lstStyle/>
-            <a:p>
-              <a:pPr indent="0" lvl="0" marL="0" marR="0" rtl="0" algn="l">
-                <a:lnSpc>
-                  <a:spcPct val="100000"/>
-                </a:lnSpc>
-                <a:spcBef>
-                  <a:spcPts val="0"/>
-                </a:spcBef>
-                <a:spcAft>
-                  <a:spcPts val="0"/>
-                </a:spcAft>
-                <a:buClr>
-                  <a:srgbClr val="000000"/>
-                </a:buClr>
-                <a:buSzPts val="1400"/>
-                <a:buFont typeface="Arial"/>
-                <a:buNone/>
-              </a:pPr>
-              <a:r>
-                <a:t/>
-              </a:r>
-              <a:endParaRPr b="0" i="0" sz="1400" u="none" cap="none" strike="noStrike">
-                <a:solidFill>
-                  <a:srgbClr val="000000"/>
-                </a:solidFill>
-                <a:latin typeface="Arial"/>
-                <a:ea typeface="Arial"/>
-                <a:cs typeface="Arial"/>
-                <a:sym typeface="Arial"/>
-              </a:endParaRPr>
-            </a:p>
-          </p:txBody>
-        </p:sp>
-        <p:sp>
-          <p:nvSpPr>
-            <p:cNvPr id="157" name="Google Shape;157;p4"/>
-            <p:cNvSpPr txBox="1"/>
-            <p:nvPr/>
-          </p:nvSpPr>
-          <p:spPr>
-            <a:xfrm>
-              <a:off x="981627" y="3191063"/>
-              <a:ext cx="5282012" cy="849893"/>
-            </a:xfrm>
-            <a:prstGeom prst="rect">
-              <a:avLst/>
-            </a:prstGeom>
-            <a:noFill/>
-            <a:ln>
-              <a:noFill/>
-            </a:ln>
-          </p:spPr>
-          <p:txBody>
-            <a:bodyPr anchorCtr="0" anchor="ctr" bIns="89925" lIns="89925" spcFirstLastPara="1" rIns="89925" wrap="square" tIns="89925">
-              <a:noAutofit/>
-            </a:bodyPr>
-            <a:lstStyle/>
-            <a:p>
-              <a:pPr indent="0" lvl="0" marL="0" marR="0" rtl="0" algn="l">
-                <a:lnSpc>
-                  <a:spcPct val="100000"/>
-                </a:lnSpc>
-                <a:spcBef>
-                  <a:spcPts val="0"/>
-                </a:spcBef>
-                <a:spcAft>
-                  <a:spcPts val="0"/>
-                </a:spcAft>
-                <a:buClr>
-                  <a:schemeClr val="dk1"/>
-                </a:buClr>
-                <a:buSzPts val="1900"/>
-                <a:buFont typeface="Arial"/>
-                <a:buNone/>
-              </a:pPr>
-              <a:r>
-                <a:rPr b="0" i="0" lang="pt-BR" sz="1900" u="none" cap="none" strike="noStrike">
+                </a:endParaRPr>
+              </a:p>
+            </p:txBody>
+          </p:sp>
+          <p:sp>
+            <p:nvSpPr>
+              <p:cNvPr id="147" name="Google Shape;147;p4"/>
+              <p:cNvSpPr/>
+              <p:nvPr/>
+            </p:nvSpPr>
+            <p:spPr>
+              <a:xfrm>
+                <a:off x="5350299" y="5263748"/>
+                <a:ext cx="467441" cy="467441"/>
+              </a:xfrm>
+              <a:prstGeom prst="rect">
+                <a:avLst/>
+              </a:prstGeom>
+              <a:blipFill rotWithShape="1">
+                <a:blip r:embed="rId5">
+                  <a:alphaModFix/>
+                </a:blip>
+                <a:stretch>
+                  <a:fillRect b="0" l="0" r="0" t="0"/>
+                </a:stretch>
+              </a:blipFill>
+              <a:ln>
+                <a:noFill/>
+              </a:ln>
+            </p:spPr>
+            <p:txBody>
+              <a:bodyPr anchorCtr="0" anchor="ctr" bIns="91425" lIns="91425" spcFirstLastPara="1" rIns="91425" wrap="square" tIns="91425">
+                <a:noAutofit/>
+              </a:bodyPr>
+              <a:lstStyle/>
+              <a:p>
+                <a:pPr indent="0" lvl="0" marL="0" marR="0" rtl="0" algn="l">
+                  <a:lnSpc>
+                    <a:spcPct val="100000"/>
+                  </a:lnSpc>
+                  <a:spcBef>
+                    <a:spcPts val="0"/>
+                  </a:spcBef>
+                  <a:spcAft>
+                    <a:spcPts val="0"/>
+                  </a:spcAft>
+                  <a:buClr>
+                    <a:srgbClr val="000000"/>
+                  </a:buClr>
+                  <a:buSzPts val="1400"/>
+                  <a:buFont typeface="Arial"/>
+                  <a:buNone/>
+                </a:pPr>
+                <a:r>
+                  <a:t/>
+                </a:r>
+                <a:endParaRPr b="0" i="0" sz="1400" u="none" cap="none" strike="noStrike">
                   <a:solidFill>
-                    <a:schemeClr val="dk1"/>
+                    <a:srgbClr val="000000"/>
                   </a:solidFill>
                   <a:latin typeface="Arial"/>
                   <a:ea typeface="Arial"/>
                   <a:cs typeface="Arial"/>
                   <a:sym typeface="Arial"/>
-                </a:rPr>
-                <a:t>Acessibilidade</a:t>
-              </a:r>
-              <a:endParaRPr b="0" i="0" sz="1400" u="none" cap="none" strike="noStrike">
-                <a:solidFill>
-                  <a:srgbClr val="000000"/>
-                </a:solidFill>
-                <a:latin typeface="Arial"/>
-                <a:ea typeface="Arial"/>
-                <a:cs typeface="Arial"/>
-                <a:sym typeface="Arial"/>
-              </a:endParaRPr>
-            </a:p>
-          </p:txBody>
-        </p:sp>
-        <p:sp>
-          <p:nvSpPr>
-            <p:cNvPr id="158" name="Google Shape;158;p4"/>
-            <p:cNvSpPr/>
-            <p:nvPr/>
-          </p:nvSpPr>
-          <p:spPr>
-            <a:xfrm>
-              <a:off x="0" y="4253430"/>
-              <a:ext cx="6263640" cy="1247295"/>
-            </a:xfrm>
-            <a:prstGeom prst="roundRect">
-              <a:avLst>
-                <a:gd fmla="val 10000" name="adj"/>
-              </a:avLst>
-            </a:prstGeom>
-            <a:solidFill>
-              <a:srgbClr val="4EA62C"/>
-            </a:solidFill>
-            <a:ln>
+                </a:endParaRPr>
+              </a:p>
+            </p:txBody>
+          </p:sp>
+          <p:sp>
+            <p:nvSpPr>
+              <p:cNvPr id="148" name="Google Shape;148;p4"/>
+              <p:cNvSpPr/>
+              <p:nvPr/>
+            </p:nvSpPr>
+            <p:spPr>
+              <a:xfrm>
+                <a:off x="6074835" y="5072523"/>
+                <a:ext cx="5282012" cy="849893"/>
+              </a:xfrm>
+              <a:prstGeom prst="rect">
+                <a:avLst/>
+              </a:prstGeom>
               <a:noFill/>
-            </a:ln>
-          </p:spPr>
-          <p:txBody>
-            <a:bodyPr anchorCtr="0" anchor="ctr" bIns="91425" lIns="91425" spcFirstLastPara="1" rIns="91425" wrap="square" tIns="91425">
-              <a:noAutofit/>
-            </a:bodyPr>
-            <a:lstStyle/>
-            <a:p>
-              <a:pPr indent="0" lvl="0" marL="0" marR="0" rtl="0" algn="l">
-                <a:lnSpc>
-                  <a:spcPct val="100000"/>
-                </a:lnSpc>
-                <a:spcBef>
-                  <a:spcPts val="0"/>
-                </a:spcBef>
-                <a:spcAft>
-                  <a:spcPts val="0"/>
-                </a:spcAft>
-                <a:buClr>
-                  <a:srgbClr val="000000"/>
-                </a:buClr>
-                <a:buSzPts val="1400"/>
-                <a:buFont typeface="Arial"/>
-                <a:buNone/>
-              </a:pPr>
-              <a:r>
-                <a:t/>
-              </a:r>
-              <a:endParaRPr b="0" i="0" sz="1400" u="none" cap="none" strike="noStrike">
-                <a:solidFill>
-                  <a:srgbClr val="000000"/>
-                </a:solidFill>
-                <a:latin typeface="Arial"/>
-                <a:ea typeface="Arial"/>
-                <a:cs typeface="Arial"/>
-                <a:sym typeface="Arial"/>
-              </a:endParaRPr>
-            </a:p>
-          </p:txBody>
-        </p:sp>
-        <p:sp>
-          <p:nvSpPr>
-            <p:cNvPr id="159" name="Google Shape;159;p4"/>
-            <p:cNvSpPr/>
-            <p:nvPr/>
-          </p:nvSpPr>
-          <p:spPr>
-            <a:xfrm>
-              <a:off x="257092" y="4643357"/>
-              <a:ext cx="467441" cy="467441"/>
-            </a:xfrm>
-            <a:prstGeom prst="rect">
-              <a:avLst/>
-            </a:prstGeom>
-            <a:blipFill rotWithShape="1">
-              <a:blip r:embed="rId7">
-                <a:alphaModFix/>
-              </a:blip>
-              <a:stretch>
-                <a:fillRect b="0" l="0" r="0" t="0"/>
-              </a:stretch>
-            </a:blipFill>
-            <a:ln>
-              <a:noFill/>
-            </a:ln>
-          </p:spPr>
-          <p:txBody>
-            <a:bodyPr anchorCtr="0" anchor="ctr" bIns="91425" lIns="91425" spcFirstLastPara="1" rIns="91425" wrap="square" tIns="91425">
-              <a:noAutofit/>
-            </a:bodyPr>
-            <a:lstStyle/>
-            <a:p>
-              <a:pPr indent="0" lvl="0" marL="0" marR="0" rtl="0" algn="l">
-                <a:lnSpc>
-                  <a:spcPct val="100000"/>
-                </a:lnSpc>
-                <a:spcBef>
-                  <a:spcPts val="0"/>
-                </a:spcBef>
-                <a:spcAft>
-                  <a:spcPts val="0"/>
-                </a:spcAft>
-                <a:buClr>
-                  <a:srgbClr val="000000"/>
-                </a:buClr>
-                <a:buSzPts val="1400"/>
-                <a:buFont typeface="Arial"/>
-                <a:buNone/>
-              </a:pPr>
-              <a:r>
-                <a:t/>
-              </a:r>
-              <a:endParaRPr b="0" i="0" sz="1400" u="none" cap="none" strike="noStrike">
-                <a:solidFill>
-                  <a:srgbClr val="000000"/>
-                </a:solidFill>
-                <a:latin typeface="Arial"/>
-                <a:ea typeface="Arial"/>
-                <a:cs typeface="Arial"/>
-                <a:sym typeface="Arial"/>
-              </a:endParaRPr>
-            </a:p>
-          </p:txBody>
-        </p:sp>
-        <p:sp>
-          <p:nvSpPr>
-            <p:cNvPr id="160" name="Google Shape;160;p4"/>
-            <p:cNvSpPr/>
-            <p:nvPr/>
-          </p:nvSpPr>
-          <p:spPr>
-            <a:xfrm>
-              <a:off x="981627" y="4452131"/>
-              <a:ext cx="5282012" cy="849893"/>
-            </a:xfrm>
-            <a:prstGeom prst="rect">
-              <a:avLst/>
-            </a:prstGeom>
-            <a:noFill/>
-            <a:ln>
-              <a:noFill/>
-            </a:ln>
-          </p:spPr>
-          <p:txBody>
-            <a:bodyPr anchorCtr="0" anchor="ctr" bIns="91425" lIns="91425" spcFirstLastPara="1" rIns="91425" wrap="square" tIns="91425">
-              <a:noAutofit/>
-            </a:bodyPr>
-            <a:lstStyle/>
-            <a:p>
-              <a:pPr indent="0" lvl="0" marL="0" marR="0" rtl="0" algn="l">
-                <a:lnSpc>
-                  <a:spcPct val="100000"/>
-                </a:lnSpc>
-                <a:spcBef>
-                  <a:spcPts val="0"/>
-                </a:spcBef>
-                <a:spcAft>
-                  <a:spcPts val="0"/>
-                </a:spcAft>
-                <a:buClr>
-                  <a:srgbClr val="000000"/>
-                </a:buClr>
-                <a:buSzPts val="1400"/>
-                <a:buFont typeface="Arial"/>
-                <a:buNone/>
-              </a:pPr>
-              <a:r>
-                <a:t/>
-              </a:r>
-              <a:endParaRPr b="0" i="0" sz="1400" u="none" cap="none" strike="noStrike">
-                <a:solidFill>
-                  <a:srgbClr val="000000"/>
-                </a:solidFill>
-                <a:latin typeface="Arial"/>
-                <a:ea typeface="Arial"/>
-                <a:cs typeface="Arial"/>
-                <a:sym typeface="Arial"/>
-              </a:endParaRPr>
-            </a:p>
-          </p:txBody>
-        </p:sp>
-        <p:sp>
-          <p:nvSpPr>
-            <p:cNvPr id="161" name="Google Shape;161;p4"/>
-            <p:cNvSpPr txBox="1"/>
-            <p:nvPr/>
-          </p:nvSpPr>
-          <p:spPr>
-            <a:xfrm>
-              <a:off x="981627" y="4452131"/>
-              <a:ext cx="5282012" cy="849893"/>
-            </a:xfrm>
-            <a:prstGeom prst="rect">
-              <a:avLst/>
-            </a:prstGeom>
-            <a:noFill/>
-            <a:ln>
-              <a:noFill/>
-            </a:ln>
-          </p:spPr>
-          <p:txBody>
-            <a:bodyPr anchorCtr="0" anchor="ctr" bIns="89925" lIns="89925" spcFirstLastPara="1" rIns="89925" wrap="square" tIns="89925">
-              <a:noAutofit/>
-            </a:bodyPr>
-            <a:lstStyle/>
-            <a:p>
-              <a:pPr indent="0" lvl="0" marL="0" marR="0" rtl="0" algn="l">
-                <a:lnSpc>
-                  <a:spcPct val="100000"/>
-                </a:lnSpc>
-                <a:spcBef>
-                  <a:spcPts val="0"/>
-                </a:spcBef>
-                <a:spcAft>
-                  <a:spcPts val="0"/>
-                </a:spcAft>
-                <a:buClr>
-                  <a:schemeClr val="dk1"/>
-                </a:buClr>
-                <a:buSzPts val="1900"/>
-                <a:buFont typeface="Arial"/>
-                <a:buNone/>
-              </a:pPr>
-              <a:r>
-                <a:rPr b="0" i="0" lang="pt-BR" sz="1900" u="none" cap="none" strike="noStrike">
+              <a:ln>
+                <a:noFill/>
+              </a:ln>
+            </p:spPr>
+            <p:txBody>
+              <a:bodyPr anchorCtr="0" anchor="ctr" bIns="91425" lIns="91425" spcFirstLastPara="1" rIns="91425" wrap="square" tIns="91425">
+                <a:noAutofit/>
+              </a:bodyPr>
+              <a:lstStyle/>
+              <a:p>
+                <a:pPr indent="0" lvl="0" marL="0" marR="0" rtl="0" algn="l">
+                  <a:lnSpc>
+                    <a:spcPct val="100000"/>
+                  </a:lnSpc>
+                  <a:spcBef>
+                    <a:spcPts val="0"/>
+                  </a:spcBef>
+                  <a:spcAft>
+                    <a:spcPts val="0"/>
+                  </a:spcAft>
+                  <a:buClr>
+                    <a:srgbClr val="000000"/>
+                  </a:buClr>
+                  <a:buSzPts val="1400"/>
+                  <a:buFont typeface="Arial"/>
+                  <a:buNone/>
+                </a:pPr>
+                <a:r>
+                  <a:t/>
+                </a:r>
+                <a:endParaRPr b="0" i="0" sz="1400" u="none" cap="none" strike="noStrike">
                   <a:solidFill>
-                    <a:schemeClr val="dk1"/>
+                    <a:srgbClr val="000000"/>
                   </a:solidFill>
                   <a:latin typeface="Arial"/>
                   <a:ea typeface="Arial"/>
                   <a:cs typeface="Arial"/>
                   <a:sym typeface="Arial"/>
-                </a:rPr>
-                <a:t>Simplicidade Operacional</a:t>
-              </a:r>
-              <a:endParaRPr b="0" i="0" sz="1400" u="none" cap="none" strike="noStrike">
-                <a:solidFill>
-                  <a:srgbClr val="000000"/>
-                </a:solidFill>
-                <a:latin typeface="Arial"/>
-                <a:ea typeface="Arial"/>
-                <a:cs typeface="Arial"/>
-                <a:sym typeface="Arial"/>
-              </a:endParaRPr>
-            </a:p>
-          </p:txBody>
-        </p:sp>
+                </a:endParaRPr>
+              </a:p>
+            </p:txBody>
+          </p:sp>
+          <p:sp>
+            <p:nvSpPr>
+              <p:cNvPr id="149" name="Google Shape;149;p4"/>
+              <p:cNvSpPr txBox="1"/>
+              <p:nvPr/>
+            </p:nvSpPr>
+            <p:spPr>
+              <a:xfrm>
+                <a:off x="6074835" y="5072523"/>
+                <a:ext cx="5282012" cy="849893"/>
+              </a:xfrm>
+              <a:prstGeom prst="rect">
+                <a:avLst/>
+              </a:prstGeom>
+              <a:noFill/>
+              <a:ln>
+                <a:noFill/>
+              </a:ln>
+            </p:spPr>
+            <p:txBody>
+              <a:bodyPr anchorCtr="0" anchor="ctr" bIns="89925" lIns="89925" spcFirstLastPara="1" rIns="89925" wrap="square" tIns="89925">
+                <a:noAutofit/>
+              </a:bodyPr>
+              <a:lstStyle/>
+              <a:p>
+                <a:pPr indent="0" lvl="0" marL="0" marR="0" rtl="0" algn="l">
+                  <a:lnSpc>
+                    <a:spcPct val="100000"/>
+                  </a:lnSpc>
+                  <a:spcBef>
+                    <a:spcPts val="0"/>
+                  </a:spcBef>
+                  <a:spcAft>
+                    <a:spcPts val="0"/>
+                  </a:spcAft>
+                  <a:buClr>
+                    <a:schemeClr val="dk1"/>
+                  </a:buClr>
+                  <a:buSzPts val="1900"/>
+                  <a:buFont typeface="Arial"/>
+                  <a:buNone/>
+                </a:pPr>
+                <a:r>
+                  <a:rPr b="0" i="0" lang="pt-BR" sz="1900" u="none" cap="none" strike="noStrike">
+                    <a:solidFill>
+                      <a:schemeClr val="dk1"/>
+                    </a:solidFill>
+                    <a:latin typeface="Arial"/>
+                    <a:ea typeface="Arial"/>
+                    <a:cs typeface="Arial"/>
+                    <a:sym typeface="Arial"/>
+                  </a:rPr>
+                  <a:t>Simplicidade Operacional</a:t>
+                </a:r>
+                <a:endParaRPr b="0" i="0" sz="1400" u="none" cap="none" strike="noStrike">
+                  <a:solidFill>
+                    <a:srgbClr val="000000"/>
+                  </a:solidFill>
+                  <a:latin typeface="Arial"/>
+                  <a:ea typeface="Arial"/>
+                  <a:cs typeface="Arial"/>
+                  <a:sym typeface="Arial"/>
+                </a:endParaRPr>
+              </a:p>
+            </p:txBody>
+          </p:sp>
+        </p:grpSp>
       </p:grpSp>
     </p:spTree>
   </p:cSld>
@@ -20529,7 +18595,7 @@
   <p:cSld>
     <p:spTree>
       <p:nvGrpSpPr>
-        <p:cNvPr id="166" name="Shape 166"/>
+        <p:cNvPr id="154" name="Shape 154"/>
         <p:cNvGrpSpPr/>
         <p:nvPr/>
       </p:nvGrpSpPr>
@@ -20543,7 +18609,7 @@
       </p:grpSpPr>
       <p:sp>
         <p:nvSpPr>
-          <p:cNvPr id="167" name="Google Shape;167;p5"/>
+          <p:cNvPr id="155" name="Google Shape;155;p5"/>
           <p:cNvSpPr txBox="1"/>
           <p:nvPr>
             <p:ph type="title"/>
@@ -20595,7 +18661,7 @@
                 <a:cs typeface="Arial"/>
                 <a:sym typeface="Arial"/>
               </a:rPr>
-              <a:t>Segurança e Produtividade</a:t>
+              <a:t>Navegabilidade</a:t>
             </a:r>
             <a:endParaRPr/>
           </a:p>
@@ -20603,27 +18669,27 @@
       </p:sp>
       <p:grpSp>
         <p:nvGrpSpPr>
-          <p:cNvPr id="168" name="Google Shape;168;p5"/>
+          <p:cNvPr id="156" name="Google Shape;156;p5"/>
           <p:cNvGrpSpPr/>
           <p:nvPr/>
         </p:nvGrpSpPr>
         <p:grpSpPr>
           <a:xfrm>
-            <a:off x="838200" y="1754081"/>
-            <a:ext cx="10506456" cy="4501981"/>
-            <a:chOff x="0" y="16721"/>
-            <a:chExt cx="10506456" cy="4501981"/>
+            <a:off x="841248" y="1667590"/>
+            <a:ext cx="10506456" cy="1076914"/>
+            <a:chOff x="838200" y="1754081"/>
+            <a:chExt cx="10506456" cy="868140"/>
           </a:xfrm>
         </p:grpSpPr>
         <p:sp>
           <p:nvSpPr>
-            <p:cNvPr id="169" name="Google Shape;169;p5"/>
+            <p:cNvPr id="157" name="Google Shape;157;p5"/>
             <p:cNvSpPr/>
             <p:nvPr/>
           </p:nvSpPr>
           <p:spPr>
             <a:xfrm>
-              <a:off x="0" y="16721"/>
+              <a:off x="838200" y="1754081"/>
               <a:ext cx="10506456" cy="868140"/>
             </a:xfrm>
             <a:prstGeom prst="roundRect">
@@ -20640,7 +18706,7 @@
             <a:effectLst>
               <a:outerShdw blurRad="57150" rotWithShape="0" algn="ctr" dir="5400000" dist="19050">
                 <a:srgbClr val="000000">
-                  <a:alpha val="62352"/>
+                  <a:alpha val="62745"/>
                 </a:srgbClr>
               </a:outerShdw>
             </a:effectLst>
@@ -20685,14 +18751,14 @@
         </p:sp>
         <p:sp>
           <p:nvSpPr>
-            <p:cNvPr id="170" name="Google Shape;170;p5"/>
+            <p:cNvPr id="158" name="Google Shape;158;p5"/>
             <p:cNvSpPr txBox="1"/>
             <p:nvPr/>
           </p:nvSpPr>
           <p:spPr>
             <a:xfrm>
-              <a:off x="42379" y="59100"/>
-              <a:ext cx="10421698" cy="783382"/>
+              <a:off x="880579" y="1754081"/>
+              <a:ext cx="10421698" cy="825761"/>
             </a:xfrm>
             <a:prstGeom prst="rect">
               <a:avLst/>
@@ -20726,7 +18792,7 @@
                 <a:buNone/>
               </a:pPr>
               <a:r>
-                <a:rPr b="1" i="0" lang="pt-BR" sz="1400" u="none" cap="none" strike="noStrike">
+                <a:rPr b="1" i="0" lang="pt-BR" sz="1500" u="none" cap="none" strike="noStrike">
                   <a:solidFill>
                     <a:schemeClr val="lt1"/>
                   </a:solidFill>
@@ -20737,9 +18803,9 @@
                 </a:rPr>
                 <a:t>Busca Inteligente e Organização</a:t>
               </a:r>
-              <a:endParaRPr b="0" i="0" sz="1400" u="none" cap="none" strike="noStrike">
-                <a:solidFill>
-                  <a:srgbClr val="000000"/>
+              <a:endParaRPr b="1" i="0" sz="1500" u="none" cap="none" strike="noStrike">
+                <a:solidFill>
+                  <a:schemeClr val="lt1"/>
                 </a:solidFill>
                 <a:latin typeface="Arial"/>
                 <a:ea typeface="Arial"/>
@@ -20750,23 +18816,18 @@
             <a:p>
               <a:pPr indent="0" lvl="0" marL="0" marR="0" rtl="0" algn="l">
                 <a:lnSpc>
-                  <a:spcPct val="90000"/>
+                  <a:spcPct val="100000"/>
                 </a:lnSpc>
                 <a:spcBef>
-                  <a:spcPts val="490"/>
+                  <a:spcPts val="525"/>
                 </a:spcBef>
                 <a:spcAft>
                   <a:spcPts val="0"/>
                 </a:spcAft>
-                <a:buClr>
-                  <a:schemeClr val="lt1"/>
-                </a:buClr>
-                <a:buSzPts val="1400"/>
-                <a:buFont typeface="Arial"/>
                 <a:buNone/>
               </a:pPr>
               <a:r>
-                <a:rPr b="0" i="0" lang="pt-BR" sz="1400" u="none" cap="none" strike="noStrike">
+                <a:rPr b="0" i="0" lang="pt-BR" sz="1500" u="none" cap="none" strike="noStrike">
                   <a:solidFill>
                     <a:schemeClr val="lt1"/>
                   </a:solidFill>
@@ -20775,567 +18836,9 @@
                   <a:cs typeface="Arial"/>
                   <a:sym typeface="Arial"/>
                 </a:rPr>
-                <a:t>Localização instantânea de qualquer registro através de </a:t>
+                <a:t>Localização instantânea de qualquer registro através de filtros combinados por tipo de instrumento pedagógico e tags customizáveis.</a:t>
               </a:r>
-              <a:r>
-                <a:rPr b="1" i="0" lang="pt-BR" sz="1400" u="none" cap="none" strike="noStrike">
-                  <a:solidFill>
-                    <a:schemeClr val="lt1"/>
-                  </a:solidFill>
-                  <a:latin typeface="Arial"/>
-                  <a:ea typeface="Arial"/>
-                  <a:cs typeface="Arial"/>
-                  <a:sym typeface="Arial"/>
-                </a:rPr>
-                <a:t>filtros combinados por tipo de instrumento pedagógico e tags customizáveis</a:t>
-              </a:r>
-              <a:r>
-                <a:rPr b="0" i="0" lang="pt-BR" sz="1400" u="none" cap="none" strike="noStrike">
-                  <a:solidFill>
-                    <a:schemeClr val="lt1"/>
-                  </a:solidFill>
-                  <a:latin typeface="Arial"/>
-                  <a:ea typeface="Arial"/>
-                  <a:cs typeface="Arial"/>
-                  <a:sym typeface="Arial"/>
-                </a:rPr>
-                <a:t>.</a:t>
-              </a:r>
-              <a:endParaRPr b="0" i="0" sz="1400" u="none" cap="none" strike="noStrike">
-                <a:solidFill>
-                  <a:srgbClr val="000000"/>
-                </a:solidFill>
-                <a:latin typeface="Arial"/>
-                <a:ea typeface="Arial"/>
-                <a:cs typeface="Arial"/>
-                <a:sym typeface="Arial"/>
-              </a:endParaRPr>
-            </a:p>
-          </p:txBody>
-        </p:sp>
-        <p:sp>
-          <p:nvSpPr>
-            <p:cNvPr id="171" name="Google Shape;171;p5"/>
-            <p:cNvSpPr/>
-            <p:nvPr/>
-          </p:nvSpPr>
-          <p:spPr>
-            <a:xfrm>
-              <a:off x="0" y="925181"/>
-              <a:ext cx="10506456" cy="868140"/>
-            </a:xfrm>
-            <a:prstGeom prst="roundRect">
-              <a:avLst>
-                <a:gd fmla="val 16667" name="adj"/>
-              </a:avLst>
-            </a:prstGeom>
-            <a:solidFill>
-              <a:srgbClr val="DB842F"/>
-            </a:solidFill>
-            <a:ln>
-              <a:noFill/>
-            </a:ln>
-            <a:effectLst>
-              <a:outerShdw blurRad="57150" rotWithShape="0" algn="ctr" dir="5400000" dist="19050">
-                <a:srgbClr val="000000">
-                  <a:alpha val="62352"/>
-                </a:srgbClr>
-              </a:outerShdw>
-            </a:effectLst>
-          </p:spPr>
-          <p:txBody>
-            <a:bodyPr anchorCtr="0" anchor="ctr" bIns="91425" lIns="91425" spcFirstLastPara="1" rIns="91425" wrap="square" tIns="91425">
-              <a:noAutofit/>
-            </a:bodyPr>
-            <a:lstStyle/>
-            <a:p>
-              <a:pPr indent="0" lvl="0" marL="0" marR="0" rtl="0" algn="l">
-                <a:lnSpc>
-                  <a:spcPct val="100000"/>
-                </a:lnSpc>
-                <a:spcBef>
-                  <a:spcPts val="0"/>
-                </a:spcBef>
-                <a:spcAft>
-                  <a:spcPts val="0"/>
-                </a:spcAft>
-                <a:buClr>
-                  <a:srgbClr val="000000"/>
-                </a:buClr>
-                <a:buSzPts val="1400"/>
-                <a:buFont typeface="Arial"/>
-                <a:buNone/>
-              </a:pPr>
-              <a:r>
-                <a:t/>
-              </a:r>
-              <a:endParaRPr b="0" i="0" sz="1400" u="none" cap="none" strike="noStrike">
-                <a:solidFill>
-                  <a:srgbClr val="000000"/>
-                </a:solidFill>
-                <a:latin typeface="Arial"/>
-                <a:ea typeface="Arial"/>
-                <a:cs typeface="Arial"/>
-                <a:sym typeface="Arial"/>
-              </a:endParaRPr>
-            </a:p>
-          </p:txBody>
-        </p:sp>
-        <p:sp>
-          <p:nvSpPr>
-            <p:cNvPr id="172" name="Google Shape;172;p5"/>
-            <p:cNvSpPr txBox="1"/>
-            <p:nvPr/>
-          </p:nvSpPr>
-          <p:spPr>
-            <a:xfrm>
-              <a:off x="42379" y="967560"/>
-              <a:ext cx="10421698" cy="783382"/>
-            </a:xfrm>
-            <a:prstGeom prst="rect">
-              <a:avLst/>
-            </a:prstGeom>
-            <a:noFill/>
-            <a:ln>
-              <a:noFill/>
-            </a:ln>
-          </p:spPr>
-          <p:txBody>
-            <a:bodyPr anchorCtr="0" anchor="ctr" bIns="53325" lIns="53325" spcFirstLastPara="1" rIns="53325" wrap="square" tIns="53325">
-              <a:noAutofit/>
-            </a:bodyPr>
-            <a:lstStyle/>
-            <a:p>
-              <a:pPr indent="0" lvl="0" marL="0" marR="0" rtl="0" algn="l">
-                <a:lnSpc>
-                  <a:spcPct val="90000"/>
-                </a:lnSpc>
-                <a:spcBef>
-                  <a:spcPts val="0"/>
-                </a:spcBef>
-                <a:spcAft>
-                  <a:spcPts val="0"/>
-                </a:spcAft>
-                <a:buClr>
-                  <a:schemeClr val="lt1"/>
-                </a:buClr>
-                <a:buSzPts val="1400"/>
-                <a:buFont typeface="Arial"/>
-                <a:buNone/>
-              </a:pPr>
-              <a:r>
-                <a:rPr b="1" i="0" lang="pt-BR" sz="1400" u="none" cap="none" strike="noStrike">
-                  <a:solidFill>
-                    <a:schemeClr val="lt1"/>
-                  </a:solidFill>
-                  <a:latin typeface="Arial"/>
-                  <a:ea typeface="Arial"/>
-                  <a:cs typeface="Arial"/>
-                  <a:sym typeface="Arial"/>
-                </a:rPr>
-                <a:t>Eficiência Operacional</a:t>
-              </a:r>
-              <a:r>
-                <a:rPr b="0" i="0" lang="pt-BR" sz="1400" u="none" cap="none" strike="noStrike">
-                  <a:solidFill>
-                    <a:schemeClr val="lt1"/>
-                  </a:solidFill>
-                  <a:latin typeface="Arial"/>
-                  <a:ea typeface="Arial"/>
-                  <a:cs typeface="Arial"/>
-                  <a:sym typeface="Arial"/>
-                </a:rPr>
-                <a:t> </a:t>
-              </a:r>
-              <a:endParaRPr b="0" i="0" sz="1400" u="none" cap="none" strike="noStrike">
-                <a:solidFill>
-                  <a:srgbClr val="000000"/>
-                </a:solidFill>
-                <a:latin typeface="Arial"/>
-                <a:ea typeface="Arial"/>
-                <a:cs typeface="Arial"/>
-                <a:sym typeface="Arial"/>
-              </a:endParaRPr>
-            </a:p>
-            <a:p>
-              <a:pPr indent="0" lvl="0" marL="0" marR="0" rtl="0" algn="l">
-                <a:lnSpc>
-                  <a:spcPct val="90000"/>
-                </a:lnSpc>
-                <a:spcBef>
-                  <a:spcPts val="490"/>
-                </a:spcBef>
-                <a:spcAft>
-                  <a:spcPts val="0"/>
-                </a:spcAft>
-                <a:buClr>
-                  <a:schemeClr val="lt1"/>
-                </a:buClr>
-                <a:buSzPts val="1400"/>
-                <a:buFont typeface="Arial"/>
-                <a:buNone/>
-              </a:pPr>
-              <a:r>
-                <a:rPr b="0" i="0" lang="pt-BR" sz="1400" u="none" cap="none" strike="noStrike">
-                  <a:solidFill>
-                    <a:schemeClr val="lt1"/>
-                  </a:solidFill>
-                  <a:latin typeface="Arial"/>
-                  <a:ea typeface="Arial"/>
-                  <a:cs typeface="Arial"/>
-                  <a:sym typeface="Arial"/>
-                </a:rPr>
-                <a:t>Redução drástica do tempo de documentação ao substituir ferramentas genéricas por um fluxo automatizado e colaborativo.</a:t>
-              </a:r>
-              <a:endParaRPr b="0" i="0" sz="1400" u="none" cap="none" strike="noStrike">
-                <a:solidFill>
-                  <a:srgbClr val="000000"/>
-                </a:solidFill>
-                <a:latin typeface="Arial"/>
-                <a:ea typeface="Arial"/>
-                <a:cs typeface="Arial"/>
-                <a:sym typeface="Arial"/>
-              </a:endParaRPr>
-            </a:p>
-          </p:txBody>
-        </p:sp>
-        <p:sp>
-          <p:nvSpPr>
-            <p:cNvPr id="173" name="Google Shape;173;p5"/>
-            <p:cNvSpPr/>
-            <p:nvPr/>
-          </p:nvSpPr>
-          <p:spPr>
-            <a:xfrm>
-              <a:off x="0" y="2742102"/>
-              <a:ext cx="10506456" cy="868140"/>
-            </a:xfrm>
-            <a:prstGeom prst="roundRect">
-              <a:avLst>
-                <a:gd fmla="val 16667" name="adj"/>
-              </a:avLst>
-            </a:prstGeom>
-            <a:solidFill>
-              <a:srgbClr val="215F70"/>
-            </a:solidFill>
-            <a:ln>
-              <a:noFill/>
-            </a:ln>
-            <a:effectLst>
-              <a:outerShdw blurRad="57150" rotWithShape="0" algn="ctr" dir="5400000" dist="19050">
-                <a:srgbClr val="000000">
-                  <a:alpha val="62352"/>
-                </a:srgbClr>
-              </a:outerShdw>
-            </a:effectLst>
-          </p:spPr>
-          <p:txBody>
-            <a:bodyPr anchorCtr="0" anchor="ctr" bIns="91425" lIns="91425" spcFirstLastPara="1" rIns="91425" wrap="square" tIns="91425">
-              <a:noAutofit/>
-            </a:bodyPr>
-            <a:lstStyle/>
-            <a:p>
-              <a:pPr indent="0" lvl="0" marL="0" marR="0" rtl="0" algn="l">
-                <a:lnSpc>
-                  <a:spcPct val="100000"/>
-                </a:lnSpc>
-                <a:spcBef>
-                  <a:spcPts val="0"/>
-                </a:spcBef>
-                <a:spcAft>
-                  <a:spcPts val="0"/>
-                </a:spcAft>
-                <a:buClr>
-                  <a:srgbClr val="000000"/>
-                </a:buClr>
-                <a:buSzPts val="1400"/>
-                <a:buFont typeface="Arial"/>
-                <a:buNone/>
-              </a:pPr>
-              <a:r>
-                <a:t/>
-              </a:r>
-              <a:endParaRPr b="0" i="0" sz="1400" u="none" cap="none" strike="noStrike">
-                <a:solidFill>
-                  <a:srgbClr val="000000"/>
-                </a:solidFill>
-                <a:latin typeface="Arial"/>
-                <a:ea typeface="Arial"/>
-                <a:cs typeface="Arial"/>
-                <a:sym typeface="Arial"/>
-              </a:endParaRPr>
-            </a:p>
-          </p:txBody>
-        </p:sp>
-        <p:sp>
-          <p:nvSpPr>
-            <p:cNvPr id="174" name="Google Shape;174;p5"/>
-            <p:cNvSpPr txBox="1"/>
-            <p:nvPr/>
-          </p:nvSpPr>
-          <p:spPr>
-            <a:xfrm>
-              <a:off x="42379" y="2784481"/>
-              <a:ext cx="10421700" cy="783300"/>
-            </a:xfrm>
-            <a:prstGeom prst="rect">
-              <a:avLst/>
-            </a:prstGeom>
-            <a:noFill/>
-            <a:ln>
-              <a:noFill/>
-            </a:ln>
-          </p:spPr>
-          <p:txBody>
-            <a:bodyPr anchorCtr="0" anchor="ctr" bIns="53325" lIns="53325" spcFirstLastPara="1" rIns="53325" wrap="square" tIns="53325">
-              <a:noAutofit/>
-            </a:bodyPr>
-            <a:lstStyle/>
-            <a:p>
-              <a:pPr indent="0" lvl="0" marL="0" marR="0" rtl="0" algn="l">
-                <a:lnSpc>
-                  <a:spcPct val="90000"/>
-                </a:lnSpc>
-                <a:spcBef>
-                  <a:spcPts val="0"/>
-                </a:spcBef>
-                <a:spcAft>
-                  <a:spcPts val="0"/>
-                </a:spcAft>
-                <a:buClr>
-                  <a:schemeClr val="lt1"/>
-                </a:buClr>
-                <a:buSzPts val="1400"/>
-                <a:buFont typeface="Arial"/>
-                <a:buNone/>
-              </a:pPr>
-              <a:r>
-                <a:rPr b="1" i="0" lang="pt-BR" sz="1400" u="none" cap="none" strike="noStrike">
-                  <a:solidFill>
-                    <a:schemeClr val="lt1"/>
-                  </a:solidFill>
-                  <a:latin typeface="Arial"/>
-                  <a:ea typeface="Arial"/>
-                  <a:cs typeface="Arial"/>
-                  <a:sym typeface="Arial"/>
-                </a:rPr>
-                <a:t>Segurança de Dados</a:t>
-              </a:r>
-              <a:endParaRPr b="0" i="0" sz="1400" u="none" cap="none" strike="noStrike">
-                <a:solidFill>
-                  <a:srgbClr val="000000"/>
-                </a:solidFill>
-                <a:latin typeface="Arial"/>
-                <a:ea typeface="Arial"/>
-                <a:cs typeface="Arial"/>
-                <a:sym typeface="Arial"/>
-              </a:endParaRPr>
-            </a:p>
-            <a:p>
-              <a:pPr indent="0" lvl="0" marL="0" marR="0" rtl="0" algn="l">
-                <a:lnSpc>
-                  <a:spcPct val="90000"/>
-                </a:lnSpc>
-                <a:spcBef>
-                  <a:spcPts val="490"/>
-                </a:spcBef>
-                <a:spcAft>
-                  <a:spcPts val="0"/>
-                </a:spcAft>
-                <a:buClr>
-                  <a:schemeClr val="lt1"/>
-                </a:buClr>
-                <a:buSzPts val="1400"/>
-                <a:buFont typeface="Arial"/>
-                <a:buNone/>
-              </a:pPr>
-              <a:r>
-                <a:rPr b="0" i="0" lang="pt-BR" sz="1400" u="none" cap="none" strike="noStrike">
-                  <a:solidFill>
-                    <a:schemeClr val="lt1"/>
-                  </a:solidFill>
-                  <a:latin typeface="Arial"/>
-                  <a:ea typeface="Arial"/>
-                  <a:cs typeface="Arial"/>
-                  <a:sym typeface="Arial"/>
-                </a:rPr>
-                <a:t>Acesso restrito e criptografia total (em trânsito e em repouso).</a:t>
-              </a:r>
-              <a:endParaRPr b="0" i="0" sz="1400" u="none" cap="none" strike="noStrike">
-                <a:solidFill>
-                  <a:schemeClr val="lt1"/>
-                </a:solidFill>
-                <a:latin typeface="Arial"/>
-                <a:ea typeface="Arial"/>
-                <a:cs typeface="Arial"/>
-                <a:sym typeface="Arial"/>
-              </a:endParaRPr>
-            </a:p>
-          </p:txBody>
-        </p:sp>
-        <p:sp>
-          <p:nvSpPr>
-            <p:cNvPr id="175" name="Google Shape;175;p5"/>
-            <p:cNvSpPr/>
-            <p:nvPr/>
-          </p:nvSpPr>
-          <p:spPr>
-            <a:xfrm>
-              <a:off x="0" y="3650562"/>
-              <a:ext cx="10506456" cy="868140"/>
-            </a:xfrm>
-            <a:prstGeom prst="roundRect">
-              <a:avLst>
-                <a:gd fmla="val 16667" name="adj"/>
-              </a:avLst>
-            </a:prstGeom>
-            <a:solidFill>
-              <a:srgbClr val="359294"/>
-            </a:solidFill>
-            <a:ln>
-              <a:noFill/>
-            </a:ln>
-            <a:effectLst>
-              <a:outerShdw blurRad="57150" rotWithShape="0" algn="ctr" dir="5400000" dist="19050">
-                <a:srgbClr val="000000">
-                  <a:alpha val="62352"/>
-                </a:srgbClr>
-              </a:outerShdw>
-            </a:effectLst>
-          </p:spPr>
-          <p:txBody>
-            <a:bodyPr anchorCtr="0" anchor="ctr" bIns="91425" lIns="91425" spcFirstLastPara="1" rIns="91425" wrap="square" tIns="91425">
-              <a:noAutofit/>
-            </a:bodyPr>
-            <a:lstStyle/>
-            <a:p>
-              <a:pPr indent="0" lvl="0" marL="0" marR="0" rtl="0" algn="l">
-                <a:lnSpc>
-                  <a:spcPct val="100000"/>
-                </a:lnSpc>
-                <a:spcBef>
-                  <a:spcPts val="0"/>
-                </a:spcBef>
-                <a:spcAft>
-                  <a:spcPts val="0"/>
-                </a:spcAft>
-                <a:buClr>
-                  <a:srgbClr val="000000"/>
-                </a:buClr>
-                <a:buSzPts val="1400"/>
-                <a:buFont typeface="Arial"/>
-                <a:buNone/>
-              </a:pPr>
-              <a:r>
-                <a:t/>
-              </a:r>
-              <a:endParaRPr b="0" i="0" sz="1400" u="none" cap="none" strike="noStrike">
-                <a:solidFill>
-                  <a:srgbClr val="000000"/>
-                </a:solidFill>
-                <a:latin typeface="Arial"/>
-                <a:ea typeface="Arial"/>
-                <a:cs typeface="Arial"/>
-                <a:sym typeface="Arial"/>
-              </a:endParaRPr>
-            </a:p>
-          </p:txBody>
-        </p:sp>
-        <p:sp>
-          <p:nvSpPr>
-            <p:cNvPr id="176" name="Google Shape;176;p5"/>
-            <p:cNvSpPr txBox="1"/>
-            <p:nvPr/>
-          </p:nvSpPr>
-          <p:spPr>
-            <a:xfrm>
-              <a:off x="42379" y="3692941"/>
-              <a:ext cx="10421700" cy="783300"/>
-            </a:xfrm>
-            <a:prstGeom prst="rect">
-              <a:avLst/>
-            </a:prstGeom>
-            <a:noFill/>
-            <a:ln>
-              <a:noFill/>
-            </a:ln>
-          </p:spPr>
-          <p:txBody>
-            <a:bodyPr anchorCtr="0" anchor="ctr" bIns="53325" lIns="53325" spcFirstLastPara="1" rIns="53325" wrap="square" tIns="53325">
-              <a:noAutofit/>
-            </a:bodyPr>
-            <a:lstStyle/>
-            <a:p>
-              <a:pPr indent="0" lvl="0" marL="0" marR="0" rtl="0" algn="l">
-                <a:lnSpc>
-                  <a:spcPct val="90000"/>
-                </a:lnSpc>
-                <a:spcBef>
-                  <a:spcPts val="0"/>
-                </a:spcBef>
-                <a:spcAft>
-                  <a:spcPts val="0"/>
-                </a:spcAft>
-                <a:buClr>
-                  <a:schemeClr val="lt1"/>
-                </a:buClr>
-                <a:buSzPts val="1400"/>
-                <a:buFont typeface="Arial"/>
-                <a:buNone/>
-              </a:pPr>
-              <a:r>
-                <a:rPr b="1" i="0" lang="pt-BR" sz="1400" u="none" cap="none" strike="noStrike">
-                  <a:solidFill>
-                    <a:schemeClr val="lt1"/>
-                  </a:solidFill>
-                  <a:latin typeface="Arial"/>
-                  <a:ea typeface="Arial"/>
-                  <a:cs typeface="Arial"/>
-                  <a:sym typeface="Arial"/>
-                </a:rPr>
-                <a:t>Alta Disponibilidade</a:t>
-              </a:r>
-              <a:endParaRPr b="0" i="0" sz="1400" u="none" cap="none" strike="noStrike">
-                <a:solidFill>
-                  <a:srgbClr val="000000"/>
-                </a:solidFill>
-                <a:latin typeface="Arial"/>
-                <a:ea typeface="Arial"/>
-                <a:cs typeface="Arial"/>
-                <a:sym typeface="Arial"/>
-              </a:endParaRPr>
-            </a:p>
-            <a:p>
-              <a:pPr indent="0" lvl="0" marL="0" marR="0" rtl="0" algn="l">
-                <a:lnSpc>
-                  <a:spcPct val="90000"/>
-                </a:lnSpc>
-                <a:spcBef>
-                  <a:spcPts val="490"/>
-                </a:spcBef>
-                <a:spcAft>
-                  <a:spcPts val="0"/>
-                </a:spcAft>
-                <a:buClr>
-                  <a:schemeClr val="lt1"/>
-                </a:buClr>
-                <a:buSzPts val="1400"/>
-                <a:buFont typeface="Arial"/>
-                <a:buNone/>
-              </a:pPr>
-              <a:r>
-                <a:rPr b="0" i="0" lang="pt-BR" sz="1400" u="none" cap="none" strike="noStrike">
-                  <a:solidFill>
-                    <a:schemeClr val="lt1"/>
-                  </a:solidFill>
-                  <a:latin typeface="Arial"/>
-                  <a:ea typeface="Arial"/>
-                  <a:cs typeface="Arial"/>
-                  <a:sym typeface="Arial"/>
-                </a:rPr>
-                <a:t>Garantia de 99,5% de uptime, protegendo registros pedagógicos que são insubstituíveis.</a:t>
-              </a:r>
-              <a:endParaRPr b="0" i="0" sz="1400" u="none" cap="none" strike="noStrike">
+              <a:endParaRPr b="0" i="0" sz="1500" u="none" cap="none" strike="noStrike">
                 <a:solidFill>
                   <a:schemeClr val="lt1"/>
                 </a:solidFill>
@@ -21348,6 +18851,149 @@
           </p:txBody>
         </p:sp>
       </p:grpSp>
+      <p:pic>
+        <p:nvPicPr>
+          <p:cNvPr descr="Interface gráfica do usuário, Texto, Aplicativo, chat ou mensagem de texto&#10;&#10;O conteúdo gerado por IA pode estar incorreto." id="159" name="Google Shape;159;p5"/>
+          <p:cNvPicPr preferRelativeResize="0"/>
+          <p:nvPr/>
+        </p:nvPicPr>
+        <p:blipFill rotWithShape="1">
+          <a:blip r:embed="rId3">
+            <a:alphaModFix/>
+          </a:blip>
+          <a:srcRect b="0" l="0" r="0" t="0"/>
+          <a:stretch/>
+        </p:blipFill>
+        <p:spPr>
+          <a:xfrm>
+            <a:off x="1983955" y="3126715"/>
+            <a:ext cx="2953162" cy="2391109"/>
+          </a:xfrm>
+          <a:prstGeom prst="roundRect">
+            <a:avLst>
+              <a:gd fmla="val 8594" name="adj"/>
+            </a:avLst>
+          </a:prstGeom>
+          <a:solidFill>
+            <a:srgbClr val="ECECEC"/>
+          </a:solidFill>
+          <a:ln cap="flat" cmpd="sng" w="38100">
+            <a:solidFill>
+              <a:srgbClr val="F2A982"/>
+            </a:solidFill>
+            <a:prstDash val="solid"/>
+            <a:round/>
+            <a:headEnd len="sm" w="sm" type="none"/>
+            <a:tailEnd len="sm" w="sm" type="none"/>
+          </a:ln>
+          <a:effectLst>
+            <a:reflection blurRad="0" dir="5400000" dist="5000" endA="0" endPos="28000" kx="0" rotWithShape="0" algn="bl" stA="38000" stPos="0" sy="-100000" ky="0"/>
+          </a:effectLst>
+        </p:spPr>
+      </p:pic>
+      <p:pic>
+        <p:nvPicPr>
+          <p:cNvPr descr="Interface gráfica do usuário, Aplicativo&#10;&#10;O conteúdo gerado por IA pode estar incorreto." id="160" name="Google Shape;160;p5"/>
+          <p:cNvPicPr preferRelativeResize="0"/>
+          <p:nvPr/>
+        </p:nvPicPr>
+        <p:blipFill rotWithShape="1">
+          <a:blip r:embed="rId4">
+            <a:alphaModFix/>
+          </a:blip>
+          <a:srcRect b="0" l="0" r="0" t="3689"/>
+          <a:stretch/>
+        </p:blipFill>
+        <p:spPr>
+          <a:xfrm>
+            <a:off x="7554499" y="3079085"/>
+            <a:ext cx="2276793" cy="2486371"/>
+          </a:xfrm>
+          <a:prstGeom prst="roundRect">
+            <a:avLst>
+              <a:gd fmla="val 8594" name="adj"/>
+            </a:avLst>
+          </a:prstGeom>
+          <a:solidFill>
+            <a:srgbClr val="BF4F14"/>
+          </a:solidFill>
+          <a:ln cap="flat" cmpd="sng" w="28575">
+            <a:solidFill>
+              <a:srgbClr val="F2A982"/>
+            </a:solidFill>
+            <a:prstDash val="solid"/>
+            <a:round/>
+            <a:headEnd len="sm" w="sm" type="none"/>
+            <a:tailEnd len="sm" w="sm" type="none"/>
+          </a:ln>
+          <a:effectLst>
+            <a:reflection blurRad="0" dir="5400000" dist="5000" endA="0" endPos="28000" kx="0" rotWithShape="0" algn="bl" stA="38000" stPos="0" sy="-100000" ky="0"/>
+          </a:effectLst>
+        </p:spPr>
+      </p:pic>
+      <p:sp>
+        <p:nvSpPr>
+          <p:cNvPr id="161" name="Google Shape;161;p5"/>
+          <p:cNvSpPr/>
+          <p:nvPr/>
+        </p:nvSpPr>
+        <p:spPr>
+          <a:xfrm>
+            <a:off x="5448270" y="4154528"/>
+            <a:ext cx="1694688" cy="335487"/>
+          </a:xfrm>
+          <a:prstGeom prst="rightArrow">
+            <a:avLst>
+              <a:gd fmla="val 50000" name="adj1"/>
+              <a:gd fmla="val 50000" name="adj2"/>
+            </a:avLst>
+          </a:prstGeom>
+          <a:solidFill>
+            <a:schemeClr val="accent1"/>
+          </a:solidFill>
+          <a:ln cap="flat" cmpd="sng" w="25400">
+            <a:solidFill>
+              <a:srgbClr val="082836"/>
+            </a:solidFill>
+            <a:prstDash val="solid"/>
+            <a:round/>
+            <a:headEnd len="sm" w="sm" type="none"/>
+            <a:tailEnd len="sm" w="sm" type="none"/>
+          </a:ln>
+        </p:spPr>
+        <p:txBody>
+          <a:bodyPr anchorCtr="0" anchor="ctr" bIns="45700" lIns="91425" spcFirstLastPara="1" rIns="91425" wrap="square" tIns="45700">
+            <a:noAutofit/>
+          </a:bodyPr>
+          <a:lstStyle/>
+          <a:p>
+            <a:pPr indent="0" lvl="0" marL="0" marR="0" rtl="0" algn="ctr">
+              <a:lnSpc>
+                <a:spcPct val="100000"/>
+              </a:lnSpc>
+              <a:spcBef>
+                <a:spcPts val="0"/>
+              </a:spcBef>
+              <a:spcAft>
+                <a:spcPts val="0"/>
+              </a:spcAft>
+              <a:buNone/>
+            </a:pPr>
+            <a:r>
+              <a:t/>
+            </a:r>
+            <a:endParaRPr b="0" i="0" sz="1400" u="none" cap="none" strike="noStrike">
+              <a:solidFill>
+                <a:schemeClr val="lt1"/>
+              </a:solidFill>
+              <a:latin typeface="Arial"/>
+              <a:ea typeface="Arial"/>
+              <a:cs typeface="Arial"/>
+              <a:sym typeface="Arial"/>
+            </a:endParaRPr>
+          </a:p>
+        </p:txBody>
+      </p:sp>
     </p:spTree>
   </p:cSld>
   <p:clrMapOvr>
@@ -21364,7 +19010,7 @@
   <p:cSld>
     <p:spTree>
       <p:nvGrpSpPr>
-        <p:cNvPr id="181" name="Shape 181"/>
+        <p:cNvPr id="166" name="Shape 166"/>
         <p:cNvGrpSpPr/>
         <p:nvPr/>
       </p:nvGrpSpPr>
@@ -21378,23 +19024,24 @@
       </p:grpSpPr>
       <p:pic>
         <p:nvPicPr>
-          <p:cNvPr id="182" name="Google Shape;182;g3c425a62f68_0_0" title="Plataforma Obeci.mp4">
+          <p:cNvPr id="167" name="Google Shape;167;g3c425a62f68_0_0" title="Plataforma Obeci.mp4">
             <a:hlinkClick r:id="rId3"/>
           </p:cNvPr>
           <p:cNvPicPr preferRelativeResize="0"/>
           <p:nvPr/>
         </p:nvPicPr>
-        <p:blipFill rotWithShape="1">
+        <p:blipFill>
           <a:blip r:embed="rId4">
             <a:alphaModFix/>
           </a:blip>
-          <a:srcRect b="0" l="0" r="0" t="0"/>
-          <a:stretch/>
+          <a:stretch>
+            <a:fillRect/>
+          </a:stretch>
         </p:blipFill>
         <p:spPr>
           <a:xfrm>
-            <a:off x="152400" y="167775"/>
-            <a:ext cx="11887200" cy="6375650"/>
+            <a:off x="0" y="152400"/>
+            <a:ext cx="12192001" cy="6096001"/>
           </a:xfrm>
           <a:prstGeom prst="rect">
             <a:avLst/>
@@ -21447,7 +19094,7 @@
                                           </p:stCondLst>
                                         </p:cTn>
                                         <p:tgtEl>
-                                          <p:spTgt spid="182"/>
+                                          <p:spTgt spid="167"/>
                                         </p:tgtEl>
                                         <p:attrNameLst>
                                           <p:attrName>style.visibility</p:attrName>
@@ -21461,7 +19108,7 @@
                                       <p:cBhvr>
                                         <p:cTn dur="1000"/>
                                         <p:tgtEl>
-                                          <p:spTgt spid="182"/>
+                                          <p:spTgt spid="167"/>
                                         </p:tgtEl>
                                       </p:cBhvr>
                                     </p:animEffect>
@@ -21504,7 +19151,7 @@
   <p:cSld>
     <p:spTree>
       <p:nvGrpSpPr>
-        <p:cNvPr id="187" name="Shape 187"/>
+        <p:cNvPr id="172" name="Shape 172"/>
         <p:cNvGrpSpPr/>
         <p:nvPr/>
       </p:nvGrpSpPr>
@@ -21518,7 +19165,7 @@
       </p:grpSpPr>
       <p:sp>
         <p:nvSpPr>
-          <p:cNvPr id="188" name="Google Shape;188;g3c4373e66a4_0_0"/>
+          <p:cNvPr id="173" name="Google Shape;173;g3c4373e66a4_0_0"/>
           <p:cNvSpPr txBox="1"/>
           <p:nvPr>
             <p:ph type="title"/>

--- a/documentos/Apresentação Final do Projeto.pptx
+++ b/documentos/Apresentação Final do Projeto.pptx
@@ -256,7 +256,7 @@
   </p:defaultTextStyle>
   <p:extLst>
     <p:ext uri="GoogleSlidesCustomDataVersion2">
-      <go:slidesCustomData xmlns:go="http://customooxmlschemas.google.com/" r:id="rId14" roundtripDataSignature="AMtx7mgAR1MEciNpGaqDigpQwYaHE4oKNg=="/>
+      <go:slidesCustomData xmlns:go="http://customooxmlschemas.google.com/" r:id="rId14" roundtripDataSignature="AMtx7mgzm8NVh08+MBzM6fFzbab3Bhrp4w=="/>
     </p:ext>
   </p:extLst>
 </p:presentation>
@@ -1860,7 +1860,7 @@
   <p:cSld>
     <p:spTree>
       <p:nvGrpSpPr>
-        <p:cNvPr id="95" name="Shape 95"/>
+        <p:cNvPr id="100" name="Shape 100"/>
         <p:cNvGrpSpPr/>
         <p:nvPr/>
       </p:nvGrpSpPr>
@@ -1874,7 +1874,7 @@
       </p:grpSpPr>
       <p:sp>
         <p:nvSpPr>
-          <p:cNvPr id="96" name="Google Shape;96;p2:notes"/>
+          <p:cNvPr id="101" name="Google Shape;101;p2:notes"/>
           <p:cNvSpPr/>
           <p:nvPr>
             <p:ph idx="2" type="sldImg"/>
@@ -1919,7 +1919,7 @@
       </p:sp>
       <p:sp>
         <p:nvSpPr>
-          <p:cNvPr id="97" name="Google Shape;97;p2:notes"/>
+          <p:cNvPr id="102" name="Google Shape;102;p2:notes"/>
           <p:cNvSpPr txBox="1"/>
           <p:nvPr>
             <p:ph idx="1" type="body"/>
@@ -1966,7 +1966,7 @@
       </p:sp>
       <p:sp>
         <p:nvSpPr>
-          <p:cNvPr id="98" name="Google Shape;98;p2:notes"/>
+          <p:cNvPr id="103" name="Google Shape;103;p2:notes"/>
           <p:cNvSpPr txBox="1"/>
           <p:nvPr>
             <p:ph idx="12" type="sldNum"/>
@@ -2025,7 +2025,7 @@
   <p:cSld>
     <p:spTree>
       <p:nvGrpSpPr>
-        <p:cNvPr id="111" name="Shape 111"/>
+        <p:cNvPr id="116" name="Shape 116"/>
         <p:cNvGrpSpPr/>
         <p:nvPr/>
       </p:nvGrpSpPr>
@@ -2039,7 +2039,7 @@
       </p:grpSpPr>
       <p:sp>
         <p:nvSpPr>
-          <p:cNvPr id="112" name="Google Shape;112;p3:notes"/>
+          <p:cNvPr id="117" name="Google Shape;117;p3:notes"/>
           <p:cNvSpPr/>
           <p:nvPr>
             <p:ph idx="2" type="sldImg"/>
@@ -2084,7 +2084,7 @@
       </p:sp>
       <p:sp>
         <p:nvSpPr>
-          <p:cNvPr id="113" name="Google Shape;113;p3:notes"/>
+          <p:cNvPr id="118" name="Google Shape;118;p3:notes"/>
           <p:cNvSpPr txBox="1"/>
           <p:nvPr>
             <p:ph idx="1" type="body"/>
@@ -2150,7 +2150,7 @@
       </p:sp>
       <p:sp>
         <p:nvSpPr>
-          <p:cNvPr id="114" name="Google Shape;114;p3:notes"/>
+          <p:cNvPr id="119" name="Google Shape;119;p3:notes"/>
           <p:cNvSpPr txBox="1"/>
           <p:nvPr>
             <p:ph idx="12" type="sldNum"/>
@@ -2209,7 +2209,7 @@
   <p:cSld>
     <p:spTree>
       <p:nvGrpSpPr>
-        <p:cNvPr id="130" name="Shape 130"/>
+        <p:cNvPr id="135" name="Shape 135"/>
         <p:cNvGrpSpPr/>
         <p:nvPr/>
       </p:nvGrpSpPr>
@@ -2223,7 +2223,7 @@
       </p:grpSpPr>
       <p:sp>
         <p:nvSpPr>
-          <p:cNvPr id="131" name="Google Shape;131;p4:notes"/>
+          <p:cNvPr id="136" name="Google Shape;136;p4:notes"/>
           <p:cNvSpPr/>
           <p:nvPr>
             <p:ph idx="2" type="sldImg"/>
@@ -2268,7 +2268,7 @@
       </p:sp>
       <p:sp>
         <p:nvSpPr>
-          <p:cNvPr id="132" name="Google Shape;132;p4:notes"/>
+          <p:cNvPr id="137" name="Google Shape;137;p4:notes"/>
           <p:cNvSpPr txBox="1"/>
           <p:nvPr>
             <p:ph idx="1" type="body"/>
@@ -2315,7 +2315,7 @@
       </p:sp>
       <p:sp>
         <p:nvSpPr>
-          <p:cNvPr id="133" name="Google Shape;133;p4:notes"/>
+          <p:cNvPr id="138" name="Google Shape;138;p4:notes"/>
           <p:cNvSpPr txBox="1"/>
           <p:nvPr>
             <p:ph idx="12" type="sldNum"/>
@@ -2374,7 +2374,7 @@
   <p:cSld>
     <p:spTree>
       <p:nvGrpSpPr>
-        <p:cNvPr id="150" name="Shape 150"/>
+        <p:cNvPr id="159" name="Shape 159"/>
         <p:cNvGrpSpPr/>
         <p:nvPr/>
       </p:nvGrpSpPr>
@@ -2388,7 +2388,7 @@
       </p:grpSpPr>
       <p:sp>
         <p:nvSpPr>
-          <p:cNvPr id="151" name="Google Shape;151;p5:notes"/>
+          <p:cNvPr id="160" name="Google Shape;160;p5:notes"/>
           <p:cNvSpPr/>
           <p:nvPr>
             <p:ph idx="2" type="sldImg"/>
@@ -2433,7 +2433,7 @@
       </p:sp>
       <p:sp>
         <p:nvSpPr>
-          <p:cNvPr id="152" name="Google Shape;152;p5:notes"/>
+          <p:cNvPr id="161" name="Google Shape;161;p5:notes"/>
           <p:cNvSpPr txBox="1"/>
           <p:nvPr>
             <p:ph idx="1" type="body"/>
@@ -2480,7 +2480,7 @@
       </p:sp>
       <p:sp>
         <p:nvSpPr>
-          <p:cNvPr id="153" name="Google Shape;153;p5:notes"/>
+          <p:cNvPr id="162" name="Google Shape;162;p5:notes"/>
           <p:cNvSpPr txBox="1"/>
           <p:nvPr>
             <p:ph idx="12" type="sldNum"/>
@@ -2539,7 +2539,7 @@
   <p:cSld>
     <p:spTree>
       <p:nvGrpSpPr>
-        <p:cNvPr id="162" name="Shape 162"/>
+        <p:cNvPr id="171" name="Shape 171"/>
         <p:cNvGrpSpPr/>
         <p:nvPr/>
       </p:nvGrpSpPr>
@@ -2553,7 +2553,7 @@
       </p:grpSpPr>
       <p:sp>
         <p:nvSpPr>
-          <p:cNvPr id="163" name="Google Shape;163;g3c425a62f68_0_0:notes"/>
+          <p:cNvPr id="172" name="Google Shape;172;g3c425a62f68_0_0:notes"/>
           <p:cNvSpPr/>
           <p:nvPr>
             <p:ph idx="2" type="sldImg"/>
@@ -2598,7 +2598,7 @@
       </p:sp>
       <p:sp>
         <p:nvSpPr>
-          <p:cNvPr id="164" name="Google Shape;164;g3c425a62f68_0_0:notes"/>
+          <p:cNvPr id="173" name="Google Shape;173;g3c425a62f68_0_0:notes"/>
           <p:cNvSpPr txBox="1"/>
           <p:nvPr>
             <p:ph idx="1" type="body"/>
@@ -2646,7 +2646,7 @@
       </p:sp>
       <p:sp>
         <p:nvSpPr>
-          <p:cNvPr id="165" name="Google Shape;165;g3c425a62f68_0_0:notes"/>
+          <p:cNvPr id="174" name="Google Shape;174;g3c425a62f68_0_0:notes"/>
           <p:cNvSpPr txBox="1"/>
           <p:nvPr>
             <p:ph idx="12" type="sldNum"/>
@@ -2705,7 +2705,7 @@
   <p:cSld>
     <p:spTree>
       <p:nvGrpSpPr>
-        <p:cNvPr id="168" name="Shape 168"/>
+        <p:cNvPr id="177" name="Shape 177"/>
         <p:cNvGrpSpPr/>
         <p:nvPr/>
       </p:nvGrpSpPr>
@@ -2719,7 +2719,7 @@
       </p:grpSpPr>
       <p:sp>
         <p:nvSpPr>
-          <p:cNvPr id="169" name="Google Shape;169;g3c4373e66a4_0_0:notes"/>
+          <p:cNvPr id="178" name="Google Shape;178;g3c4373e66a4_0_0:notes"/>
           <p:cNvSpPr/>
           <p:nvPr>
             <p:ph idx="2" type="sldImg"/>
@@ -2764,7 +2764,7 @@
       </p:sp>
       <p:sp>
         <p:nvSpPr>
-          <p:cNvPr id="170" name="Google Shape;170;g3c4373e66a4_0_0:notes"/>
+          <p:cNvPr id="179" name="Google Shape;179;g3c4373e66a4_0_0:notes"/>
           <p:cNvSpPr txBox="1"/>
           <p:nvPr>
             <p:ph idx="1" type="body"/>
@@ -2851,7 +2851,7 @@
       </p:sp>
       <p:sp>
         <p:nvSpPr>
-          <p:cNvPr id="171" name="Google Shape;171;g3c4373e66a4_0_0:notes"/>
+          <p:cNvPr id="180" name="Google Shape;180;g3c4373e66a4_0_0:notes"/>
           <p:cNvSpPr txBox="1"/>
           <p:nvPr>
             <p:ph idx="12" type="sldNum"/>
@@ -15648,8 +15648,8 @@
         </p:nvSpPr>
         <p:spPr>
           <a:xfrm>
-            <a:off x="495892" y="1180762"/>
-            <a:ext cx="6024769" cy="644870"/>
+            <a:off x="474367" y="1396062"/>
+            <a:ext cx="6024900" cy="645000"/>
           </a:xfrm>
           <a:prstGeom prst="rect">
             <a:avLst/>
@@ -15702,8 +15702,8 @@
         </p:nvSpPr>
         <p:spPr>
           <a:xfrm>
-            <a:off x="495893" y="3296297"/>
-            <a:ext cx="5051467" cy="1277273"/>
+            <a:off x="517443" y="2813247"/>
+            <a:ext cx="5051400" cy="1250700"/>
           </a:xfrm>
           <a:prstGeom prst="rect">
             <a:avLst/>
@@ -15866,7 +15866,27 @@
                 <a:cs typeface="Arial"/>
                 <a:sym typeface="Arial"/>
               </a:rPr>
-              <a:t>Rosane Meyer</a:t>
+              <a:t>Rosa</a:t>
+            </a:r>
+            <a:r>
+              <a:rPr lang="pt-BR" sz="1600">
+                <a:solidFill>
+                  <a:srgbClr val="1C3C5C"/>
+                </a:solidFill>
+              </a:rPr>
+              <a:t>na </a:t>
+            </a:r>
+            <a:r>
+              <a:rPr b="0" i="0" lang="pt-BR" sz="1600" u="none" cap="none" strike="noStrike">
+                <a:solidFill>
+                  <a:srgbClr val="1C3C5C"/>
+                </a:solidFill>
+                <a:latin typeface="Arial"/>
+                <a:ea typeface="Arial"/>
+                <a:cs typeface="Arial"/>
+                <a:sym typeface="Arial"/>
+              </a:rPr>
+              <a:t>Meyer</a:t>
             </a:r>
             <a:endParaRPr b="0" i="0" sz="1600" u="none" cap="none" strike="noStrike">
               <a:solidFill>
@@ -15897,16 +15917,12 @@
               <a:buNone/>
             </a:pPr>
             <a:r>
-              <a:rPr b="0" i="0" lang="pt-BR" sz="1600" u="none" cap="none" strike="noStrike">
+              <a:rPr lang="pt-BR" sz="1600">
                 <a:solidFill>
                   <a:srgbClr val="1C3C5C"/>
                 </a:solidFill>
-                <a:latin typeface="Arial"/>
-                <a:ea typeface="Arial"/>
-                <a:cs typeface="Arial"/>
-                <a:sym typeface="Arial"/>
               </a:rPr>
-              <a:t>Sandro Santos Jr.</a:t>
+              <a:t>Sandro R. S. Gonçalves Júnior</a:t>
             </a:r>
             <a:endParaRPr b="0" i="0" sz="1400" u="none" cap="none" strike="noStrike">
               <a:solidFill>
@@ -15928,8 +15944,8 @@
         </p:nvSpPr>
         <p:spPr>
           <a:xfrm>
-            <a:off x="495891" y="5390067"/>
-            <a:ext cx="6096000" cy="215444"/>
+            <a:off x="517441" y="4173167"/>
+            <a:ext cx="6096000" cy="431100"/>
           </a:xfrm>
           <a:prstGeom prst="rect">
             <a:avLst/>
@@ -15972,7 +15988,87 @@
                 <a:cs typeface="Arial"/>
                 <a:sym typeface="Arial"/>
               </a:rPr>
-              <a:t>Orientação: Prof.ª Ma. Izabel Cristina da Rosa dos Santos</a:t>
+              <a:t>Orientação: Prof.ª Ma. Izabel Cristina da Rosa dos Santos e </a:t>
+            </a:r>
+            <a:endParaRPr b="0" i="0" sz="1400" u="none" cap="none" strike="noStrike">
+              <a:solidFill>
+                <a:srgbClr val="CF5721"/>
+              </a:solidFill>
+              <a:latin typeface="Arial"/>
+              <a:ea typeface="Arial"/>
+              <a:cs typeface="Arial"/>
+              <a:sym typeface="Arial"/>
+            </a:endParaRPr>
+          </a:p>
+          <a:p>
+            <a:pPr indent="0" lvl="0" marL="0" marR="0" rtl="0" algn="l">
+              <a:lnSpc>
+                <a:spcPct val="100000"/>
+              </a:lnSpc>
+              <a:spcBef>
+                <a:spcPts val="0"/>
+              </a:spcBef>
+              <a:spcAft>
+                <a:spcPts val="0"/>
+              </a:spcAft>
+              <a:buClr>
+                <a:srgbClr val="000000"/>
+              </a:buClr>
+              <a:buSzPts val="1400"/>
+              <a:buFont typeface="Arial"/>
+              <a:buNone/>
+            </a:pPr>
+            <a:r>
+              <a:rPr b="0" i="0" lang="pt-BR" sz="1400" u="none" cap="none" strike="noStrike">
+                <a:solidFill>
+                  <a:srgbClr val="CF5721"/>
+                </a:solidFill>
+                <a:latin typeface="Arial"/>
+                <a:ea typeface="Arial"/>
+                <a:cs typeface="Arial"/>
+                <a:sym typeface="Arial"/>
+              </a:rPr>
+              <a:t>Mauricio dos </a:t>
+            </a:r>
+            <a:r>
+              <a:rPr lang="pt-BR">
+                <a:solidFill>
+                  <a:srgbClr val="CF5721"/>
+                </a:solidFill>
+              </a:rPr>
+              <a:t>S</a:t>
+            </a:r>
+            <a:r>
+              <a:rPr b="0" i="0" lang="pt-BR" sz="1400" u="none" cap="none" strike="noStrike">
+                <a:solidFill>
+                  <a:srgbClr val="CF5721"/>
+                </a:solidFill>
+                <a:latin typeface="Arial"/>
+                <a:ea typeface="Arial"/>
+                <a:cs typeface="Arial"/>
+                <a:sym typeface="Arial"/>
+              </a:rPr>
+              <a:t>antos </a:t>
+            </a:r>
+            <a:r>
+              <a:rPr lang="pt-BR">
+                <a:solidFill>
+                  <a:srgbClr val="CF5721"/>
+                </a:solidFill>
+              </a:rPr>
+              <a:t>F</a:t>
+            </a:r>
+            <a:r>
+              <a:rPr b="0" i="0" lang="pt-BR" sz="1400" u="none" cap="none" strike="noStrike">
+                <a:solidFill>
+                  <a:srgbClr val="CF5721"/>
+                </a:solidFill>
+                <a:latin typeface="Arial"/>
+                <a:ea typeface="Arial"/>
+                <a:cs typeface="Arial"/>
+                <a:sym typeface="Arial"/>
+              </a:rPr>
+              <a:t>erreira</a:t>
             </a:r>
             <a:endParaRPr b="0" i="0" sz="1400" u="none" cap="none" strike="noStrike">
               <a:solidFill>
@@ -15994,8 +16090,8 @@
         </p:nvSpPr>
         <p:spPr>
           <a:xfrm>
-            <a:off x="495891" y="1749172"/>
-            <a:ext cx="6024769" cy="644870"/>
+            <a:off x="474366" y="1964472"/>
+            <a:ext cx="6024900" cy="645000"/>
           </a:xfrm>
           <a:prstGeom prst="rect">
             <a:avLst/>
@@ -16094,21 +16190,22 @@
       </p:sp>
       <p:pic>
         <p:nvPicPr>
-          <p:cNvPr descr="Interface gráfica do usuário&#10;&#10;O conteúdo gerado por IA pode estar incorreto." id="94" name="Google Shape;94;p1"/>
+          <p:cNvPr id="94" name="Google Shape;94;p1" title="uni.png"/>
           <p:cNvPicPr preferRelativeResize="0"/>
           <p:nvPr/>
         </p:nvPicPr>
-        <p:blipFill rotWithShape="1">
+        <p:blipFill>
           <a:blip r:embed="rId3">
             <a:alphaModFix/>
           </a:blip>
-          <a:srcRect b="3288" l="1844" r="57030" t="3020"/>
-          <a:stretch/>
+          <a:stretch>
+            <a:fillRect/>
+          </a:stretch>
         </p:blipFill>
         <p:spPr>
           <a:xfrm>
-            <a:off x="6520661" y="531146"/>
-            <a:ext cx="4718470" cy="5795708"/>
+            <a:off x="687038" y="5215100"/>
+            <a:ext cx="2376052" cy="645000"/>
           </a:xfrm>
           <a:prstGeom prst="rect">
             <a:avLst/>
@@ -16119,6 +16216,180 @@
           </a:ln>
         </p:spPr>
       </p:pic>
+      <p:pic>
+        <p:nvPicPr>
+          <p:cNvPr id="95" name="Google Shape;95;p1"/>
+          <p:cNvPicPr preferRelativeResize="0"/>
+          <p:nvPr/>
+        </p:nvPicPr>
+        <p:blipFill>
+          <a:blip r:embed="rId4">
+            <a:alphaModFix/>
+          </a:blip>
+          <a:stretch>
+            <a:fillRect/>
+          </a:stretch>
+        </p:blipFill>
+        <p:spPr>
+          <a:xfrm>
+            <a:off x="-518994" y="5860100"/>
+            <a:ext cx="7581455" cy="901650"/>
+          </a:xfrm>
+          <a:prstGeom prst="rect">
+            <a:avLst/>
+          </a:prstGeom>
+          <a:noFill/>
+          <a:ln>
+            <a:noFill/>
+          </a:ln>
+        </p:spPr>
+      </p:pic>
+      <p:pic>
+        <p:nvPicPr>
+          <p:cNvPr id="96" name="Google Shape;96;p1"/>
+          <p:cNvPicPr preferRelativeResize="0"/>
+          <p:nvPr/>
+        </p:nvPicPr>
+        <p:blipFill>
+          <a:blip r:embed="rId5">
+            <a:alphaModFix/>
+          </a:blip>
+          <a:stretch>
+            <a:fillRect/>
+          </a:stretch>
+        </p:blipFill>
+        <p:spPr>
+          <a:xfrm>
+            <a:off x="3431187" y="5215100"/>
+            <a:ext cx="1881913" cy="645000"/>
+          </a:xfrm>
+          <a:prstGeom prst="rect">
+            <a:avLst/>
+          </a:prstGeom>
+          <a:noFill/>
+          <a:ln>
+            <a:noFill/>
+          </a:ln>
+        </p:spPr>
+      </p:pic>
+      <p:pic>
+        <p:nvPicPr>
+          <p:cNvPr id="97" name="Google Shape;97;p1" title="imagem-login.png"/>
+          <p:cNvPicPr preferRelativeResize="0"/>
+          <p:nvPr/>
+        </p:nvPicPr>
+        <p:blipFill>
+          <a:blip r:embed="rId6">
+            <a:alphaModFix/>
+          </a:blip>
+          <a:stretch>
+            <a:fillRect/>
+          </a:stretch>
+        </p:blipFill>
+        <p:spPr>
+          <a:xfrm>
+            <a:off x="7417672" y="0"/>
+            <a:ext cx="5925445" cy="6858000"/>
+          </a:xfrm>
+          <a:prstGeom prst="rect">
+            <a:avLst/>
+          </a:prstGeom>
+          <a:noFill/>
+          <a:ln>
+            <a:noFill/>
+          </a:ln>
+        </p:spPr>
+      </p:pic>
+      <p:pic>
+        <p:nvPicPr>
+          <p:cNvPr id="98" name="Google Shape;98;p1"/>
+          <p:cNvPicPr preferRelativeResize="0"/>
+          <p:nvPr/>
+        </p:nvPicPr>
+        <p:blipFill>
+          <a:blip r:embed="rId7">
+            <a:alphaModFix/>
+          </a:blip>
+          <a:stretch>
+            <a:fillRect/>
+          </a:stretch>
+        </p:blipFill>
+        <p:spPr>
+          <a:xfrm>
+            <a:off x="153350" y="90025"/>
+            <a:ext cx="2656966" cy="1375500"/>
+          </a:xfrm>
+          <a:prstGeom prst="rect">
+            <a:avLst/>
+          </a:prstGeom>
+          <a:noFill/>
+          <a:ln>
+            <a:noFill/>
+          </a:ln>
+        </p:spPr>
+      </p:pic>
+      <p:sp>
+        <p:nvSpPr>
+          <p:cNvPr id="99" name="Google Shape;99;p1"/>
+          <p:cNvSpPr txBox="1"/>
+          <p:nvPr/>
+        </p:nvSpPr>
+        <p:spPr>
+          <a:xfrm>
+            <a:off x="517441" y="4694130"/>
+            <a:ext cx="6096000" cy="215400"/>
+          </a:xfrm>
+          <a:prstGeom prst="rect">
+            <a:avLst/>
+          </a:prstGeom>
+          <a:noFill/>
+          <a:ln>
+            <a:noFill/>
+          </a:ln>
+        </p:spPr>
+        <p:txBody>
+          <a:bodyPr anchorCtr="0" anchor="t" bIns="0" lIns="0" spcFirstLastPara="1" rIns="0" wrap="square" tIns="0">
+            <a:spAutoFit/>
+          </a:bodyPr>
+          <a:lstStyle/>
+          <a:p>
+            <a:pPr indent="0" lvl="0" marL="0" marR="0" rtl="0" algn="l">
+              <a:lnSpc>
+                <a:spcPct val="100000"/>
+              </a:lnSpc>
+              <a:spcBef>
+                <a:spcPts val="0"/>
+              </a:spcBef>
+              <a:spcAft>
+                <a:spcPts val="0"/>
+              </a:spcAft>
+              <a:buClr>
+                <a:srgbClr val="000000"/>
+              </a:buClr>
+              <a:buSzPts val="1400"/>
+              <a:buFont typeface="Arial"/>
+              <a:buNone/>
+            </a:pPr>
+            <a:r>
+              <a:rPr lang="pt-BR">
+                <a:solidFill>
+                  <a:srgbClr val="CF5721"/>
+                </a:solidFill>
+              </a:rPr>
+              <a:t>Cliente: Paulo Fochi</a:t>
+            </a:r>
+            <a:endParaRPr b="0" i="0" sz="1400" u="none" cap="none" strike="noStrike">
+              <a:solidFill>
+                <a:srgbClr val="000000"/>
+              </a:solidFill>
+              <a:latin typeface="Arial"/>
+              <a:ea typeface="Arial"/>
+              <a:cs typeface="Arial"/>
+              <a:sym typeface="Arial"/>
+            </a:endParaRPr>
+          </a:p>
+        </p:txBody>
+      </p:sp>
     </p:spTree>
   </p:cSld>
   <p:clrMapOvr>
@@ -16132,7 +16403,7 @@
   <p:cSld>
     <p:spTree>
       <p:nvGrpSpPr>
-        <p:cNvPr id="99" name="Shape 99"/>
+        <p:cNvPr id="104" name="Shape 104"/>
         <p:cNvGrpSpPr/>
         <p:nvPr/>
       </p:nvGrpSpPr>
@@ -16146,7 +16417,7 @@
       </p:grpSpPr>
       <p:sp>
         <p:nvSpPr>
-          <p:cNvPr id="100" name="Google Shape;100;p2"/>
+          <p:cNvPr id="105" name="Google Shape;105;p2"/>
           <p:cNvSpPr txBox="1"/>
           <p:nvPr>
             <p:ph type="title"/>
@@ -16206,7 +16477,7 @@
       </p:sp>
       <p:grpSp>
         <p:nvGrpSpPr>
-          <p:cNvPr id="101" name="Google Shape;101;p2"/>
+          <p:cNvPr id="106" name="Google Shape;106;p2"/>
           <p:cNvGrpSpPr/>
           <p:nvPr/>
         </p:nvGrpSpPr>
@@ -16220,7 +16491,7 @@
         </p:grpSpPr>
         <p:sp>
           <p:nvSpPr>
-            <p:cNvPr id="102" name="Google Shape;102;p2"/>
+            <p:cNvPr id="107" name="Google Shape;107;p2"/>
             <p:cNvSpPr/>
             <p:nvPr/>
           </p:nvSpPr>
@@ -16291,7 +16562,7 @@
         </p:sp>
         <p:sp>
           <p:nvSpPr>
-            <p:cNvPr id="103" name="Google Shape;103;p2"/>
+            <p:cNvPr id="108" name="Google Shape;108;p2"/>
             <p:cNvSpPr/>
             <p:nvPr/>
           </p:nvSpPr>
@@ -16348,7 +16619,7 @@
         </p:sp>
         <p:sp>
           <p:nvSpPr>
-            <p:cNvPr id="104" name="Google Shape;104;p2"/>
+            <p:cNvPr id="109" name="Google Shape;109;p2"/>
             <p:cNvSpPr txBox="1"/>
             <p:nvPr/>
           </p:nvSpPr>
@@ -16454,7 +16725,7 @@
         </p:sp>
         <p:sp>
           <p:nvSpPr>
-            <p:cNvPr id="105" name="Google Shape;105;p2"/>
+            <p:cNvPr id="110" name="Google Shape;110;p2"/>
             <p:cNvSpPr/>
             <p:nvPr/>
           </p:nvSpPr>
@@ -16525,7 +16796,7 @@
         </p:sp>
         <p:sp>
           <p:nvSpPr>
-            <p:cNvPr id="106" name="Google Shape;106;p2"/>
+            <p:cNvPr id="111" name="Google Shape;111;p2"/>
             <p:cNvSpPr/>
             <p:nvPr/>
           </p:nvSpPr>
@@ -16582,7 +16853,7 @@
         </p:sp>
         <p:sp>
           <p:nvSpPr>
-            <p:cNvPr id="107" name="Google Shape;107;p2"/>
+            <p:cNvPr id="112" name="Google Shape;112;p2"/>
             <p:cNvSpPr txBox="1"/>
             <p:nvPr/>
           </p:nvSpPr>
@@ -16688,7 +16959,7 @@
         </p:sp>
         <p:sp>
           <p:nvSpPr>
-            <p:cNvPr id="108" name="Google Shape;108;p2"/>
+            <p:cNvPr id="113" name="Google Shape;113;p2"/>
             <p:cNvSpPr/>
             <p:nvPr/>
           </p:nvSpPr>
@@ -16759,7 +17030,7 @@
         </p:sp>
         <p:sp>
           <p:nvSpPr>
-            <p:cNvPr id="109" name="Google Shape;109;p2"/>
+            <p:cNvPr id="114" name="Google Shape;114;p2"/>
             <p:cNvSpPr/>
             <p:nvPr/>
           </p:nvSpPr>
@@ -16816,7 +17087,7 @@
         </p:sp>
         <p:sp>
           <p:nvSpPr>
-            <p:cNvPr id="110" name="Google Shape;110;p2"/>
+            <p:cNvPr id="115" name="Google Shape;115;p2"/>
             <p:cNvSpPr txBox="1"/>
             <p:nvPr/>
           </p:nvSpPr>
@@ -16937,7 +17208,7 @@
   <p:cSld>
     <p:spTree>
       <p:nvGrpSpPr>
-        <p:cNvPr id="115" name="Shape 115"/>
+        <p:cNvPr id="120" name="Shape 120"/>
         <p:cNvGrpSpPr/>
         <p:nvPr/>
       </p:nvGrpSpPr>
@@ -16951,7 +17222,7 @@
       </p:grpSpPr>
       <p:sp>
         <p:nvSpPr>
-          <p:cNvPr id="116" name="Google Shape;116;p3"/>
+          <p:cNvPr id="121" name="Google Shape;121;p3"/>
           <p:cNvSpPr txBox="1"/>
           <p:nvPr>
             <p:ph type="title"/>
@@ -17022,7 +17293,7 @@
       </p:sp>
       <p:grpSp>
         <p:nvGrpSpPr>
-          <p:cNvPr id="117" name="Google Shape;117;p3"/>
+          <p:cNvPr id="122" name="Google Shape;122;p3"/>
           <p:cNvGrpSpPr/>
           <p:nvPr/>
         </p:nvGrpSpPr>
@@ -17036,7 +17307,7 @@
         </p:grpSpPr>
         <p:grpSp>
           <p:nvGrpSpPr>
-            <p:cNvPr id="118" name="Google Shape;118;p3"/>
+            <p:cNvPr id="123" name="Google Shape;123;p3"/>
             <p:cNvGrpSpPr/>
             <p:nvPr/>
           </p:nvGrpSpPr>
@@ -17050,7 +17321,7 @@
           </p:grpSpPr>
           <p:sp>
             <p:nvSpPr>
-              <p:cNvPr id="119" name="Google Shape;119;p3"/>
+              <p:cNvPr id="124" name="Google Shape;124;p3"/>
               <p:cNvSpPr/>
               <p:nvPr/>
             </p:nvSpPr>
@@ -17111,7 +17382,7 @@
           </p:sp>
           <p:sp>
             <p:nvSpPr>
-              <p:cNvPr id="120" name="Google Shape;120;p3"/>
+              <p:cNvPr id="125" name="Google Shape;125;p3"/>
               <p:cNvSpPr/>
               <p:nvPr/>
             </p:nvSpPr>
@@ -17182,7 +17453,7 @@
           </p:sp>
           <p:sp>
             <p:nvSpPr>
-              <p:cNvPr id="121" name="Google Shape;121;p3"/>
+              <p:cNvPr id="126" name="Google Shape;126;p3"/>
               <p:cNvSpPr/>
               <p:nvPr/>
             </p:nvSpPr>
@@ -17239,7 +17510,7 @@
           </p:sp>
           <p:sp>
             <p:nvSpPr>
-              <p:cNvPr id="122" name="Google Shape;122;p3"/>
+              <p:cNvPr id="127" name="Google Shape;127;p3"/>
               <p:cNvSpPr txBox="1"/>
               <p:nvPr/>
             </p:nvSpPr>
@@ -17346,7 +17617,7 @@
         </p:grpSp>
         <p:grpSp>
           <p:nvGrpSpPr>
-            <p:cNvPr id="123" name="Google Shape;123;p3"/>
+            <p:cNvPr id="128" name="Google Shape;128;p3"/>
             <p:cNvGrpSpPr/>
             <p:nvPr/>
           </p:nvGrpSpPr>
@@ -17360,7 +17631,7 @@
           </p:grpSpPr>
           <p:sp>
             <p:nvSpPr>
-              <p:cNvPr id="124" name="Google Shape;124;p3"/>
+              <p:cNvPr id="129" name="Google Shape;129;p3"/>
               <p:cNvSpPr/>
               <p:nvPr/>
             </p:nvSpPr>
@@ -17421,7 +17692,7 @@
           </p:sp>
           <p:sp>
             <p:nvSpPr>
-              <p:cNvPr id="125" name="Google Shape;125;p3"/>
+              <p:cNvPr id="130" name="Google Shape;130;p3"/>
               <p:cNvSpPr/>
               <p:nvPr/>
             </p:nvSpPr>
@@ -17492,7 +17763,7 @@
           </p:sp>
           <p:sp>
             <p:nvSpPr>
-              <p:cNvPr id="126" name="Google Shape;126;p3"/>
+              <p:cNvPr id="131" name="Google Shape;131;p3"/>
               <p:cNvSpPr/>
               <p:nvPr/>
             </p:nvSpPr>
@@ -17549,7 +17820,7 @@
           </p:sp>
           <p:sp>
             <p:nvSpPr>
-              <p:cNvPr id="127" name="Google Shape;127;p3"/>
+              <p:cNvPr id="132" name="Google Shape;132;p3"/>
               <p:cNvSpPr txBox="1"/>
               <p:nvPr/>
             </p:nvSpPr>
@@ -17652,7 +17923,7 @@
       </p:grpSp>
       <p:pic>
         <p:nvPicPr>
-          <p:cNvPr descr="Interface gráfica do usuário, Aplicativo&#10;&#10;O conteúdo gerado por IA pode estar incorreto." id="128" name="Google Shape;128;p3"/>
+          <p:cNvPr descr="Interface gráfica do usuário, Aplicativo&#10;&#10;O conteúdo gerado por IA pode estar incorreto." id="133" name="Google Shape;133;p3"/>
           <p:cNvPicPr preferRelativeResize="0"/>
           <p:nvPr/>
         </p:nvPicPr>
@@ -17679,7 +17950,7 @@
       </p:pic>
       <p:pic>
         <p:nvPicPr>
-          <p:cNvPr descr="Desenho de um círculo&#10;&#10;O conteúdo gerado por IA pode estar incorreto." id="129" name="Google Shape;129;p3"/>
+          <p:cNvPr descr="Desenho de um círculo&#10;&#10;O conteúdo gerado por IA pode estar incorreto." id="134" name="Google Shape;134;p3"/>
           <p:cNvPicPr preferRelativeResize="0"/>
           <p:nvPr/>
         </p:nvPicPr>
@@ -17736,7 +18007,7 @@
     </p:bg>
     <p:spTree>
       <p:nvGrpSpPr>
-        <p:cNvPr id="134" name="Shape 134"/>
+        <p:cNvPr id="139" name="Shape 139"/>
         <p:cNvGrpSpPr/>
         <p:nvPr/>
       </p:nvGrpSpPr>
@@ -17750,7 +18021,7 @@
       </p:grpSpPr>
       <p:sp>
         <p:nvSpPr>
-          <p:cNvPr id="135" name="Google Shape;135;p4"/>
+          <p:cNvPr id="140" name="Google Shape;140;p4"/>
           <p:cNvSpPr txBox="1"/>
           <p:nvPr>
             <p:ph type="title"/>
@@ -17758,8 +18029,8 @@
         </p:nvSpPr>
         <p:spPr>
           <a:xfrm>
-            <a:off x="838200" y="557189"/>
-            <a:ext cx="3374136" cy="5567891"/>
+            <a:off x="827425" y="356800"/>
+            <a:ext cx="3737400" cy="3821400"/>
           </a:xfrm>
           <a:prstGeom prst="rect">
             <a:avLst/>
@@ -17810,13 +18081,13 @@
       </p:sp>
       <p:grpSp>
         <p:nvGrpSpPr>
-          <p:cNvPr id="136" name="Google Shape;136;p4"/>
+          <p:cNvPr id="141" name="Google Shape;141;p4"/>
           <p:cNvGrpSpPr/>
           <p:nvPr/>
         </p:nvGrpSpPr>
         <p:grpSpPr>
           <a:xfrm>
-            <a:off x="5090159" y="1516740"/>
+            <a:off x="5047109" y="806165"/>
             <a:ext cx="6263641" cy="3372029"/>
             <a:chOff x="5090159" y="1516740"/>
             <a:chExt cx="6263641" cy="3372029"/>
@@ -17824,7 +18095,7 @@
         </p:grpSpPr>
         <p:sp>
           <p:nvSpPr>
-            <p:cNvPr id="137" name="Google Shape;137;p4"/>
+            <p:cNvPr id="142" name="Google Shape;142;p4"/>
             <p:cNvSpPr/>
             <p:nvPr/>
           </p:nvSpPr>
@@ -17885,7 +18156,7 @@
         </p:sp>
         <p:sp>
           <p:nvSpPr>
-            <p:cNvPr id="138" name="Google Shape;138;p4"/>
+            <p:cNvPr id="143" name="Google Shape;143;p4"/>
             <p:cNvSpPr/>
             <p:nvPr/>
           </p:nvSpPr>
@@ -17949,7 +18220,7 @@
         </p:sp>
         <p:sp>
           <p:nvSpPr>
-            <p:cNvPr id="139" name="Google Shape;139;p4"/>
+            <p:cNvPr id="144" name="Google Shape;144;p4"/>
             <p:cNvSpPr/>
             <p:nvPr/>
           </p:nvSpPr>
@@ -18006,7 +18277,7 @@
         </p:sp>
         <p:sp>
           <p:nvSpPr>
-            <p:cNvPr id="140" name="Google Shape;140;p4"/>
+            <p:cNvPr id="145" name="Google Shape;145;p4"/>
             <p:cNvSpPr txBox="1"/>
             <p:nvPr/>
           </p:nvSpPr>
@@ -18072,7 +18343,7 @@
         </p:sp>
         <p:sp>
           <p:nvSpPr>
-            <p:cNvPr id="141" name="Google Shape;141;p4"/>
+            <p:cNvPr id="146" name="Google Shape;146;p4"/>
             <p:cNvSpPr/>
             <p:nvPr/>
           </p:nvSpPr>
@@ -18133,7 +18404,7 @@
         </p:sp>
         <p:sp>
           <p:nvSpPr>
-            <p:cNvPr id="142" name="Google Shape;142;p4"/>
+            <p:cNvPr id="147" name="Google Shape;147;p4"/>
             <p:cNvSpPr/>
             <p:nvPr/>
           </p:nvSpPr>
@@ -18197,7 +18468,7 @@
         </p:sp>
         <p:sp>
           <p:nvSpPr>
-            <p:cNvPr id="143" name="Google Shape;143;p4"/>
+            <p:cNvPr id="148" name="Google Shape;148;p4"/>
             <p:cNvSpPr/>
             <p:nvPr/>
           </p:nvSpPr>
@@ -18254,7 +18525,7 @@
         </p:sp>
         <p:sp>
           <p:nvSpPr>
-            <p:cNvPr id="144" name="Google Shape;144;p4"/>
+            <p:cNvPr id="149" name="Google Shape;149;p4"/>
             <p:cNvSpPr txBox="1"/>
             <p:nvPr/>
           </p:nvSpPr>
@@ -18320,7 +18591,7 @@
         </p:sp>
         <p:grpSp>
           <p:nvGrpSpPr>
-            <p:cNvPr id="145" name="Google Shape;145;p4"/>
+            <p:cNvPr id="150" name="Google Shape;150;p4"/>
             <p:cNvGrpSpPr/>
             <p:nvPr/>
           </p:nvGrpSpPr>
@@ -18334,7 +18605,7 @@
           </p:grpSpPr>
           <p:sp>
             <p:nvSpPr>
-              <p:cNvPr id="146" name="Google Shape;146;p4"/>
+              <p:cNvPr id="151" name="Google Shape;151;p4"/>
               <p:cNvSpPr/>
               <p:nvPr/>
             </p:nvSpPr>
@@ -18395,7 +18666,7 @@
           </p:sp>
           <p:sp>
             <p:nvSpPr>
-              <p:cNvPr id="147" name="Google Shape;147;p4"/>
+              <p:cNvPr id="152" name="Google Shape;152;p4"/>
               <p:cNvSpPr/>
               <p:nvPr/>
             </p:nvSpPr>
@@ -18459,7 +18730,7 @@
           </p:sp>
           <p:sp>
             <p:nvSpPr>
-              <p:cNvPr id="148" name="Google Shape;148;p4"/>
+              <p:cNvPr id="153" name="Google Shape;153;p4"/>
               <p:cNvSpPr/>
               <p:nvPr/>
             </p:nvSpPr>
@@ -18516,7 +18787,7 @@
           </p:sp>
           <p:sp>
             <p:nvSpPr>
-              <p:cNvPr id="149" name="Google Shape;149;p4"/>
+              <p:cNvPr id="154" name="Google Shape;154;p4"/>
               <p:cNvSpPr txBox="1"/>
               <p:nvPr/>
             </p:nvSpPr>
@@ -18582,6 +18853,268 @@
           </p:sp>
         </p:grpSp>
       </p:grpSp>
+      <p:sp>
+        <p:nvSpPr>
+          <p:cNvPr id="155" name="Google Shape;155;p4"/>
+          <p:cNvSpPr txBox="1"/>
+          <p:nvPr>
+            <p:ph type="title"/>
+          </p:nvPr>
+        </p:nvSpPr>
+        <p:spPr>
+          <a:xfrm>
+            <a:off x="827425" y="3710450"/>
+            <a:ext cx="3737400" cy="3821400"/>
+          </a:xfrm>
+          <a:prstGeom prst="rect">
+            <a:avLst/>
+          </a:prstGeom>
+          <a:noFill/>
+          <a:ln>
+            <a:noFill/>
+          </a:ln>
+        </p:spPr>
+        <p:txBody>
+          <a:bodyPr anchorCtr="0" anchor="ctr" bIns="45700" lIns="91425" spcFirstLastPara="1" rIns="91425" wrap="square" tIns="45700">
+            <a:normAutofit/>
+          </a:bodyPr>
+          <a:lstStyle/>
+          <a:p>
+            <a:pPr indent="0" lvl="0" marL="0" rtl="0" algn="l">
+              <a:lnSpc>
+                <a:spcPct val="90000"/>
+              </a:lnSpc>
+              <a:spcBef>
+                <a:spcPts val="0"/>
+              </a:spcBef>
+              <a:spcAft>
+                <a:spcPts val="0"/>
+              </a:spcAft>
+              <a:buClr>
+                <a:srgbClr val="1C3C5C"/>
+              </a:buClr>
+              <a:buSzPts val="3600"/>
+              <a:buFont typeface="Arial"/>
+              <a:buNone/>
+            </a:pPr>
+            <a:r>
+              <a:rPr b="1" lang="pt-BR" sz="3600">
+                <a:solidFill>
+                  <a:srgbClr val="1C3C5C"/>
+                </a:solidFill>
+                <a:latin typeface="Arial"/>
+                <a:ea typeface="Arial"/>
+                <a:cs typeface="Arial"/>
+                <a:sym typeface="Arial"/>
+              </a:rPr>
+              <a:t>Requisitos para implantação </a:t>
+            </a:r>
+            <a:endParaRPr/>
+          </a:p>
+        </p:txBody>
+      </p:sp>
+      <p:sp>
+        <p:nvSpPr>
+          <p:cNvPr id="156" name="Google Shape;156;p4"/>
+          <p:cNvSpPr/>
+          <p:nvPr/>
+        </p:nvSpPr>
+        <p:spPr>
+          <a:xfrm>
+            <a:off x="5047075" y="4997450"/>
+            <a:ext cx="6263700" cy="1247400"/>
+          </a:xfrm>
+          <a:prstGeom prst="roundRect">
+            <a:avLst>
+              <a:gd fmla="val 10000" name="adj"/>
+            </a:avLst>
+          </a:prstGeom>
+          <a:solidFill>
+            <a:schemeClr val="accent1"/>
+          </a:solidFill>
+          <a:ln>
+            <a:noFill/>
+          </a:ln>
+        </p:spPr>
+        <p:txBody>
+          <a:bodyPr anchorCtr="0" anchor="ctr" bIns="91425" lIns="91425" spcFirstLastPara="1" rIns="91425" wrap="square" tIns="91425">
+            <a:noAutofit/>
+          </a:bodyPr>
+          <a:lstStyle/>
+          <a:p>
+            <a:pPr indent="0" lvl="0" marL="0" marR="0" rtl="0" algn="l">
+              <a:lnSpc>
+                <a:spcPct val="100000"/>
+              </a:lnSpc>
+              <a:spcBef>
+                <a:spcPts val="0"/>
+              </a:spcBef>
+              <a:spcAft>
+                <a:spcPts val="0"/>
+              </a:spcAft>
+              <a:buClr>
+                <a:srgbClr val="000000"/>
+              </a:buClr>
+              <a:buSzPts val="1400"/>
+              <a:buFont typeface="Arial"/>
+              <a:buNone/>
+            </a:pPr>
+            <a:r>
+              <a:t/>
+            </a:r>
+            <a:endParaRPr b="0" i="0" sz="1400" u="none" cap="none" strike="noStrike">
+              <a:solidFill>
+                <a:srgbClr val="000000"/>
+              </a:solidFill>
+              <a:latin typeface="Arial"/>
+              <a:ea typeface="Arial"/>
+              <a:cs typeface="Arial"/>
+              <a:sym typeface="Arial"/>
+            </a:endParaRPr>
+          </a:p>
+        </p:txBody>
+      </p:sp>
+      <p:sp>
+        <p:nvSpPr>
+          <p:cNvPr id="157" name="Google Shape;157;p4"/>
+          <p:cNvSpPr txBox="1"/>
+          <p:nvPr/>
+        </p:nvSpPr>
+        <p:spPr>
+          <a:xfrm>
+            <a:off x="5836636" y="5196200"/>
+            <a:ext cx="5282100" cy="849900"/>
+          </a:xfrm>
+          <a:prstGeom prst="rect">
+            <a:avLst/>
+          </a:prstGeom>
+          <a:noFill/>
+          <a:ln>
+            <a:noFill/>
+          </a:ln>
+        </p:spPr>
+        <p:txBody>
+          <a:bodyPr anchorCtr="0" anchor="ctr" bIns="89925" lIns="89925" spcFirstLastPara="1" rIns="89925" wrap="square" tIns="89925">
+            <a:noAutofit/>
+          </a:bodyPr>
+          <a:lstStyle/>
+          <a:p>
+            <a:pPr indent="0" lvl="0" marL="0" marR="0" rtl="0" algn="l">
+              <a:lnSpc>
+                <a:spcPct val="100000"/>
+              </a:lnSpc>
+              <a:spcBef>
+                <a:spcPts val="0"/>
+              </a:spcBef>
+              <a:spcAft>
+                <a:spcPts val="0"/>
+              </a:spcAft>
+              <a:buClr>
+                <a:schemeClr val="dk1"/>
+              </a:buClr>
+              <a:buSzPts val="1900"/>
+              <a:buFont typeface="Arial"/>
+              <a:buNone/>
+            </a:pPr>
+            <a:r>
+              <a:rPr lang="pt-BR" sz="1900">
+                <a:solidFill>
+                  <a:schemeClr val="dk1"/>
+                </a:solidFill>
+              </a:rPr>
+              <a:t>Domínio</a:t>
+            </a:r>
+            <a:r>
+              <a:rPr lang="pt-BR" sz="1900">
+                <a:solidFill>
+                  <a:schemeClr val="dk1"/>
+                </a:solidFill>
+              </a:rPr>
+              <a:t> e um Host para hospedar a aplicação</a:t>
+            </a:r>
+            <a:endParaRPr b="0" i="0" sz="1400" u="none" cap="none" strike="noStrike">
+              <a:solidFill>
+                <a:srgbClr val="000000"/>
+              </a:solidFill>
+              <a:latin typeface="Arial"/>
+              <a:ea typeface="Arial"/>
+              <a:cs typeface="Arial"/>
+              <a:sym typeface="Arial"/>
+            </a:endParaRPr>
+          </a:p>
+        </p:txBody>
+      </p:sp>
+      <p:sp>
+        <p:nvSpPr>
+          <p:cNvPr id="158" name="Google Shape;158;p4"/>
+          <p:cNvSpPr/>
+          <p:nvPr/>
+        </p:nvSpPr>
+        <p:spPr>
+          <a:xfrm>
+            <a:off x="5191050" y="5282600"/>
+            <a:ext cx="645600" cy="677100"/>
+          </a:xfrm>
+          <a:prstGeom prst="rect">
+            <a:avLst/>
+          </a:prstGeom>
+          <a:blipFill rotWithShape="1">
+            <a:blip r:embed="rId6">
+              <a:alphaModFix/>
+            </a:blip>
+            <a:stretch>
+              <a:fillRect b="0" l="0" r="0" t="0"/>
+            </a:stretch>
+          </a:blipFill>
+          <a:ln>
+            <a:noFill/>
+          </a:ln>
+          <a:effectLst>
+            <a:outerShdw blurRad="57150" rotWithShape="0" algn="ctr" dir="5400000" dist="19050">
+              <a:srgbClr val="000000">
+                <a:alpha val="62750"/>
+              </a:srgbClr>
+            </a:outerShdw>
+          </a:effectLst>
+        </p:spPr>
+        <p:txBody>
+          <a:bodyPr anchorCtr="0" anchor="ctr" bIns="91425" lIns="91425" spcFirstLastPara="1" rIns="91425" wrap="square" tIns="91425">
+            <a:noAutofit/>
+          </a:bodyPr>
+          <a:lstStyle/>
+          <a:p>
+            <a:pPr indent="0" lvl="0" marL="0" marR="0" rtl="0" algn="l">
+              <a:lnSpc>
+                <a:spcPct val="100000"/>
+              </a:lnSpc>
+              <a:spcBef>
+                <a:spcPts val="0"/>
+              </a:spcBef>
+              <a:spcAft>
+                <a:spcPts val="0"/>
+              </a:spcAft>
+              <a:buClr>
+                <a:srgbClr val="000000"/>
+              </a:buClr>
+              <a:buSzPts val="1400"/>
+              <a:buFont typeface="Arial"/>
+              <a:buNone/>
+            </a:pPr>
+            <a:r>
+              <a:t/>
+            </a:r>
+            <a:endParaRPr b="0" i="0" sz="1400" u="none" cap="none" strike="noStrike">
+              <a:solidFill>
+                <a:srgbClr val="000000"/>
+              </a:solidFill>
+              <a:latin typeface="Arial"/>
+              <a:ea typeface="Arial"/>
+              <a:cs typeface="Arial"/>
+              <a:sym typeface="Arial"/>
+            </a:endParaRPr>
+          </a:p>
+        </p:txBody>
+      </p:sp>
     </p:spTree>
   </p:cSld>
   <p:clrMapOvr>
@@ -18595,7 +19128,7 @@
   <p:cSld>
     <p:spTree>
       <p:nvGrpSpPr>
-        <p:cNvPr id="154" name="Shape 154"/>
+        <p:cNvPr id="163" name="Shape 163"/>
         <p:cNvGrpSpPr/>
         <p:nvPr/>
       </p:nvGrpSpPr>
@@ -18609,7 +19142,7 @@
       </p:grpSpPr>
       <p:sp>
         <p:nvSpPr>
-          <p:cNvPr id="155" name="Google Shape;155;p5"/>
+          <p:cNvPr id="164" name="Google Shape;164;p5"/>
           <p:cNvSpPr txBox="1"/>
           <p:nvPr>
             <p:ph type="title"/>
@@ -18669,7 +19202,7 @@
       </p:sp>
       <p:grpSp>
         <p:nvGrpSpPr>
-          <p:cNvPr id="156" name="Google Shape;156;p5"/>
+          <p:cNvPr id="165" name="Google Shape;165;p5"/>
           <p:cNvGrpSpPr/>
           <p:nvPr/>
         </p:nvGrpSpPr>
@@ -18683,7 +19216,7 @@
         </p:grpSpPr>
         <p:sp>
           <p:nvSpPr>
-            <p:cNvPr id="157" name="Google Shape;157;p5"/>
+            <p:cNvPr id="166" name="Google Shape;166;p5"/>
             <p:cNvSpPr/>
             <p:nvPr/>
           </p:nvSpPr>
@@ -18751,7 +19284,7 @@
         </p:sp>
         <p:sp>
           <p:nvSpPr>
-            <p:cNvPr id="158" name="Google Shape;158;p5"/>
+            <p:cNvPr id="167" name="Google Shape;167;p5"/>
             <p:cNvSpPr txBox="1"/>
             <p:nvPr/>
           </p:nvSpPr>
@@ -18853,7 +19386,7 @@
       </p:grpSp>
       <p:pic>
         <p:nvPicPr>
-          <p:cNvPr descr="Interface gráfica do usuário, Texto, Aplicativo, chat ou mensagem de texto&#10;&#10;O conteúdo gerado por IA pode estar incorreto." id="159" name="Google Shape;159;p5"/>
+          <p:cNvPr descr="Interface gráfica do usuário, Texto, Aplicativo, chat ou mensagem de texto&#10;&#10;O conteúdo gerado por IA pode estar incorreto." id="168" name="Google Shape;168;p5"/>
           <p:cNvPicPr preferRelativeResize="0"/>
           <p:nvPr/>
         </p:nvPicPr>
@@ -18893,7 +19426,7 @@
       </p:pic>
       <p:pic>
         <p:nvPicPr>
-          <p:cNvPr descr="Interface gráfica do usuário, Aplicativo&#10;&#10;O conteúdo gerado por IA pode estar incorreto." id="160" name="Google Shape;160;p5"/>
+          <p:cNvPr descr="Interface gráfica do usuário, Aplicativo&#10;&#10;O conteúdo gerado por IA pode estar incorreto." id="169" name="Google Shape;169;p5"/>
           <p:cNvPicPr preferRelativeResize="0"/>
           <p:nvPr/>
         </p:nvPicPr>
@@ -18933,7 +19466,7 @@
       </p:pic>
       <p:sp>
         <p:nvSpPr>
-          <p:cNvPr id="161" name="Google Shape;161;p5"/>
+          <p:cNvPr id="170" name="Google Shape;170;p5"/>
           <p:cNvSpPr/>
           <p:nvPr/>
         </p:nvSpPr>
@@ -19010,7 +19543,7 @@
   <p:cSld>
     <p:spTree>
       <p:nvGrpSpPr>
-        <p:cNvPr id="166" name="Shape 166"/>
+        <p:cNvPr id="175" name="Shape 175"/>
         <p:cNvGrpSpPr/>
         <p:nvPr/>
       </p:nvGrpSpPr>
@@ -19024,7 +19557,7 @@
       </p:grpSpPr>
       <p:pic>
         <p:nvPicPr>
-          <p:cNvPr id="167" name="Google Shape;167;g3c425a62f68_0_0" title="Plataforma Obeci.mp4">
+          <p:cNvPr id="176" name="Google Shape;176;g3c425a62f68_0_0" title="Plataforma Obeci.mp4">
             <a:hlinkClick r:id="rId3"/>
           </p:cNvPr>
           <p:cNvPicPr preferRelativeResize="0"/>
@@ -19094,7 +19627,7 @@
                                           </p:stCondLst>
                                         </p:cTn>
                                         <p:tgtEl>
-                                          <p:spTgt spid="167"/>
+                                          <p:spTgt spid="176"/>
                                         </p:tgtEl>
                                         <p:attrNameLst>
                                           <p:attrName>style.visibility</p:attrName>
@@ -19108,7 +19641,7 @@
                                       <p:cBhvr>
                                         <p:cTn dur="1000"/>
                                         <p:tgtEl>
-                                          <p:spTgt spid="167"/>
+                                          <p:spTgt spid="176"/>
                                         </p:tgtEl>
                                       </p:cBhvr>
                                     </p:animEffect>
@@ -19151,7 +19684,7 @@
   <p:cSld>
     <p:spTree>
       <p:nvGrpSpPr>
-        <p:cNvPr id="172" name="Shape 172"/>
+        <p:cNvPr id="181" name="Shape 181"/>
         <p:cNvGrpSpPr/>
         <p:nvPr/>
       </p:nvGrpSpPr>
@@ -19165,7 +19698,7 @@
       </p:grpSpPr>
       <p:sp>
         <p:nvSpPr>
-          <p:cNvPr id="173" name="Google Shape;173;g3c4373e66a4_0_0"/>
+          <p:cNvPr id="182" name="Google Shape;182;g3c4373e66a4_0_0"/>
           <p:cNvSpPr txBox="1"/>
           <p:nvPr>
             <p:ph type="title"/>
@@ -19186,11 +19719,113 @@
         </p:spPr>
         <p:txBody>
           <a:bodyPr anchorCtr="0" anchor="ctr" bIns="45700" lIns="91425" spcFirstLastPara="1" rIns="91425" wrap="square" tIns="45700">
-            <a:normAutofit/>
+            <a:normAutofit fontScale="90000"/>
           </a:bodyPr>
           <a:lstStyle/>
           <a:p>
             <a:pPr indent="0" lvl="0" marL="0" rtl="0" algn="ctr">
+              <a:spcBef>
+                <a:spcPts val="0"/>
+              </a:spcBef>
+              <a:spcAft>
+                <a:spcPts val="0"/>
+              </a:spcAft>
+              <a:buClr>
+                <a:schemeClr val="dk1"/>
+              </a:buClr>
+              <a:buSzPct val="27500"/>
+              <a:buFont typeface="Arial"/>
+              <a:buNone/>
+            </a:pPr>
+            <a:r>
+              <a:rPr b="1" lang="pt-BR" sz="4000">
+                <a:solidFill>
+                  <a:srgbClr val="1C3C5C"/>
+                </a:solidFill>
+                <a:latin typeface="Arial"/>
+                <a:ea typeface="Arial"/>
+                <a:cs typeface="Arial"/>
+                <a:sym typeface="Arial"/>
+              </a:rPr>
+              <a:t>Investir em nossa plataforma é garantir crescimento contínuo.</a:t>
+            </a:r>
+            <a:endParaRPr b="1" sz="4000">
+              <a:solidFill>
+                <a:srgbClr val="1C3C5C"/>
+              </a:solidFill>
+              <a:latin typeface="Arial"/>
+              <a:ea typeface="Arial"/>
+              <a:cs typeface="Arial"/>
+              <a:sym typeface="Arial"/>
+            </a:endParaRPr>
+          </a:p>
+          <a:p>
+            <a:pPr indent="0" lvl="0" marL="0" rtl="0" algn="ctr">
+              <a:spcBef>
+                <a:spcPts val="0"/>
+              </a:spcBef>
+              <a:spcAft>
+                <a:spcPts val="0"/>
+              </a:spcAft>
+              <a:buClr>
+                <a:schemeClr val="dk1"/>
+              </a:buClr>
+              <a:buSzPct val="27500"/>
+              <a:buFont typeface="Arial"/>
+              <a:buNone/>
+            </a:pPr>
+            <a:r>
+              <a:rPr b="1" lang="pt-BR" sz="4000">
+                <a:solidFill>
+                  <a:srgbClr val="1C3C5C"/>
+                </a:solidFill>
+                <a:latin typeface="Arial"/>
+                <a:ea typeface="Arial"/>
+                <a:cs typeface="Arial"/>
+                <a:sym typeface="Arial"/>
+              </a:rPr>
+              <a:t>Mais que ensino, resultados que fazem diferença.</a:t>
+            </a:r>
+            <a:endParaRPr b="1" sz="4000">
+              <a:solidFill>
+                <a:srgbClr val="1C3C5C"/>
+              </a:solidFill>
+              <a:latin typeface="Arial"/>
+              <a:ea typeface="Arial"/>
+              <a:cs typeface="Arial"/>
+              <a:sym typeface="Arial"/>
+            </a:endParaRPr>
+          </a:p>
+          <a:p>
+            <a:pPr indent="0" lvl="0" marL="0" rtl="0" algn="ctr">
+              <a:spcBef>
+                <a:spcPts val="0"/>
+              </a:spcBef>
+              <a:spcAft>
+                <a:spcPts val="0"/>
+              </a:spcAft>
+              <a:buClr>
+                <a:schemeClr val="dk1"/>
+              </a:buClr>
+              <a:buSzPct val="27500"/>
+              <a:buFont typeface="Arial"/>
+              <a:buNone/>
+            </a:pPr>
+            <a:r>
+              <a:t/>
+            </a:r>
+            <a:endParaRPr b="1" sz="4000">
+              <a:solidFill>
+                <a:srgbClr val="1C3C5C"/>
+              </a:solidFill>
+              <a:latin typeface="Arial"/>
+              <a:ea typeface="Arial"/>
+              <a:cs typeface="Arial"/>
+              <a:sym typeface="Arial"/>
+            </a:endParaRPr>
+          </a:p>
+          <a:p>
+            <a:pPr indent="0" lvl="0" marL="0" rtl="0" algn="ctr">
               <a:lnSpc>
                 <a:spcPct val="90000"/>
               </a:lnSpc>
@@ -19203,7 +19838,7 @@
               <a:buClr>
                 <a:srgbClr val="1C3C5C"/>
               </a:buClr>
-              <a:buSzPts val="4000"/>
+              <a:buSzPct val="100000"/>
               <a:buFont typeface="Arial"/>
               <a:buNone/>
             </a:pPr>

--- a/documentos/Apresentação Final do Projeto.pptx
+++ b/documentos/Apresentação Final do Projeto.pptx
@@ -17314,9 +17314,9 @@
           <p:grpSpPr>
             <a:xfrm>
               <a:off x="832104" y="1638116"/>
-              <a:ext cx="10515600" cy="969878"/>
+              <a:ext cx="10515600" cy="916611"/>
               <a:chOff x="838200" y="1928074"/>
-              <a:chExt cx="10515600" cy="969878"/>
+              <a:chExt cx="10515600" cy="916611"/>
             </a:xfrm>
           </p:grpSpPr>
           <p:sp>
@@ -17516,8 +17516,8 @@
             </p:nvSpPr>
             <p:spPr>
               <a:xfrm>
-                <a:off x="1756724" y="1981341"/>
-                <a:ext cx="9456913" cy="916611"/>
+                <a:off x="1756724" y="1928129"/>
+                <a:ext cx="9456900" cy="916500"/>
               </a:xfrm>
               <a:prstGeom prst="rect">
                 <a:avLst/>
@@ -18029,8 +18029,8 @@
         </p:nvSpPr>
         <p:spPr>
           <a:xfrm>
-            <a:off x="827425" y="356800"/>
-            <a:ext cx="3737400" cy="3821400"/>
+            <a:off x="775000" y="1149938"/>
+            <a:ext cx="3737400" cy="2097300"/>
           </a:xfrm>
           <a:prstGeom prst="rect">
             <a:avLst/>
@@ -18087,7 +18087,7 @@
         </p:nvGrpSpPr>
         <p:grpSpPr>
           <a:xfrm>
-            <a:off x="5047109" y="806165"/>
+            <a:off x="5047109" y="512565"/>
             <a:ext cx="6263641" cy="3372029"/>
             <a:chOff x="5090159" y="1516740"/>
             <a:chExt cx="6263641" cy="3372029"/>
@@ -18863,8 +18863,8 @@
         </p:nvSpPr>
         <p:spPr>
           <a:xfrm>
-            <a:off x="827425" y="3710450"/>
-            <a:ext cx="3737400" cy="3821400"/>
+            <a:off x="431200" y="3778250"/>
+            <a:ext cx="4425000" cy="2687100"/>
           </a:xfrm>
           <a:prstGeom prst="rect">
             <a:avLst/>
@@ -18907,7 +18907,7 @@
                 <a:cs typeface="Arial"/>
                 <a:sym typeface="Arial"/>
               </a:rPr>
-              <a:t>Requisitos para implantação </a:t>
+              <a:t>Requisitos e Tecnologias para implantação </a:t>
             </a:r>
             <a:endParaRPr/>
           </a:p>
@@ -18921,8 +18921,8 @@
         </p:nvSpPr>
         <p:spPr>
           <a:xfrm>
-            <a:off x="5047075" y="4997450"/>
-            <a:ext cx="6263700" cy="1247400"/>
+            <a:off x="5047075" y="4472650"/>
+            <a:ext cx="6263700" cy="1169100"/>
           </a:xfrm>
           <a:prstGeom prst="roundRect">
             <a:avLst>
@@ -18982,8 +18982,8 @@
         </p:nvSpPr>
         <p:spPr>
           <a:xfrm>
-            <a:off x="5836636" y="5196200"/>
-            <a:ext cx="5282100" cy="849900"/>
+            <a:off x="5836636" y="4472650"/>
+            <a:ext cx="5282100" cy="1169100"/>
           </a:xfrm>
           <a:prstGeom prst="rect">
             <a:avLst/>
@@ -19030,16 +19030,44 @@
                   <a:schemeClr val="dk1"/>
                 </a:solidFill>
               </a:rPr>
-              <a:t> e um Host para hospedar a aplicação</a:t>
+              <a:t> e um Host para hospedar a aplicação;</a:t>
             </a:r>
-            <a:endParaRPr b="0" i="0" sz="1400" u="none" cap="none" strike="noStrike">
+            <a:endParaRPr sz="1900">
               <a:solidFill>
-                <a:srgbClr val="000000"/>
+                <a:schemeClr val="dk1"/>
               </a:solidFill>
-              <a:latin typeface="Arial"/>
-              <a:ea typeface="Arial"/>
-              <a:cs typeface="Arial"/>
-              <a:sym typeface="Arial"/>
+            </a:endParaRPr>
+          </a:p>
+          <a:p>
+            <a:pPr indent="0" lvl="0" marL="0" marR="0" rtl="0" algn="l">
+              <a:lnSpc>
+                <a:spcPct val="100000"/>
+              </a:lnSpc>
+              <a:spcBef>
+                <a:spcPts val="0"/>
+              </a:spcBef>
+              <a:spcAft>
+                <a:spcPts val="0"/>
+              </a:spcAft>
+              <a:buClr>
+                <a:schemeClr val="dk1"/>
+              </a:buClr>
+              <a:buSzPts val="1900"/>
+              <a:buFont typeface="Arial"/>
+              <a:buNone/>
+            </a:pPr>
+            <a:r>
+              <a:rPr lang="pt-BR" sz="1900">
+                <a:solidFill>
+                  <a:schemeClr val="dk1"/>
+                </a:solidFill>
+              </a:rPr>
+              <a:t>PostgreSQL, JAVA, Next.js e Spring boot, JavaScript e React.</a:t>
+            </a:r>
+            <a:endParaRPr sz="1900">
+              <a:solidFill>
+                <a:schemeClr val="dk1"/>
+              </a:solidFill>
             </a:endParaRPr>
           </a:p>
         </p:txBody>
@@ -19052,8 +19080,8 @@
         </p:nvSpPr>
         <p:spPr>
           <a:xfrm>
-            <a:off x="5191050" y="5282600"/>
-            <a:ext cx="645600" cy="677100"/>
+            <a:off x="5106725" y="4657900"/>
+            <a:ext cx="729900" cy="798600"/>
           </a:xfrm>
           <a:prstGeom prst="rect">
             <a:avLst/>
@@ -19747,44 +19775,7 @@
                 <a:cs typeface="Arial"/>
                 <a:sym typeface="Arial"/>
               </a:rPr>
-              <a:t>Investir em nossa plataforma é garantir crescimento contínuo.</a:t>
-            </a:r>
-            <a:endParaRPr b="1" sz="4000">
-              <a:solidFill>
-                <a:srgbClr val="1C3C5C"/>
-              </a:solidFill>
-              <a:latin typeface="Arial"/>
-              <a:ea typeface="Arial"/>
-              <a:cs typeface="Arial"/>
-              <a:sym typeface="Arial"/>
-            </a:endParaRPr>
-          </a:p>
-          <a:p>
-            <a:pPr indent="0" lvl="0" marL="0" rtl="0" algn="ctr">
-              <a:spcBef>
-                <a:spcPts val="0"/>
-              </a:spcBef>
-              <a:spcAft>
-                <a:spcPts val="0"/>
-              </a:spcAft>
-              <a:buClr>
-                <a:schemeClr val="dk1"/>
-              </a:buClr>
-              <a:buSzPct val="27500"/>
-              <a:buFont typeface="Arial"/>
-              <a:buNone/>
-            </a:pPr>
-            <a:r>
-              <a:rPr b="1" lang="pt-BR" sz="4000">
-                <a:solidFill>
-                  <a:srgbClr val="1C3C5C"/>
-                </a:solidFill>
-                <a:latin typeface="Arial"/>
-                <a:ea typeface="Arial"/>
-                <a:cs typeface="Arial"/>
-                <a:sym typeface="Arial"/>
-              </a:rPr>
-              <a:t>Mais que ensino, resultados que fazem diferença.</a:t>
+              <a:t>Plataforma OBECI, o lugar onde o universo da criança é eternizado.</a:t>
             </a:r>
             <a:endParaRPr b="1" sz="4000">
               <a:solidFill>
